--- a/Curso Gas B/02 - ITC-ICG 02-03-04 - Almacenamiento GLP y plantas GNL/02 - ITC-ICG 02-03-04 - Almacenamiento GLP y plantas GNL - Vídeo 1.pptx
+++ b/Curso Gas B/02 - ITC-ICG 02-03-04 - Almacenamiento GLP y plantas GNL/02 - ITC-ICG 02-03-04 - Almacenamiento GLP y plantas GNL - Vídeo 1.pptx
@@ -22,6 +22,7 @@
     <p:sldId id="270" r:id="rId22"/>
     <p:sldId id="271" r:id="rId23"/>
     <p:sldId id="272" r:id="rId24"/>
+    <p:sldId id="273" r:id="rId25"/>
   </p:sldIdLst>
   <p:sldSz cx="12191695" cy="6858000" type="screen4x3"/>
   <p:notesSz cx="6858000" cy="9144000"/>
@@ -518,12 +519,12 @@
           <a:lstStyle/>
           <a:p>
             <a:r>
-              <a:t>N1: ¿Dónde se guardan y reparten las bombonas de butano y propano antes de llegar a tu casa?</a:t>
-            </a:r>
-          </a:p>
-          <a:p>
-            <a:r>
-              <a:t>N2: En los llamados centros de envases de GLP, la nave de las bombonas. La ITC-ICG cero dos es su manual. En este primer vídeo montamos los cimientos: para qué sirve, cómo se clasifican los centros por kilos, cómo se calcula esa capacidad y todas las normas de diseño general, para rematar con las categorías más grandes y exigentes, la primera, la segunda y la tercera. Aquí caen las distancias de seguridad, los cerramientos, las alturas de apilado y las dos grandes tablas. Graba las cifras, porque el examen las pregunta tal cual.</a:t>
+              <a:t>N1: ¿Dónde se guardan las bombonas de butano y de propano antes de llegar a mi casa?</a:t>
+            </a:r>
+          </a:p>
+          <a:p>
+            <a:r>
+              <a:t>N2: En los centros de envases de GLP, lo que en el oficio se llama la nave de las bombonas. Y esa nave tiene su propio manual: la ITC-ICG cero dos. En este primer vídeo montamos los cimientos de la instrucción. Vemos para qué sirve, cómo se clasifican los centros por kilos de gas, cómo se calcula esa capacidad con una fórmula sencilla, y todas las normas de diseño general. Rematamos con las categorías más grandes y exigentes, la primera, la segunda y la tercera, donde caen las distancias de seguridad, los cerramientos, las alturas de apilado y las dos grandes tablas. Un aviso de amigo: graba las cifras, porque el examen las pregunta tal cual salen aquí.</a:t>
             </a:r>
           </a:p>
         </p:txBody>
@@ -593,12 +594,12 @@
           <a:lstStyle/>
           <a:p>
             <a:r>
-              <a:t>N1: ¿Qué diferencia hay entre distancia interior y exterior?</a:t>
-            </a:r>
-          </a:p>
-          <a:p>
-            <a:r>
-              <a:t>N2: Piensa en tu parcela. La distancia interior es la que hay entre las bombonas y tus propios edificios, la oficina, el vestuario: es de puertas para dentro, y vale seis, seis y dos metros para primera, segunda y tercera. La exterior es la que hay entre las bombonas y lo que no es tuyo, la finca del vecino o la carretera pública: es de puertas para fuera, y vale veinte, quince y diez metros. Fíjate: la exterior siempre es más grande, porque proteger a los de fuera pesa más. Y recuerda que estos centros grandes solo se pueden montar en zonas no residenciales.</a:t>
+              <a:t>N1: ¿Qué diferencia hay entre distancia interior y distancia exterior?</a:t>
+            </a:r>
+          </a:p>
+          <a:p>
+            <a:r>
+              <a:t>N2: Piénsalo con tu propia parcela. La distancia interior es la que hay entre las bombonas y tus propios edificios, la oficina o el vestuario del centro: es de puertas para dentro, y vale seis, seis y dos metros para primera, segunda y tercera. La distancia exterior es la que hay entre las bombonas y lo que no es tuyo, la finca del vecino o la carretera pública: es de puertas para fuera, y vale veinte, quince y diez metros, medida entre los puntos más próximos. Regla de memoria: la exterior siempre es más grande, porque proteger al que está fuera, que no ha elegido tener gas al lado, pesa más. Y recuerda que estos centros grandes solo se pueden montar en zonas no residenciales.</a:t>
             </a:r>
           </a:p>
         </p:txBody>
@@ -673,7 +674,7 @@
           </a:p>
           <a:p>
             <a:r>
-              <a:t>N2: Si al otro lado de tu valla hay un colegio, un hospital, un hotel, un cuartel, un mercado, un edificio de mucha gente, o bien una vía de tren, un tranvía o una línea eléctrica aérea de alta tensión, la distancia exterior crece diez metros más. La lógica es pura: donde hay mucha gente junta, o donde hay una fuente de chispa e incendio como la catenaria o la alta tensión, te alejas más. No aprendas la lista palabra por palabra; quédate con la idea: sitios con mucha gente, más líneas eléctricas o férreas, igual a diez metros más.</a:t>
+              <a:t>N2: Cuando al otro lado de tu valla hay algo especialmente delicado. Si tienes un colegio, un hospital, un hotel, un cuartel, un mercado o cualquier edificio de uso colectivo, o bien una vía de tren, un tranvía o una línea eléctrica aérea de alta tensión, la distancia exterior crece diez metros más. La lógica es de sentido común: donde hay mucha gente junta, o donde hay una fuente de chispa e incendio como la catenaria o la alta tensión, te alejas más. No te aprendas la lista palabra por palabra; quédate con la idea de fondo: mucha gente junta, más líneas eléctricas o férreas, igual a diez metros más.</a:t>
             </a:r>
           </a:p>
         </p:txBody>
@@ -743,12 +744,12 @@
           <a:lstStyle/>
           <a:p>
             <a:r>
-              <a:t>N1: ¿Cómo se cierra un centro grande por fuera?</a:t>
-            </a:r>
-          </a:p>
-          <a:p>
-            <a:r>
-              <a:t>N2: Con un cerramiento que tiene dos calidades. El lado que da a la calle o a donde pasa gente es un muro serio, continuo, resistente al fuego, de dos metros y medio de altura. Los lados interiores o traseros pueden ser malla metálica, más barata, de dos metros. Recuerda las dos alturas emparejadas con su material: muro dos coma cinco, malla dos. Y dos detalles preguntones: el cerramiento va a diez metros como mínimo del almacenamiento, y todos los edificios del centro quedan dentro de él.</a:t>
+              <a:t>N1: ¿Cómo se cierra por fuera un centro grande?</a:t>
+            </a:r>
+          </a:p>
+          <a:p>
+            <a:r>
+              <a:t>N2: Con un cerramiento que tiene dos calidades distintas, según lo que haya al otro lado. El lado que da a la calle o a donde pasa gente es un muro serio: continuo, resistente al fuego, de dos metros y medio de altura. Los lados interiores o traseros, donde no pasa nadie, pueden ser de malla metálica, más barata, de dos metros. Empareja cada material con su altura: muro dos coma cinco, malla dos. Y no te pierdas dos detalles muy preguntones: el cerramiento va a diez metros como mínimo del almacenamiento de envases llenos, y todos los edificios del centro quedan dentro de él, ninguno fuera.</a:t>
             </a:r>
           </a:p>
         </p:txBody>
@@ -818,12 +819,12 @@
           <a:lstStyle/>
           <a:p>
             <a:r>
-              <a:t>N1: ¿Cuántas alturas de bombonas se pueden apilar?</a:t>
-            </a:r>
-          </a:p>
-          <a:p>
-            <a:r>
-              <a:t>N2: Depende del peso. Las domésticas, esas de hasta quince kilos, la butano naranja de toda la vida, se apilan en jaulas: cuatro alturas si están llenas, seis si están vacías, porque las vacías pesan menos y aguantan más pisos. Pero las gordas, las de más de quince kilos, van a ras de suelo, una sola altura, estén llenas o vacías. Truco: la pequeña sube, la grande no. Las jaulas se colocan de modo que entre la carretilla elevadora, y para moverlas nada de elementos magnéticos ni cuerdas o eslingas chapuceras: una jaula que cae es un golpe en la válvula y una fuga garantizada.</a:t>
+              <a:t>N1: ¿Cuántas alturas de bombonas puedo apilar?</a:t>
+            </a:r>
+          </a:p>
+          <a:p>
+            <a:r>
+              <a:t>N2: Depende del peso de la botella, y la regla es muy lógica. Las domésticas, esas de hasta quince kilos, la butano naranja de toda la vida, se apilan en jaulas: cuatro alturas si van llenas y seis si van vacías, porque una vacía pesa menos y aguanta más pisos encima. En cambio, las gordas, las de más de quince kilos, van a ras de suelo, una sola altura, tanto llenas como vacías. Truco para el examen: la pequeña sube, la grande no. Las jaulas se colocan de modo que entre la carretilla elevadora, y para moverlas nada de imanes ni de cuerdas o eslingas chapuceras. ¿Por qué tanto cuidado? Porque una jaula que cae es un golpe seco en la válvula, y eso es una fuga garantizada.</a:t>
             </a:r>
           </a:p>
         </p:txBody>
@@ -893,12 +894,12 @@
           <a:lstStyle/>
           <a:p>
             <a:r>
-              <a:t>N1: ¿Con qué se apaga un incendio en un centro de primera?</a:t>
-            </a:r>
-          </a:p>
-          <a:p>
-            <a:r>
-              <a:t>N2: Con agua a presión. La red da cinco kilos por centímetro cuadrado de presión, con bocas de incendio equipadas del tipo de ene veinticinco, repartidas a diez metros como mínimo del almacenamiento de envases llenos. Si no tienes agua de la calle, tu depósito propio y las bombas deben aguantar noventa minutos funcionando a esa presión. Y recuerda el número de bocas: seis en primera categoría, dos en segunda y tercera. La primera categoría además lleva alarma de incendios y vigilancia permanente fuera del horario de trabajo. Truco visual: primera categoría, primera línea de defensa, seis bocas y alarma.</a:t>
+              <a:t>N1: ¿Con qué se apaga un incendio en un centro de primera categoría?</a:t>
+            </a:r>
+          </a:p>
+          <a:p>
+            <a:r>
+              <a:t>N2: Con agua a presión, y hay tres cifras que van siempre juntas. La red da cinco kilos por centímetro cuadrado de presión, con bocas de incendio equipadas del tipo de ene veinticinco, repartidas a diez metros como mínimo del almacenamiento de envases llenos. Y si no tienes agua de la calle, tu depósito propio y las bombas tienen que aguantar noventa minutos funcionando a esa presión, que es el tiempo para que lleguen y trabajen los bomberos. Retén también el número de bocas: seis en primera categoría, dos en segunda y tercera. La primera, además, lleva alarma de incendios y vigilancia permanente fuera del horario de trabajo. Truco visual: primera categoría, primera línea de defensa, seis bocas y alarma.</a:t>
             </a:r>
           </a:p>
         </p:txBody>
@@ -968,12 +969,12 @@
           <a:lstStyle/>
           <a:p>
             <a:r>
-              <a:t>N1: ¿Hay que memorizar toda la tabla de extintores?</a:t>
-            </a:r>
-          </a:p>
-          <a:p>
-            <a:r>
-              <a:t>N2: No, quédate con la lógica y tres anclas. Primera: cuanto mayor es el centro, más extintores lleva. Segunda: la tercera categoría es la única que va con extintores pequeños, cinco de eficacia veintiuno a, ciento trece b. Tercera: la primera categoría grande crece por tramos, sumando extintores por cada dieciocho mil setecientos cincuenta kilos de más. Y una equivalencia muy preguntable: puedes cambiar un extintor de cuarenta y tres a, ciento ochenta y tres b, por uno de veintiuno a, ciento trece b, pero poniendo el doble. Idea sencilla: un extintor grande equivale a dos pequeños. Y ojo, si no hay agua suficiente, se puede aumentar la dotación de extintores en un cincuenta por ciento.</a:t>
+              <a:t>N1: ¿Tengo que memorizar toda la tabla de extintores?</a:t>
+            </a:r>
+          </a:p>
+          <a:p>
+            <a:r>
+              <a:t>N2: No, tranquilo. Quédate con la lógica y con tres anclas. Primera ancla: cuanto mayor es el centro, más extintores lleva, sin más. Segunda: la tercera categoría es la única que va solo con extintores pequeños, cinco de eficacia veintiuno a, ciento trece b. Tercera: la primera categoría, la más grande, crece por tramos, sumando extintores por cada dieciocho mil setecientos cincuenta kilos que sobrepase. Y una equivalencia que preguntan mucho: puedes cambiar un extintor grande, el de cuarenta y tres a, ciento ochenta y tres b, por el pequeño de veintiuno a, ciento trece b, pero poniendo el doble. Idea sencilla: un extintor grande equivale a dos pequeños. Y un extra: si no hay agua suficiente, la Comunidad Autónoma puede permitir aumentar la dotación de extintores en un cincuenta por ciento en lugar de la red de agua.</a:t>
             </a:r>
           </a:p>
         </p:txBody>
@@ -1048,7 +1049,7 @@
           </a:p>
           <a:p>
             <a:r>
-              <a:t>N2: Tres cosas. El centro va protegido contra las descargas eléctricas atmosféricas, es decir, contra los rayos, y no se permiten transformadores ni aparellaje de alta tensión dentro del recinto. Debe tener comunicación con el exterior por si pasa algo. Y una pieza que verás una y otra vez en este tema: ningún vehículo con motor entra al recinto si no lleva un aparato cortafuegos adaptado al tubo de escape. Es una malla que impide que una chispa o la llama del motor salga al ambiente cargado de gas. Regla sencilla: motor más zona con GLP, igual a cortafuegos obligatorio. Volverá a aparecer en el transporte y en la cuarta y quinta del vídeo dos.</a:t>
+              <a:t>N2: Tres, y conviene tenerlos. Uno: el centro va protegido contra las descargas eléctricas atmosféricas, es decir, contra los rayos, y no se permiten transformadores ni aparellaje de alta tensión dentro del recinto. Dos: debe tener comunicación con el exterior, un teléfono o similar, por si pasa algo. Y tres, una pieza que verás una y otra vez en este tema: ningún vehículo con motor entra al recinto si no lleva un aparato cortafuegos adaptado al tubo de escape. Ese cortafuegos es una malla que impide que una chispa o la llama del motor salga al ambiente cargado de gas. Regla sencilla: motor más zona con GLP, igual a cortafuegos obligatorio. Te reaparecerá en el transporte y en la cuarta y quinta categoría del vídeo dos.</a:t>
             </a:r>
           </a:p>
         </p:txBody>
@@ -1118,12 +1119,97 @@
           <a:lstStyle/>
           <a:p>
             <a:r>
-              <a:t>N1: Si te quedas con tres cosas de este vídeo, que sean estas.</a:t>
-            </a:r>
-          </a:p>
-          <a:p>
-            <a:r>
-              <a:t>N2: Primera: lo primero que se hace al pisar un centro es clasificarlo por kilos y calcular su capacidad con la fórmula, contando envases llenos y vacíos, porque un vacío nunca lo está del todo. Segunda, la que evita la avería gorda: el GLP pesa más que el aire, así que en un recinto cerrado una fuga se embolsa a ras de suelo y con una chispa explota; por eso el almacenamiento es al aire libre, la botella va vertical y el trasvase está prohibido. Y tercera: las distancias sostienen o tumban el proyecto, interior seis, seis y dos, exterior veinte, quince y diez, con diez metros más si al otro lado hay colegio, hospital o alta tensión. El papeleo y las categorías pequeñas llegan en el siguiente vídeo.</a:t>
+              <a:t>N1: Antes de cerrar, dame los cinco imprescindibles de este vídeo.</a:t>
+            </a:r>
+          </a:p>
+          <a:p>
+            <a:r>
+              <a:t>N2: Ahí van, apretados. Uno: la capacidad se calcula multiplicando por cero coma sesenta y cinco y contando los envases vacíos, que también suman. Dos: el almacenamiento es al aire libre, la botella siempre vertical y el trasvase está prohibido. Tres: el recorrido de evacuación no pasa de veinticinco metros. Cuatro: distancias interior seis, seis y dos, y exterior veinte, quince y diez. Y cinco: el cerramiento, muro de dos coma cinco hacia la calle, malla de dos el resto, y diez metros más si al otro lado hay colegio, hospital o alta tensión. Con esas cinco anclas tienes el esqueleto entero del vídeo colgado.</a:t>
+            </a:r>
+          </a:p>
+        </p:txBody>
+      </p:sp>
+      <p:sp>
+        <p:nvSpPr>
+          <p:cNvPr id="4" name="Slide Number Placeholder 3"/>
+          <p:cNvSpPr>
+            <a:spLocks noGrp="1"/>
+          </p:cNvSpPr>
+          <p:nvPr>
+            <p:ph type="sldNum" idx="5" sz="quarter"/>
+          </p:nvPr>
+        </p:nvSpPr>
+        <p:spPr/>
+      </p:sp>
+    </p:spTree>
+  </p:cSld>
+  <p:clrMapOvr>
+    <a:masterClrMapping/>
+  </p:clrMapOvr>
+</p:notes>
+</file>
+
+<file path=ppt/notesSlides/notesSlide18.xml><?xml version="1.0" encoding="utf-8"?>
+<p:notes xmlns:a="http://schemas.openxmlformats.org/drawingml/2006/main" xmlns:p="http://schemas.openxmlformats.org/presentationml/2006/main" xmlns:r="http://schemas.openxmlformats.org/officeDocument/2006/relationships">
+  <p:cSld>
+    <p:spTree>
+      <p:nvGrpSpPr>
+        <p:cNvPr id="1" name=""/>
+        <p:cNvGrpSpPr/>
+        <p:nvPr/>
+      </p:nvGrpSpPr>
+      <p:grpSpPr>
+        <a:xfrm>
+          <a:off x="0" y="0"/>
+          <a:ext cx="0" cy="0"/>
+          <a:chOff x="0" y="0"/>
+          <a:chExt cx="0" cy="0"/>
+        </a:xfrm>
+      </p:grpSpPr>
+      <p:sp>
+        <p:nvSpPr>
+          <p:cNvPr id="2" name="Slide Image Placeholder 1"/>
+          <p:cNvSpPr>
+            <a:spLocks noGrp="1"/>
+          </p:cNvSpPr>
+          <p:nvPr>
+            <p:ph type="sldImg" idx="2"/>
+          </p:nvPr>
+        </p:nvSpPr>
+        <p:spPr/>
+      </p:sp>
+      <p:sp>
+        <p:nvSpPr>
+          <p:cNvPr id="3" name="Notes Placeholder 2"/>
+          <p:cNvSpPr>
+            <a:spLocks noGrp="1"/>
+          </p:cNvSpPr>
+          <p:nvPr>
+            <p:ph type="body" idx="3" sz="quarter"/>
+          </p:nvPr>
+        </p:nvSpPr>
+        <p:spPr/>
+        <p:txBody>
+          <a:bodyPr/>
+          <a:lstStyle/>
+          <a:p>
+            <a:r>
+              <a:t>N1: Cerramos fuerte. Si me quedo con lo esencial, ¿qué me llevo?</a:t>
+            </a:r>
+          </a:p>
+          <a:p>
+            <a:r>
+              <a:t>N2: Te llevas cuatro conquistas, y fíjate en cómo se enganchan unas con otras. Una: entras a un centro y lo primero que haces es clasificarlo por kilos y calcular su capacidad, contando llenos y vacíos, porque ya sabes que un vacío nunca lo está del todo. Dos: entiendes la avería que se evita. El GLP pesa más que el aire, así que en un recinto cerrado una fuga se embolsa a ras de suelo y con una chispa explota; de ahí que todo sea al aire libre, vertical y sin trasvase. Tres: colocas las distancias interior seis, seis y dos, y exterior veinte, quince y diez, casi con los ojos cerrados. Y cuatro: reconoces de un vistazo el cerramiento, el apilado en jaulas y los medios contra incendios.</a:t>
+            </a:r>
+          </a:p>
+          <a:p>
+            <a:r>
+              <a:t>N1: ¿Y cómo cae todo esto en el examen y en la obra?</a:t>
+            </a:r>
+          </a:p>
+          <a:p>
+            <a:r>
+              <a:t>N2: En el examen te lo preguntan cruzado: te dan unos kilos y te piden la categoría, o te ponen un colegio pegado a la valla y esperan que sumes esos diez metros de más. En la obra, esas mismas cifras deciden si el proyecto se sostiene o se cae en la inspección. Hoy ya eres más gasista que ayer. En el siguiente vídeo rematamos la ITC cero dos con lo que más vas a pisar en la calle: la gasolinera, la tienda de barrio y el transporte de bombonas, incluido el de tu propio coche. Te espero allí.</a:t>
             </a:r>
           </a:p>
         </p:txBody>
@@ -1193,12 +1279,12 @@
           <a:lstStyle/>
           <a:p>
             <a:r>
-              <a:t>N1: Tres números para situarte antes de entrar.</a:t>
-            </a:r>
-          </a:p>
-          <a:p>
-            <a:r>
-              <a:t>N2: Primero, los centros se ordenan en cinco categorías según los kilos de gas que almacenan. Segundo, para calcular esa capacidad se multiplica por un coeficiente de cero coma sesenta y cinco, que es un margen de seguridad, no el cien por cien del volumen. Y tercero, una cifra de diseño que se repite: desde cualquier punto del almacenamiento, el recorrido hasta la salida no puede pasar de veinticinco metros. Si retienes estas tres, el resto del vídeo encaja solo.</a:t>
+              <a:t>N1: Antes de entrar en materia, dame tres números para situarme.</a:t>
+            </a:r>
+          </a:p>
+          <a:p>
+            <a:r>
+              <a:t>N2: Toma tres anclas. La primera: los centros se ordenan en cinco categorías según los kilos de gas que almacenan; de ahí cuelga todo lo demás. La segunda: para calcular esa capacidad se multiplica por un coeficiente de cero coma sesenta y cinco, que es un margen de seguridad, no el cien por cien del volumen. Y la tercera: una cifra de diseño que se repite, desde cualquier punto del almacenamiento el recorrido hasta la salida no puede pasar de veinticinco metros. Si retienes estas tres, el resto del vídeo encaja solo.</a:t>
             </a:r>
           </a:p>
         </p:txBody>
@@ -1273,7 +1359,7 @@
           </a:p>
           <a:p>
             <a:r>
-              <a:t>N2: Fija los requisitos técnicos esenciales y las medidas de seguridad mínimas para proyectar, construir y explotar los centros de almacenamiento y distribución de GLP envasado, esas naves llenas de bombonas de butano y propano. Son los centros a los que se refiere el artículo dos del Reglamento. Ojo al matiz: hablamos de gas en envases, en botellas, no del depósito fijo del chalé, que es otra instrucción distinta que veremos más adelante. También incluye criterios de transporte de envases, que veremos en el vídeo dos.</a:t>
+              <a:t>N2: Fija los requisitos técnicos esenciales y las medidas de seguridad mínimas para tres momentos de la vida de un centro: proyectarlo, construirlo y explotarlo. Y el objeto son los centros de almacenamiento y distribución de GLP envasado, esas naves llenas de bombonas de butano y propano, las mismas a las que se refiere el artículo dos del Reglamento. Fíjate en el matiz, porque cae: aquí hablamos de gas en envases, en botellas que van y vienen; el depósito fijo del chalé es otra instrucción distinta que veremos más adelante. Y de paso, esta ITC también recoge los criterios de transporte de esos envases, que rematamos en el vídeo dos.</a:t>
             </a:r>
           </a:p>
         </p:txBody>
@@ -1343,12 +1429,12 @@
           <a:lstStyle/>
           <a:p>
             <a:r>
-              <a:t>N1: ¿Cuándo se considera legalmente que has modificado un centro?</a:t>
-            </a:r>
-          </a:p>
-          <a:p>
-            <a:r>
-              <a:t>N2: Solo cuando lo amplías y esa ampliación te hace cambiar de categoría. Si tienes un centro de tercera y le metes más bombonas pero sigues siendo de tercera, para el Reglamento no has hecho ninguna modificación reglamentaria. En cuanto cruzas el umbral de kilos y saltas a segunda, ahí sí. Piénsalo como subir de división: mientras juegues en la misma liga, nada cambia. Ese es el matiz que el examen pregunta.</a:t>
+              <a:t>N1: ¿Cuándo se considera que legalmente he modificado un centro?</a:t>
+            </a:r>
+          </a:p>
+          <a:p>
+            <a:r>
+              <a:t>N2: Solo cuando lo amplías y esa ampliación te hace cambiar de categoría. Vamos con un ejemplo de obra. Tienes un centro de tercera y le metes más bombonas, pero sigues estando dentro de los kilos de la tercera. Para el Reglamento no has hecho ninguna modificación reglamentaria: no tienes que rehacer papeles. Ahora bien, en cuanto cruzas el umbral de kilos y saltas a segunda, ahí sí hay modificación. Piénsalo como subir de división en el fútbol: mientras juegues en la misma liga, nada cambia; el día que asciendes, cambian las reglas. Ese matiz decide en la calle si toca legalizar de nuevo o no.</a:t>
             </a:r>
           </a:p>
         </p:txBody>
@@ -1418,12 +1504,12 @@
           <a:lstStyle/>
           <a:p>
             <a:r>
-              <a:t>N1: ¿Cómo se ordenan los centros y por qué al revés de lo que parece?</a:t>
-            </a:r>
-          </a:p>
-          <a:p>
-            <a:r>
-              <a:t>N2: Se clasifican por su capacidad nominal de contenido total, en kilos de GLP. Y la numeración va al revés de la intuición: la primera es la más grande, hasta doscientos cincuenta mil kilos, y la quinta la más pequeña, hasta quinientos kilos, esa que ves en la gasolinera. Memoriza los saltos clave: quinientos, mil, doce mil quinientos, veinticinco mil y doscientos cincuenta mil. Las categorías cuarta y quinta son las de poca cosa, tienda de barrio y gasolinera, con reglas mucho más suaves, que veremos en el vídeo dos.</a:t>
+              <a:t>N1: ¿Cómo se ordenan los centros, y por qué me suena al revés?</a:t>
+            </a:r>
+          </a:p>
+          <a:p>
+            <a:r>
+              <a:t>N2: Se clasifican por su capacidad nominal de contenido total, es decir, por los kilos de GLP que pueden almacenar. Y aquí está la trampa: la numeración va al revés de la intuición. La primera es la más grande, hasta doscientos cincuenta mil kilos, y la quinta es la más pequeña, hasta quinientos kilos, esa jaula que ves en la gasolinera. Para no perderte, memoriza los saltos clave de menor a mayor: quinientos, mil, doce mil quinientos, veinticinco mil y doscientos cincuenta mil kilos. Y quédate con que la cuarta y la quinta son las de poca cosa, tienda de barrio y gasolinera, con reglas mucho más suaves que veremos en el vídeo dos.</a:t>
             </a:r>
           </a:p>
         </p:txBody>
@@ -1498,7 +1584,7 @@
           </a:p>
           <a:p>
             <a:r>
-              <a:t>N2: La fórmula es capacidad total igual a capacidad nominal del envase por el número de envases por cero coma sesenta y cinco. Dos trampas de examen en una línea. La primera: se multiplica por cero coma sesenta y cinco, un coeficiente de seguridad, porque no se cuenta el cien por cien del volumen. La segunda: en el número de envases cuentas los llenos y también los vacíos. ¿Por qué los vacíos? Porque una bombona vacía nunca está del todo vacía, siempre queda gas dentro y da la lata igual. Así que a la hora de sumar kilos, la botella vacía también suma. Truco: en el recuento no perdono ni las vacías.</a:t>
+              <a:t>N2: La fórmula es capacidad total igual a capacidad nominal del envase, por el número de envases, por cero coma sesenta y cinco. Hay dos trampas de examen escondidas en una sola línea. La primera es ese cero coma sesenta y cinco: un coeficiente de seguridad, porque no se cuenta el cien por cien del volumen del envase. La segunda está en la letra ene, el número de envases: cuentas los llenos y también los vacíos. ¿Por qué los vacíos, si están vacíos? Porque una bombona vacía nunca lo está del todo, siempre le queda un poco de gas y da la lata igual. Así que a la hora de sumar kilos, la botella vacía también suma. Truco para acordarte: en el recuento no perdono ni las vacías. Y la capacidad total del centro es la suma de las parciales de cada tipo de envase.</a:t>
             </a:r>
           </a:p>
         </p:txBody>
@@ -1573,7 +1659,7 @@
           </a:p>
           <a:p>
             <a:r>
-              <a:t>N2: Porque un centro de bombonas no es un almacén cerrado: las botellas van al aire libre, a lo sumo bajo una cubierta ligera. La razón es física y es la clave de todo el tema: si hubiera una fuga en un recinto cerrado, el GLP, que pesa más que el aire, se acumularía a ras de suelo y bastaría una chispa para la explosión. Al aire libre, el gas se disipa. Además, la zona de llenos va separada y señalizada de la de vacíos, en una sola planta no subterránea, con el piso al nivel del terreno o por encima. Estas reglas valen para todos los centros salvo los de quinta.</a:t>
+              <a:t>N2: Porque un centro de bombonas no es un almacén cerrado. Las botellas van al aire libre, como mucho bajo una cubierta ligera. Y la razón es física, es el corazón de todo el tema: si hubiera una fuga en un recinto cerrado, el GLP, que pesa más que el aire, se acumularía a ras de suelo, se embolsaría, y con una simple chispa tendrías la explosión. Al aire libre, en cambio, el gas se disipa y se va. Además, la zona de envases llenos va separada y señalizada de la de vacíos, en una sola planta no subterránea, con el piso al nivel del terreno o por encima, nunca por debajo. Y ojo, estas reglas generales valen para todos los centros salvo los de quinta categoría.</a:t>
             </a:r>
           </a:p>
         </p:txBody>
@@ -1648,7 +1734,7 @@
           </a:p>
           <a:p>
             <a:r>
-              <a:t>N2: Hay que prever la fácil salida del personal: el recorrido real hasta el exterior, sorteando obstáculos, no puede pasar de veinticinco metros. Se libran de esa regla los almacenamientos muy pequeños, de veinticinco metros cuadrados de superficie, o cuando la distancia a la salida es inferior a seis metros. Y una regla de oro que verás repetida: los envases llenos con válvula de seguridad se colocan siempre en posición vertical, de pie, y en jaulas si se apilan en más de una altura. Una botella tumbada con la válvula en contacto con el líquido es una fuga esperando a pasar.</a:t>
+              <a:t>N2: Empecemos por salir. Hay que prever la salida fácil del personal: el recorrido real hasta el exterior, sorteando cualquier obstáculo, no puede pasar de veinticinco metros. Se libran de esa regla los almacenamientos muy pequeños, de veinticinco metros cuadrados de superficie, o cuando la salida está a menos de seis metros. Y ahora la colocación, una regla de oro que verás repetida: los envases llenos con válvula de seguridad se colocan siempre en posición vertical, de pie, y en jaulas si se apilan en más de una altura. ¿Por qué de pie? Porque una botella tumbada deja la válvula tocando el líquido, y eso es una fuga esperando a pasar.</a:t>
             </a:r>
           </a:p>
         </p:txBody>
@@ -1723,7 +1809,7 @@
           </a:p>
           <a:p>
             <a:r>
-              <a:t>N2: Todo lo que dé fuego. Nada de llamas libres ni fuentes de calor que suban la temperatura de los envases, ni sustancias inflamables cerca. Por eso hay un letrero visible de gas inflamable, prohibido fumar y encender fuegos, y todo el que entra deja antes en la puerta el mechero, las cerillas, cualquier cosa que produzca chispa. Y cae fijo en el examen: en un centro de envases se prohíbe el llenado o el trasvase de gas de una botella a otra. Eso solo se hace en las plantas de llenado autorizadas, con sus básculas y su seguridad. Rellenar bombonas por tu cuenta es de lo más peligroso y sancionable que existe.</a:t>
+              <a:t>N2: Todo lo que dé fuego. Nada de llamas libres ni de fuentes de calor que suban la temperatura de los envases, ni sustancias inflamables cerca. Por eso hay un letrero bien visible que dice gas inflamable, prohibido fumar y encender fuegos, y todo el que entra deja antes en la puerta el mechero, las cerillas, cualquier cosa que produzca chispa. Y aquí va lo que cae fijo en examen: en un centro de envases se prohíbe el llenado o el trasvase de gas de una botella a otra. Eso solo se hace en las plantas de llenado autorizadas, con sus básculas y su seguridad. Rellenar bombonas por tu cuenta es sobrellenar, fugar y jugártela; es de lo más peligroso y sancionable que existe.</a:t>
             </a:r>
           </a:p>
         </p:txBody>
@@ -4978,7 +5064,7 @@
                 </a:solidFill>
                 <a:latin typeface="Montserrat"/>
               </a:rPr>
-              <a:t>010 / 017</a:t>
+              <a:t>010 / 018</a:t>
             </a:r>
           </a:p>
         </p:txBody>
@@ -5393,7 +5479,7 @@
                 </a:solidFill>
                 <a:latin typeface="Montserrat"/>
               </a:rPr>
-              <a:t>011 / 017</a:t>
+              <a:t>011 / 018</a:t>
             </a:r>
           </a:p>
         </p:txBody>
@@ -5808,7 +5894,7 @@
                 </a:solidFill>
                 <a:latin typeface="Montserrat"/>
               </a:rPr>
-              <a:t>012 / 017</a:t>
+              <a:t>012 / 018</a:t>
             </a:r>
           </a:p>
         </p:txBody>
@@ -6008,7 +6094,7 @@
                 </a:solidFill>
                 <a:latin typeface="Montserrat"/>
               </a:rPr>
-              <a:t>Hacia la calle: muro EI 180, 2,5 m</a:t>
+              <a:t>A la calle: muro EI 180, 2,5 m</a:t>
             </a:r>
           </a:p>
           <a:p>
@@ -6223,7 +6309,7 @@
                 </a:solidFill>
                 <a:latin typeface="Montserrat"/>
               </a:rPr>
-              <a:t>013 / 017</a:t>
+              <a:t>013 / 018</a:t>
             </a:r>
           </a:p>
         </p:txBody>
@@ -6638,7 +6724,7 @@
                 </a:solidFill>
                 <a:latin typeface="Montserrat"/>
               </a:rPr>
-              <a:t>014 / 017</a:t>
+              <a:t>014 / 018</a:t>
             </a:r>
           </a:p>
         </p:txBody>
@@ -7053,7 +7139,7 @@
                 </a:solidFill>
                 <a:latin typeface="Montserrat"/>
               </a:rPr>
-              <a:t>015 / 017</a:t>
+              <a:t>015 / 018</a:t>
             </a:r>
           </a:p>
         </p:txBody>
@@ -7468,7 +7554,7 @@
                 </a:solidFill>
                 <a:latin typeface="Montserrat"/>
               </a:rPr>
-              <a:t>016 / 017</a:t>
+              <a:t>016 / 018</a:t>
             </a:r>
           </a:p>
         </p:txBody>
@@ -7700,7 +7786,7 @@
       </p:sp>
       <p:sp>
         <p:nvSpPr>
-          <p:cNvPr id="8" name="imgph" descr="IMGQ:exhaust pipe truck engine"/>
+          <p:cNvPr id="8" name="imgph" descr="IMGQ:exhaust pipe truck engine detail"/>
           <p:cNvSpPr/>
           <p:nvPr/>
         </p:nvSpPr>
@@ -7786,7 +7872,7 @@
                 </a:solidFill>
                 <a:latin typeface="Montserrat"/>
               </a:rPr>
-              <a:t>exhaust pipe truck engine</a:t>
+              <a:t>exhaust pipe truck engine detail</a:t>
             </a:r>
           </a:p>
         </p:txBody>
@@ -7883,7 +7969,7 @@
                 </a:solidFill>
                 <a:latin typeface="Montserrat"/>
               </a:rPr>
-              <a:t>017 / 017</a:t>
+              <a:t>017 / 018</a:t>
             </a:r>
           </a:p>
         </p:txBody>
@@ -7930,8 +8016,8 @@
         </p:nvSpPr>
         <p:spPr>
           <a:xfrm>
-            <a:off x="822960" y="640080"/>
-            <a:ext cx="10058400" cy="914400"/>
+            <a:off x="822960" y="457200"/>
+            <a:ext cx="8229600" cy="365760"/>
           </a:xfrm>
           <a:prstGeom prst="rect">
             <a:avLst/>
@@ -7945,13 +8031,13 @@
           <a:lstStyle/>
           <a:p>
             <a:r>
-              <a:rPr sz="3000" b="1" i="0">
-                <a:solidFill>
-                  <a:srgbClr val="1E2761"/>
-                </a:solidFill>
-                <a:latin typeface="Montserrat"/>
-              </a:rPr>
-              <a:t>Qué me llevo</a:t>
+              <a:rPr sz="1200" b="1" i="0">
+                <a:solidFill>
+                  <a:srgbClr val="64748B"/>
+                </a:solidFill>
+                <a:latin typeface="Montserrat"/>
+              </a:rPr>
+              <a:t>REPASO RELÁMPAGO</a:t>
             </a:r>
           </a:p>
         </p:txBody>
@@ -7964,8 +8050,8 @@
         </p:nvSpPr>
         <p:spPr>
           <a:xfrm>
-            <a:off x="822960" y="2011680"/>
-            <a:ext cx="10058400" cy="3657600"/>
+            <a:off x="822960" y="868680"/>
+            <a:ext cx="10515600" cy="914400"/>
           </a:xfrm>
           <a:prstGeom prst="rect">
             <a:avLst/>
@@ -7978,78 +8064,586 @@
           </a:bodyPr>
           <a:lstStyle/>
           <a:p>
+            <a:r>
+              <a:rPr sz="2700" b="1" i="0">
+                <a:solidFill>
+                  <a:srgbClr val="1E2761"/>
+                </a:solidFill>
+                <a:latin typeface="Montserrat"/>
+              </a:rPr>
+              <a:t>Cinco anclas antes del cierre</a:t>
+            </a:r>
+          </a:p>
+        </p:txBody>
+      </p:sp>
+      <p:sp>
+        <p:nvSpPr>
+          <p:cNvPr id="7" name="TextBox 6"/>
+          <p:cNvSpPr txBox="1"/>
+          <p:nvPr/>
+        </p:nvSpPr>
+        <p:spPr>
+          <a:xfrm>
+            <a:off x="822960" y="1920240"/>
+            <a:ext cx="4983480" cy="4206240"/>
+          </a:xfrm>
+          <a:prstGeom prst="rect">
+            <a:avLst/>
+          </a:prstGeom>
+          <a:noFill/>
+        </p:spPr>
+        <p:txBody>
+          <a:bodyPr wrap="square">
+            <a:spAutoFit/>
+          </a:bodyPr>
+          <a:lstStyle/>
+          <a:p>
             <a:pPr>
               <a:spcAft>
-                <a:spcPts val="1400"/>
+                <a:spcPts val="1000"/>
               </a:spcAft>
             </a:pPr>
             <a:r>
-              <a:rPr sz="2000" b="1" i="0">
+              <a:rPr sz="1600" b="1" i="0">
                 <a:solidFill>
                   <a:srgbClr val="2E3A80"/>
                 </a:solidFill>
                 <a:latin typeface="Montserrat"/>
               </a:rPr>
-              <a:t>✓  </a:t>
-            </a:r>
-            <a:r>
-              <a:rPr sz="2000" b="0" i="0">
+              <a:t>•  </a:t>
+            </a:r>
+            <a:r>
+              <a:rPr sz="1600" b="0" i="0">
                 <a:solidFill>
                   <a:srgbClr val="1B2330"/>
                 </a:solidFill>
                 <a:latin typeface="Montserrat"/>
               </a:rPr>
-              <a:t>5 categorías · fórmula con × 0,65 y vacíos</a:t>
+              <a:t>Fórmula × 0,65 y vacíos que suman</a:t>
             </a:r>
           </a:p>
           <a:p>
             <a:pPr>
               <a:spcAft>
-                <a:spcPts val="1400"/>
+                <a:spcPts val="1000"/>
               </a:spcAft>
             </a:pPr>
             <a:r>
-              <a:rPr sz="2000" b="1" i="0">
+              <a:rPr sz="1600" b="1" i="0">
                 <a:solidFill>
                   <a:srgbClr val="2E3A80"/>
                 </a:solidFill>
                 <a:latin typeface="Montserrat"/>
               </a:rPr>
-              <a:t>✓  </a:t>
-            </a:r>
-            <a:r>
-              <a:rPr sz="2000" b="0" i="0">
+              <a:t>•  </a:t>
+            </a:r>
+            <a:r>
+              <a:rPr sz="1600" b="0" i="0">
                 <a:solidFill>
                   <a:srgbClr val="1B2330"/>
                 </a:solidFill>
                 <a:latin typeface="Montserrat"/>
               </a:rPr>
-              <a:t>Al aire libre · vertical · nunca trasvase</a:t>
+              <a:t>Al aire libre · vertical · sin trasvase</a:t>
             </a:r>
           </a:p>
           <a:p>
             <a:pPr>
               <a:spcAft>
-                <a:spcPts val="1400"/>
+                <a:spcPts val="1000"/>
               </a:spcAft>
             </a:pPr>
             <a:r>
+              <a:rPr sz="1600" b="1" i="0">
+                <a:solidFill>
+                  <a:srgbClr val="2E3A80"/>
+                </a:solidFill>
+                <a:latin typeface="Montserrat"/>
+              </a:rPr>
+              <a:t>•  </a:t>
+            </a:r>
+            <a:r>
+              <a:rPr sz="1600" b="0" i="0">
+                <a:solidFill>
+                  <a:srgbClr val="1B2330"/>
+                </a:solidFill>
+                <a:latin typeface="Montserrat"/>
+              </a:rPr>
+              <a:t>Evacuación ≤ 25 m</a:t>
+            </a:r>
+          </a:p>
+          <a:p>
+            <a:pPr>
+              <a:spcAft>
+                <a:spcPts val="1000"/>
+              </a:spcAft>
+            </a:pPr>
+            <a:r>
+              <a:rPr sz="1600" b="1" i="0">
+                <a:solidFill>
+                  <a:srgbClr val="2E3A80"/>
+                </a:solidFill>
+                <a:latin typeface="Montserrat"/>
+              </a:rPr>
+              <a:t>•  </a:t>
+            </a:r>
+            <a:r>
+              <a:rPr sz="1600" b="0" i="0">
+                <a:solidFill>
+                  <a:srgbClr val="1B2330"/>
+                </a:solidFill>
+                <a:latin typeface="Montserrat"/>
+              </a:rPr>
+              <a:t>Interior 6/6/2 · exterior 20/15/10</a:t>
+            </a:r>
+          </a:p>
+          <a:p>
+            <a:pPr>
+              <a:spcAft>
+                <a:spcPts val="1000"/>
+              </a:spcAft>
+            </a:pPr>
+            <a:r>
+              <a:rPr sz="1600" b="1" i="0">
+                <a:solidFill>
+                  <a:srgbClr val="2E3A80"/>
+                </a:solidFill>
+                <a:latin typeface="Montserrat"/>
+              </a:rPr>
+              <a:t>•  </a:t>
+            </a:r>
+            <a:r>
+              <a:rPr sz="1600" b="0" i="0">
+                <a:solidFill>
+                  <a:srgbClr val="1B2330"/>
+                </a:solidFill>
+                <a:latin typeface="Montserrat"/>
+              </a:rPr>
+              <a:t>Muro 2,5 m / malla 2 m · +10 m sensibles</a:t>
+            </a:r>
+          </a:p>
+        </p:txBody>
+      </p:sp>
+      <p:sp>
+        <p:nvSpPr>
+          <p:cNvPr id="8" name="imgph" descr="IMGQ:gas cylinders outdoor depot rows"/>
+          <p:cNvSpPr/>
+          <p:nvPr/>
+        </p:nvSpPr>
+        <p:spPr>
+          <a:xfrm>
+            <a:off x="5806440" y="1051560"/>
+            <a:ext cx="5298947" cy="4629150"/>
+          </a:xfrm>
+          <a:prstGeom prst="roundRect">
+            <a:avLst/>
+          </a:prstGeom>
+          <a:solidFill>
+            <a:srgbClr val="F3F6FB"/>
+          </a:solidFill>
+          <a:ln w="12700">
+            <a:solidFill>
+              <a:srgbClr val="C7D2E6"/>
+            </a:solidFill>
+          </a:ln>
+          <a:effectLst/>
+        </p:spPr>
+        <p:style>
+          <a:lnRef idx="1">
+            <a:schemeClr val="accent1"/>
+          </a:lnRef>
+          <a:fillRef idx="3">
+            <a:schemeClr val="accent1"/>
+          </a:fillRef>
+          <a:effectRef idx="2">
+            <a:schemeClr val="accent1"/>
+          </a:effectRef>
+          <a:fontRef idx="minor">
+            <a:schemeClr val="lt1"/>
+          </a:fontRef>
+        </p:style>
+        <p:txBody>
+          <a:bodyPr rtlCol="0" anchor="ctr"/>
+          <a:lstStyle/>
+          <a:p>
+            <a:pPr algn="ctr"/>
+          </a:p>
+        </p:txBody>
+      </p:sp>
+      <p:sp>
+        <p:nvSpPr>
+          <p:cNvPr id="9" name="TextBox 8"/>
+          <p:cNvSpPr txBox="1"/>
+          <p:nvPr/>
+        </p:nvSpPr>
+        <p:spPr>
+          <a:xfrm>
+            <a:off x="6080760" y="2726055"/>
+            <a:ext cx="4750307" cy="1280160"/>
+          </a:xfrm>
+          <a:prstGeom prst="rect">
+            <a:avLst/>
+          </a:prstGeom>
+          <a:noFill/>
+        </p:spPr>
+        <p:txBody>
+          <a:bodyPr wrap="square">
+            <a:spAutoFit/>
+          </a:bodyPr>
+          <a:lstStyle/>
+          <a:p>
+            <a:pPr algn="ctr"/>
+            <a:r>
+              <a:rPr sz="1400" b="1" i="0">
+                <a:solidFill>
+                  <a:srgbClr val="64748B"/>
+                </a:solidFill>
+                <a:latin typeface="Montserrat"/>
+              </a:rPr>
+              <a:t>IMAGEN REALISTA</a:t>
+            </a:r>
+          </a:p>
+          <a:p>
+            <a:pPr algn="ctr"/>
+            <a:r>
+              <a:rPr sz="1100" b="0" i="1">
+                <a:solidFill>
+                  <a:srgbClr val="64748B"/>
+                </a:solidFill>
+                <a:latin typeface="Montserrat"/>
+              </a:rPr>
+              <a:t>gas cylinders outdoor depot rows</a:t>
+            </a:r>
+          </a:p>
+        </p:txBody>
+      </p:sp>
+    </p:spTree>
+  </p:cSld>
+  <p:clrMapOvr>
+    <a:masterClrMapping/>
+  </p:clrMapOvr>
+</p:sld>
+</file>
+
+<file path=ppt/slides/slide18.xml><?xml version="1.0" encoding="utf-8"?>
+<p:sld xmlns:a="http://schemas.openxmlformats.org/drawingml/2006/main" xmlns:p="http://schemas.openxmlformats.org/presentationml/2006/main" xmlns:r="http://schemas.openxmlformats.org/officeDocument/2006/relationships">
+  <p:cSld>
+    <p:spTree>
+      <p:nvGrpSpPr>
+        <p:cNvPr id="1" name=""/>
+        <p:cNvGrpSpPr/>
+        <p:nvPr/>
+      </p:nvGrpSpPr>
+      <p:grpSpPr/>
+      <p:sp>
+        <p:nvSpPr>
+          <p:cNvPr id="2" name="Rectangle 1"/>
+          <p:cNvSpPr/>
+          <p:nvPr/>
+        </p:nvSpPr>
+        <p:spPr>
+          <a:xfrm>
+            <a:off x="0" y="0"/>
+            <a:ext cx="12191695" cy="6858000"/>
+          </a:xfrm>
+          <a:prstGeom prst="rect">
+            <a:avLst/>
+          </a:prstGeom>
+          <a:solidFill>
+            <a:srgbClr val="1E2761"/>
+          </a:solidFill>
+          <a:ln>
+            <a:noFill/>
+          </a:ln>
+          <a:effectLst/>
+        </p:spPr>
+        <p:style>
+          <a:lnRef idx="1">
+            <a:schemeClr val="accent1"/>
+          </a:lnRef>
+          <a:fillRef idx="3">
+            <a:schemeClr val="accent1"/>
+          </a:fillRef>
+          <a:effectRef idx="2">
+            <a:schemeClr val="accent1"/>
+          </a:effectRef>
+          <a:fontRef idx="minor">
+            <a:schemeClr val="lt1"/>
+          </a:fontRef>
+        </p:style>
+        <p:txBody>
+          <a:bodyPr rtlCol="0" anchor="ctr"/>
+          <a:lstStyle/>
+          <a:p>
+            <a:pPr algn="ctr"/>
+          </a:p>
+        </p:txBody>
+      </p:sp>
+      <p:sp>
+        <p:nvSpPr>
+          <p:cNvPr id="3" name="TextBox 2"/>
+          <p:cNvSpPr txBox="1"/>
+          <p:nvPr/>
+        </p:nvSpPr>
+        <p:spPr>
+          <a:xfrm>
+            <a:off x="822960" y="640080"/>
+            <a:ext cx="10515600" cy="457200"/>
+          </a:xfrm>
+          <a:prstGeom prst="rect">
+            <a:avLst/>
+          </a:prstGeom>
+          <a:noFill/>
+        </p:spPr>
+        <p:txBody>
+          <a:bodyPr wrap="square">
+            <a:spAutoFit/>
+          </a:bodyPr>
+          <a:lstStyle/>
+          <a:p>
+            <a:r>
+              <a:rPr sz="1400" b="1" i="0">
+                <a:solidFill>
+                  <a:srgbClr val="CADCFC"/>
+                </a:solidFill>
+                <a:latin typeface="Montserrat"/>
+              </a:rPr>
+              <a:t>LO QUE YA DOMINAS</a:t>
+            </a:r>
+          </a:p>
+        </p:txBody>
+      </p:sp>
+      <p:sp>
+        <p:nvSpPr>
+          <p:cNvPr id="4" name="TextBox 3"/>
+          <p:cNvSpPr txBox="1"/>
+          <p:nvPr/>
+        </p:nvSpPr>
+        <p:spPr>
+          <a:xfrm>
+            <a:off x="822960" y="1143000"/>
+            <a:ext cx="10515600" cy="1097280"/>
+          </a:xfrm>
+          <a:prstGeom prst="rect">
+            <a:avLst/>
+          </a:prstGeom>
+          <a:noFill/>
+        </p:spPr>
+        <p:txBody>
+          <a:bodyPr wrap="square">
+            <a:spAutoFit/>
+          </a:bodyPr>
+          <a:lstStyle/>
+          <a:p>
+            <a:r>
+              <a:rPr sz="3400" b="1" i="0">
+                <a:solidFill>
+                  <a:srgbClr val="FFFFFF"/>
+                </a:solidFill>
+                <a:latin typeface="Montserrat"/>
+              </a:rPr>
+              <a:t>Ya lees un centro de bombonas de un vistazo</a:t>
+            </a:r>
+          </a:p>
+        </p:txBody>
+      </p:sp>
+      <p:sp>
+        <p:nvSpPr>
+          <p:cNvPr id="5" name="TextBox 4"/>
+          <p:cNvSpPr txBox="1"/>
+          <p:nvPr/>
+        </p:nvSpPr>
+        <p:spPr>
+          <a:xfrm>
+            <a:off x="822960" y="2514600"/>
+            <a:ext cx="10515600" cy="2834640"/>
+          </a:xfrm>
+          <a:prstGeom prst="rect">
+            <a:avLst/>
+          </a:prstGeom>
+          <a:noFill/>
+        </p:spPr>
+        <p:txBody>
+          <a:bodyPr wrap="square">
+            <a:spAutoFit/>
+          </a:bodyPr>
+          <a:lstStyle/>
+          <a:p>
+            <a:pPr>
+              <a:spcAft>
+                <a:spcPts val="1200"/>
+              </a:spcAft>
+            </a:pPr>
+            <a:r>
               <a:rPr sz="2000" b="1" i="0">
                 <a:solidFill>
-                  <a:srgbClr val="2E3A80"/>
+                  <a:srgbClr val="CADCFC"/>
                 </a:solidFill>
                 <a:latin typeface="Montserrat"/>
               </a:rPr>
               <a:t>✓  </a:t>
             </a:r>
             <a:r>
-              <a:rPr sz="2000" b="0" i="0">
-                <a:solidFill>
-                  <a:srgbClr val="1B2330"/>
-                </a:solidFill>
-                <a:latin typeface="Montserrat"/>
-              </a:rPr>
-              <a:t>Distancias interior 6/6/2, exterior 20/15/10</a:t>
+              <a:rPr sz="1900" b="0" i="0">
+                <a:solidFill>
+                  <a:srgbClr val="FFFFFF"/>
+                </a:solidFill>
+                <a:latin typeface="Montserrat"/>
+              </a:rPr>
+              <a:t>Clasificas por kilos y calculas capacidad con la fórmula</a:t>
+            </a:r>
+          </a:p>
+          <a:p>
+            <a:pPr>
+              <a:spcAft>
+                <a:spcPts val="1200"/>
+              </a:spcAft>
+            </a:pPr>
+            <a:r>
+              <a:rPr sz="2000" b="1" i="0">
+                <a:solidFill>
+                  <a:srgbClr val="CADCFC"/>
+                </a:solidFill>
+                <a:latin typeface="Montserrat"/>
+              </a:rPr>
+              <a:t>✓  </a:t>
+            </a:r>
+            <a:r>
+              <a:rPr sz="1900" b="0" i="0">
+                <a:solidFill>
+                  <a:srgbClr val="FFFFFF"/>
+                </a:solidFill>
+                <a:latin typeface="Montserrat"/>
+              </a:rPr>
+              <a:t>Entiendes por qué van al aire libre, verticales y sin trasvase</a:t>
+            </a:r>
+          </a:p>
+          <a:p>
+            <a:pPr>
+              <a:spcAft>
+                <a:spcPts val="1200"/>
+              </a:spcAft>
+            </a:pPr>
+            <a:r>
+              <a:rPr sz="2000" b="1" i="0">
+                <a:solidFill>
+                  <a:srgbClr val="CADCFC"/>
+                </a:solidFill>
+                <a:latin typeface="Montserrat"/>
+              </a:rPr>
+              <a:t>✓  </a:t>
+            </a:r>
+            <a:r>
+              <a:rPr sz="1900" b="0" i="0">
+                <a:solidFill>
+                  <a:srgbClr val="FFFFFF"/>
+                </a:solidFill>
+                <a:latin typeface="Montserrat"/>
+              </a:rPr>
+              <a:t>Colocas las distancias 6/6/2 y 20/15/10 sin dudar</a:t>
+            </a:r>
+          </a:p>
+          <a:p>
+            <a:pPr>
+              <a:spcAft>
+                <a:spcPts val="1200"/>
+              </a:spcAft>
+            </a:pPr>
+            <a:r>
+              <a:rPr sz="2000" b="1" i="0">
+                <a:solidFill>
+                  <a:srgbClr val="CADCFC"/>
+                </a:solidFill>
+                <a:latin typeface="Montserrat"/>
+              </a:rPr>
+              <a:t>✓  </a:t>
+            </a:r>
+            <a:r>
+              <a:rPr sz="1900" b="0" i="0">
+                <a:solidFill>
+                  <a:srgbClr val="FFFFFF"/>
+                </a:solidFill>
+                <a:latin typeface="Montserrat"/>
+              </a:rPr>
+              <a:t>Reconoces cerramiento, apilado y medios contra incendios</a:t>
+            </a:r>
+          </a:p>
+        </p:txBody>
+      </p:sp>
+      <p:sp>
+        <p:nvSpPr>
+          <p:cNvPr id="6" name="Rounded Rectangle 5"/>
+          <p:cNvSpPr/>
+          <p:nvPr/>
+        </p:nvSpPr>
+        <p:spPr>
+          <a:xfrm>
+            <a:off x="822960" y="5532120"/>
+            <a:ext cx="10515600" cy="777240"/>
+          </a:xfrm>
+          <a:prstGeom prst="roundRect">
+            <a:avLst/>
+          </a:prstGeom>
+          <a:solidFill>
+            <a:srgbClr val="2E3A80"/>
+          </a:solidFill>
+          <a:ln>
+            <a:noFill/>
+          </a:ln>
+          <a:effectLst/>
+        </p:spPr>
+        <p:style>
+          <a:lnRef idx="1">
+            <a:schemeClr val="accent1"/>
+          </a:lnRef>
+          <a:fillRef idx="3">
+            <a:schemeClr val="accent1"/>
+          </a:fillRef>
+          <a:effectRef idx="2">
+            <a:schemeClr val="accent1"/>
+          </a:effectRef>
+          <a:fontRef idx="minor">
+            <a:schemeClr val="lt1"/>
+          </a:fontRef>
+        </p:style>
+        <p:txBody>
+          <a:bodyPr rtlCol="0" anchor="ctr"/>
+          <a:lstStyle/>
+          <a:p>
+            <a:pPr algn="ctr"/>
+          </a:p>
+        </p:txBody>
+      </p:sp>
+      <p:sp>
+        <p:nvSpPr>
+          <p:cNvPr id="7" name="TextBox 6"/>
+          <p:cNvSpPr txBox="1"/>
+          <p:nvPr/>
+        </p:nvSpPr>
+        <p:spPr>
+          <a:xfrm>
+            <a:off x="1051560" y="5605272"/>
+            <a:ext cx="10058400" cy="640080"/>
+          </a:xfrm>
+          <a:prstGeom prst="rect">
+            <a:avLst/>
+          </a:prstGeom>
+          <a:noFill/>
+        </p:spPr>
+        <p:txBody>
+          <a:bodyPr wrap="square">
+            <a:spAutoFit/>
+          </a:bodyPr>
+          <a:lstStyle/>
+          <a:p>
+            <a:r>
+              <a:rPr sz="1500" b="1" i="1">
+                <a:solidFill>
+                  <a:srgbClr val="CADCFC"/>
+                </a:solidFill>
+                <a:latin typeface="Montserrat"/>
+              </a:rPr>
+              <a:t>Hoy ya eres más gasista que ayer. En el siguiente vídeo bajamos a la calle: gasolinera, tienda y transporte.</a:t>
             </a:r>
           </a:p>
         </p:txBody>
@@ -8146,7 +8740,7 @@
                 </a:solidFill>
                 <a:latin typeface="Montserrat"/>
               </a:rPr>
-              <a:t>002 / 017</a:t>
+              <a:t>002 / 018</a:t>
             </a:r>
           </a:p>
         </p:txBody>
@@ -8562,7 +9156,7 @@
                 </a:solidFill>
                 <a:latin typeface="Montserrat"/>
               </a:rPr>
-              <a:t>recorrido máximo de evacuación</a:t>
+              <a:t>recorrido máximo hasta la salida</a:t>
             </a:r>
           </a:p>
         </p:txBody>
@@ -8659,7 +9253,7 @@
                 </a:solidFill>
                 <a:latin typeface="Montserrat"/>
               </a:rPr>
-              <a:t>003 / 017</a:t>
+              <a:t>003 / 018</a:t>
             </a:r>
           </a:p>
         </p:txBody>
@@ -8809,7 +9403,7 @@
                 </a:solidFill>
                 <a:latin typeface="Montserrat"/>
               </a:rPr>
-              <a:t>Requisitos y seguridad mínima</a:t>
+              <a:t>Requisitos técnicos y seguridad mínima</a:t>
             </a:r>
           </a:p>
           <a:p>
@@ -9074,7 +9668,7 @@
                 </a:solidFill>
                 <a:latin typeface="Montserrat"/>
               </a:rPr>
-              <a:t>004 / 017</a:t>
+              <a:t>004 / 018</a:t>
             </a:r>
           </a:p>
         </p:txBody>
@@ -9464,7 +10058,7 @@
                 </a:solidFill>
                 <a:latin typeface="Montserrat"/>
               </a:rPr>
-              <a:t>005 / 017</a:t>
+              <a:t>005 / 018</a:t>
             </a:r>
           </a:p>
         </p:txBody>
@@ -9721,7 +10315,7 @@
       </p:sp>
       <p:sp>
         <p:nvSpPr>
-          <p:cNvPr id="8" name="imgph" descr="IMGQ:propane cylinders rows outdoor"/>
+          <p:cNvPr id="8" name="imgph" descr="IMGQ:propane cylinders rows outdoor depot"/>
           <p:cNvSpPr/>
           <p:nvPr/>
         </p:nvSpPr>
@@ -9807,7 +10401,7 @@
                 </a:solidFill>
                 <a:latin typeface="Montserrat"/>
               </a:rPr>
-              <a:t>propane cylinders rows outdoor</a:t>
+              <a:t>propane cylinders rows outdoor depot</a:t>
             </a:r>
           </a:p>
         </p:txBody>
@@ -9904,7 +10498,7 @@
                 </a:solidFill>
                 <a:latin typeface="Montserrat"/>
               </a:rPr>
-              <a:t>006 / 017</a:t>
+              <a:t>006 / 018</a:t>
             </a:r>
           </a:p>
         </p:txBody>
@@ -10136,7 +10730,7 @@
       </p:sp>
       <p:sp>
         <p:nvSpPr>
-          <p:cNvPr id="8" name="imgph" descr="IMGQ:empty gas cylinder warehouse"/>
+          <p:cNvPr id="8" name="imgph" descr="IMGQ:empty gas cylinders warehouse row"/>
           <p:cNvSpPr/>
           <p:nvPr/>
         </p:nvSpPr>
@@ -10222,7 +10816,7 @@
                 </a:solidFill>
                 <a:latin typeface="Montserrat"/>
               </a:rPr>
-              <a:t>empty gas cylinder warehouse</a:t>
+              <a:t>empty gas cylinders warehouse row</a:t>
             </a:r>
           </a:p>
         </p:txBody>
@@ -10319,7 +10913,7 @@
                 </a:solidFill>
                 <a:latin typeface="Montserrat"/>
               </a:rPr>
-              <a:t>007 / 017</a:t>
+              <a:t>007 / 018</a:t>
             </a:r>
           </a:p>
         </p:txBody>
@@ -10551,7 +11145,7 @@
       </p:sp>
       <p:sp>
         <p:nvSpPr>
-          <p:cNvPr id="8" name="imgph" descr="IMGQ:outdoor gas cylinder cage storage"/>
+          <p:cNvPr id="8" name="imgph" descr="IMGQ:outdoor gas cylinder cage storage yard"/>
           <p:cNvSpPr/>
           <p:nvPr/>
         </p:nvSpPr>
@@ -10637,7 +11231,7 @@
                 </a:solidFill>
                 <a:latin typeface="Montserrat"/>
               </a:rPr>
-              <a:t>outdoor gas cylinder cage storage</a:t>
+              <a:t>outdoor gas cylinder cage storage yard</a:t>
             </a:r>
           </a:p>
         </p:txBody>
@@ -10734,7 +11328,7 @@
                 </a:solidFill>
                 <a:latin typeface="Montserrat"/>
               </a:rPr>
-              <a:t>008 / 017</a:t>
+              <a:t>008 / 018</a:t>
             </a:r>
           </a:p>
         </p:txBody>
@@ -10909,7 +11503,7 @@
                 </a:solidFill>
                 <a:latin typeface="Montserrat"/>
               </a:rPr>
-              <a:t>Excepción: superficie 25 m² o &lt; 6 m</a:t>
+              <a:t>Excepción: 25 m² o menos de 6 m</a:t>
             </a:r>
           </a:p>
           <a:p>
@@ -10966,7 +11560,7 @@
       </p:sp>
       <p:sp>
         <p:nvSpPr>
-          <p:cNvPr id="8" name="imgph" descr="IMGQ:emergency exit warehouse sign"/>
+          <p:cNvPr id="8" name="imgph" descr="IMGQ:emergency exit sign warehouse"/>
           <p:cNvSpPr/>
           <p:nvPr/>
         </p:nvSpPr>
@@ -11052,7 +11646,7 @@
                 </a:solidFill>
                 <a:latin typeface="Montserrat"/>
               </a:rPr>
-              <a:t>emergency exit warehouse sign</a:t>
+              <a:t>emergency exit sign warehouse</a:t>
             </a:r>
           </a:p>
         </p:txBody>
@@ -11149,7 +11743,7 @@
                 </a:solidFill>
                 <a:latin typeface="Montserrat"/>
               </a:rPr>
-              <a:t>009 / 017</a:t>
+              <a:t>009 / 018</a:t>
             </a:r>
           </a:p>
         </p:txBody>
@@ -11381,7 +11975,7 @@
       </p:sp>
       <p:sp>
         <p:nvSpPr>
-          <p:cNvPr id="8" name="imgph" descr="IMGQ:no smoking sign industrial"/>
+          <p:cNvPr id="8" name="imgph" descr="IMGQ:no smoking sign industrial gas"/>
           <p:cNvSpPr/>
           <p:nvPr/>
         </p:nvSpPr>
@@ -11467,7 +12061,7 @@
                 </a:solidFill>
                 <a:latin typeface="Montserrat"/>
               </a:rPr>
-              <a:t>no smoking sign industrial</a:t>
+              <a:t>no smoking sign industrial gas</a:t>
             </a:r>
           </a:p>
         </p:txBody>

--- a/Curso Gas B/02 - ITC-ICG 02-03-04 - Almacenamiento GLP y plantas GNL/02 - ITC-ICG 02-03-04 - Almacenamiento GLP y plantas GNL - Vídeo 1.pptx
+++ b/Curso Gas B/02 - ITC-ICG 02-03-04 - Almacenamiento GLP y plantas GNL/02 - ITC-ICG 02-03-04 - Almacenamiento GLP y plantas GNL - Vídeo 1.pptx
@@ -23,6 +23,7 @@
     <p:sldId id="271" r:id="rId23"/>
     <p:sldId id="272" r:id="rId24"/>
     <p:sldId id="273" r:id="rId25"/>
+    <p:sldId id="274" r:id="rId26"/>
   </p:sldIdLst>
   <p:sldSz cx="12191695" cy="6858000" type="screen4x3"/>
   <p:notesSz cx="6858000" cy="9144000"/>
@@ -594,12 +595,12 @@
           <a:lstStyle/>
           <a:p>
             <a:r>
-              <a:t>N1: ¿Qué diferencia hay entre distancia interior y distancia exterior?</a:t>
-            </a:r>
-          </a:p>
-          <a:p>
-            <a:r>
-              <a:t>N2: Piénsalo con tu propia parcela. La distancia interior es la que hay entre las bombonas y tus propios edificios, la oficina o el vestuario del centro: es de puertas para dentro, y vale seis, seis y dos metros para primera, segunda y tercera. La distancia exterior es la que hay entre las bombonas y lo que no es tuyo, la finca del vecino o la carretera pública: es de puertas para fuera, y vale veinte, quince y diez metros, medida entre los puntos más próximos. Regla de memoria: la exterior siempre es más grande, porque proteger al que está fuera, que no ha elegido tener gas al lado, pesa más. Y recuerda que estos centros grandes solo se pueden montar en zonas no residenciales.</a:t>
+              <a:t>N1: ¿Qué está terminantemente prohibido dentro de un centro?</a:t>
+            </a:r>
+          </a:p>
+          <a:p>
+            <a:r>
+              <a:t>N2: Todo lo que dé fuego. Nada de llamas libres ni de fuentes de calor que suban la temperatura de los envases, ni sustancias inflamables cerca. Por eso hay un letrero bien visible que dice gas inflamable, prohibido fumar y encender fuegos, y todo el que entra deja antes en la puerta el mechero, las cerillas, cualquier cosa que produzca chispa. Y aquí va lo que cae fijo en examen: en un centro de envases se prohíbe el llenado o el trasvase de gas de una botella a otra. Eso solo se hace en las plantas de llenado autorizadas, con sus básculas y su seguridad. Rellenar bombonas por tu cuenta es sobrellenar, fugar y jugártela; es de lo más peligroso y sancionable que existe.</a:t>
             </a:r>
           </a:p>
         </p:txBody>
@@ -669,12 +670,12 @@
           <a:lstStyle/>
           <a:p>
             <a:r>
-              <a:t>N1: ¿Cuándo hay que alejarse todavía más del vecino?</a:t>
-            </a:r>
-          </a:p>
-          <a:p>
-            <a:r>
-              <a:t>N2: Cuando al otro lado de tu valla hay algo especialmente delicado. Si tienes un colegio, un hospital, un hotel, un cuartel, un mercado o cualquier edificio de uso colectivo, o bien una vía de tren, un tranvía o una línea eléctrica aérea de alta tensión, la distancia exterior crece diez metros más. La lógica es de sentido común: donde hay mucha gente junta, o donde hay una fuente de chispa e incendio como la catenaria o la alta tensión, te alejas más. No te aprendas la lista palabra por palabra; quédate con la idea de fondo: mucha gente junta, más líneas eléctricas o férreas, igual a diez metros más.</a:t>
+              <a:t>N1: ¿Qué diferencia hay entre distancia interior y distancia exterior?</a:t>
+            </a:r>
+          </a:p>
+          <a:p>
+            <a:r>
+              <a:t>N2: Piénsalo con tu propia parcela. La distancia interior es la que hay entre las bombonas y tus propios edificios, la oficina o el vestuario del centro: es de puertas para dentro, y vale seis, seis y dos metros para primera, segunda y tercera. La distancia exterior es la que hay entre las bombonas y lo que no es tuyo, la finca del vecino o la carretera pública: es de puertas para fuera, y vale veinte, quince y diez metros, medida entre los puntos más próximos. Regla de memoria: la exterior siempre es más grande, porque proteger al que está fuera, que no ha elegido tener gas al lado, pesa más. Y recuerda que estos centros grandes solo se pueden montar en zonas no residenciales.</a:t>
             </a:r>
           </a:p>
         </p:txBody>
@@ -744,12 +745,12 @@
           <a:lstStyle/>
           <a:p>
             <a:r>
-              <a:t>N1: ¿Cómo se cierra por fuera un centro grande?</a:t>
-            </a:r>
-          </a:p>
-          <a:p>
-            <a:r>
-              <a:t>N2: Con un cerramiento que tiene dos calidades distintas, según lo que haya al otro lado. El lado que da a la calle o a donde pasa gente es un muro serio: continuo, resistente al fuego, de dos metros y medio de altura. Los lados interiores o traseros, donde no pasa nadie, pueden ser de malla metálica, más barata, de dos metros. Empareja cada material con su altura: muro dos coma cinco, malla dos. Y no te pierdas dos detalles muy preguntones: el cerramiento va a diez metros como mínimo del almacenamiento de envases llenos, y todos los edificios del centro quedan dentro de él, ninguno fuera.</a:t>
+              <a:t>N1: ¿Cuándo hay que alejarse todavía más del vecino?</a:t>
+            </a:r>
+          </a:p>
+          <a:p>
+            <a:r>
+              <a:t>N2: Cuando al otro lado de tu valla hay algo especialmente delicado. Si tienes un colegio, un hospital, un hotel, un cuartel, un mercado o cualquier edificio de uso colectivo, o bien una vía de tren, un tranvía o una línea eléctrica aérea de alta tensión, la distancia exterior crece diez metros más. La lógica es de sentido común: donde hay mucha gente junta, o donde hay una fuente de chispa e incendio como la catenaria o la alta tensión, te alejas más. No te aprendas la lista palabra por palabra; quédate con la idea de fondo: mucha gente junta, más líneas eléctricas o férreas, igual a diez metros más.</a:t>
             </a:r>
           </a:p>
         </p:txBody>
@@ -819,12 +820,12 @@
           <a:lstStyle/>
           <a:p>
             <a:r>
-              <a:t>N1: ¿Cuántas alturas de bombonas puedo apilar?</a:t>
-            </a:r>
-          </a:p>
-          <a:p>
-            <a:r>
-              <a:t>N2: Depende del peso de la botella, y la regla es muy lógica. Las domésticas, esas de hasta quince kilos, la butano naranja de toda la vida, se apilan en jaulas: cuatro alturas si van llenas y seis si van vacías, porque una vacía pesa menos y aguanta más pisos encima. En cambio, las gordas, las de más de quince kilos, van a ras de suelo, una sola altura, tanto llenas como vacías. Truco para el examen: la pequeña sube, la grande no. Las jaulas se colocan de modo que entre la carretilla elevadora, y para moverlas nada de imanes ni de cuerdas o eslingas chapuceras. ¿Por qué tanto cuidado? Porque una jaula que cae es un golpe seco en la válvula, y eso es una fuga garantizada.</a:t>
+              <a:t>N1: ¿Cómo se cierra por fuera un centro grande?</a:t>
+            </a:r>
+          </a:p>
+          <a:p>
+            <a:r>
+              <a:t>N2: Con un cerramiento que tiene dos calidades distintas, según lo que haya al otro lado. El lado que da a la calle o a donde pasa gente es un muro serio: continuo, resistente al fuego, de dos metros y medio de altura. Los lados interiores o traseros, donde no pasa nadie, pueden ser de malla metálica, más barata, de dos metros. Empareja cada material con su altura: muro dos coma cinco, malla dos. Y no te pierdas dos detalles muy preguntones: el cerramiento va a diez metros como mínimo del almacenamiento de envases llenos, y todos los edificios del centro quedan dentro de él, ninguno fuera.</a:t>
             </a:r>
           </a:p>
         </p:txBody>
@@ -894,12 +895,12 @@
           <a:lstStyle/>
           <a:p>
             <a:r>
-              <a:t>N1: ¿Con qué se apaga un incendio en un centro de primera categoría?</a:t>
-            </a:r>
-          </a:p>
-          <a:p>
-            <a:r>
-              <a:t>N2: Con agua a presión, y hay tres cifras que van siempre juntas. La red da cinco kilos por centímetro cuadrado de presión, con bocas de incendio equipadas del tipo de ene veinticinco, repartidas a diez metros como mínimo del almacenamiento de envases llenos. Y si no tienes agua de la calle, tu depósito propio y las bombas tienen que aguantar noventa minutos funcionando a esa presión, que es el tiempo para que lleguen y trabajen los bomberos. Retén también el número de bocas: seis en primera categoría, dos en segunda y tercera. La primera, además, lleva alarma de incendios y vigilancia permanente fuera del horario de trabajo. Truco visual: primera categoría, primera línea de defensa, seis bocas y alarma.</a:t>
+              <a:t>N1: ¿Cuántas alturas de bombonas puedo apilar?</a:t>
+            </a:r>
+          </a:p>
+          <a:p>
+            <a:r>
+              <a:t>N2: Depende del peso de la botella, y la regla es muy lógica. Las domésticas, esas de hasta quince kilos, la butano naranja de toda la vida, se apilan en jaulas: cuatro alturas si van llenas y seis si van vacías, porque una vacía pesa menos y aguanta más pisos encima. En cambio, las gordas, las de más de quince kilos, van a ras de suelo, una sola altura, tanto llenas como vacías. Truco para el examen: la pequeña sube, la grande no. Las jaulas se colocan de modo que entre la carretilla elevadora, y para moverlas nada de imanes ni de cuerdas o eslingas chapuceras. ¿Por qué tanto cuidado? Porque una jaula que cae es un golpe seco en la válvula, y eso es una fuga garantizada.</a:t>
             </a:r>
           </a:p>
         </p:txBody>
@@ -969,12 +970,12 @@
           <a:lstStyle/>
           <a:p>
             <a:r>
-              <a:t>N1: ¿Tengo que memorizar toda la tabla de extintores?</a:t>
-            </a:r>
-          </a:p>
-          <a:p>
-            <a:r>
-              <a:t>N2: No, tranquilo. Quédate con la lógica y con tres anclas. Primera ancla: cuanto mayor es el centro, más extintores lleva, sin más. Segunda: la tercera categoría es la única que va solo con extintores pequeños, cinco de eficacia veintiuno a, ciento trece b. Tercera: la primera categoría, la más grande, crece por tramos, sumando extintores por cada dieciocho mil setecientos cincuenta kilos que sobrepase. Y una equivalencia que preguntan mucho: puedes cambiar un extintor grande, el de cuarenta y tres a, ciento ochenta y tres b, por el pequeño de veintiuno a, ciento trece b, pero poniendo el doble. Idea sencilla: un extintor grande equivale a dos pequeños. Y un extra: si no hay agua suficiente, la Comunidad Autónoma puede permitir aumentar la dotación de extintores en un cincuenta por ciento en lugar de la red de agua.</a:t>
+              <a:t>N1: ¿Con qué se apaga un incendio en un centro de primera categoría?</a:t>
+            </a:r>
+          </a:p>
+          <a:p>
+            <a:r>
+              <a:t>N2: Con agua a presión, y hay tres cifras que van siempre juntas. La red da cinco kilos por centímetro cuadrado de presión, con bocas de incendio equipadas del tipo de ene veinticinco, repartidas a diez metros como mínimo del almacenamiento de envases llenos. Y si no tienes agua de la calle, tu depósito propio y las bombas tienen que aguantar noventa minutos funcionando a esa presión, que es el tiempo para que lleguen y trabajen los bomberos. Retén también el número de bocas: seis en primera categoría, dos en segunda y tercera. La primera, además, lleva alarma de incendios y vigilancia permanente fuera del horario de trabajo. Truco visual: primera categoría, primera línea de defensa, seis bocas y alarma.</a:t>
             </a:r>
           </a:p>
         </p:txBody>
@@ -1044,12 +1045,12 @@
           <a:lstStyle/>
           <a:p>
             <a:r>
-              <a:t>N1: ¿Qué otros detalles cierran el diseño de un centro grande?</a:t>
-            </a:r>
-          </a:p>
-          <a:p>
-            <a:r>
-              <a:t>N2: Tres, y conviene tenerlos. Uno: el centro va protegido contra las descargas eléctricas atmosféricas, es decir, contra los rayos, y no se permiten transformadores ni aparellaje de alta tensión dentro del recinto. Dos: debe tener comunicación con el exterior, un teléfono o similar, por si pasa algo. Y tres, una pieza que verás una y otra vez en este tema: ningún vehículo con motor entra al recinto si no lleva un aparato cortafuegos adaptado al tubo de escape. Ese cortafuegos es una malla que impide que una chispa o la llama del motor salga al ambiente cargado de gas. Regla sencilla: motor más zona con GLP, igual a cortafuegos obligatorio. Te reaparecerá en el transporte y en la cuarta y quinta categoría del vídeo dos.</a:t>
+              <a:t>N1: ¿Tengo que memorizar toda la tabla de extintores?</a:t>
+            </a:r>
+          </a:p>
+          <a:p>
+            <a:r>
+              <a:t>N2: No, tranquilo. Quédate con la lógica y con tres anclas. Primera ancla: cuanto mayor es el centro, más extintores lleva, sin más. Segunda: la tercera categoría es la única que va solo con extintores pequeños, cinco de eficacia veintiuno a, ciento trece b. Tercera: la primera categoría, la más grande, crece por tramos, sumando extintores por cada dieciocho mil setecientos cincuenta kilos que sobrepase. Y una equivalencia que preguntan mucho: puedes cambiar un extintor grande, el de cuarenta y tres a, ciento ochenta y tres b, por el pequeño de veintiuno a, ciento trece b, pero poniendo el doble. Idea sencilla: un extintor grande equivale a dos pequeños. Y un extra: si no hay agua suficiente, la Comunidad Autónoma puede permitir aumentar la dotación de extintores en un cincuenta por ciento en lugar de la red de agua.</a:t>
             </a:r>
           </a:p>
         </p:txBody>
@@ -1119,12 +1120,12 @@
           <a:lstStyle/>
           <a:p>
             <a:r>
-              <a:t>N1: Antes de cerrar, dame los cinco imprescindibles de este vídeo.</a:t>
-            </a:r>
-          </a:p>
-          <a:p>
-            <a:r>
-              <a:t>N2: Ahí van, apretados. Uno: la capacidad se calcula multiplicando por cero coma sesenta y cinco y contando los envases vacíos, que también suman. Dos: el almacenamiento es al aire libre, la botella siempre vertical y el trasvase está prohibido. Tres: el recorrido de evacuación no pasa de veinticinco metros. Cuatro: distancias interior seis, seis y dos, y exterior veinte, quince y diez. Y cinco: el cerramiento, muro de dos coma cinco hacia la calle, malla de dos el resto, y diez metros más si al otro lado hay colegio, hospital o alta tensión. Con esas cinco anclas tienes el esqueleto entero del vídeo colgado.</a:t>
+              <a:t>N1: ¿Qué otros detalles cierran el diseño de un centro grande?</a:t>
+            </a:r>
+          </a:p>
+          <a:p>
+            <a:r>
+              <a:t>N2: Tres, y conviene tenerlos. Uno: el centro va protegido contra las descargas eléctricas atmosféricas, es decir, contra los rayos, y no se permiten transformadores ni aparellaje de alta tensión dentro del recinto. Dos: debe tener comunicación con el exterior, un teléfono o similar, por si pasa algo. Y tres, una pieza que verás una y otra vez en este tema: ningún vehículo con motor entra al recinto si no lleva un aparato cortafuegos adaptado al tubo de escape. Ese cortafuegos es una malla que impide que una chispa o la llama del motor salga al ambiente cargado de gas. Regla sencilla: motor más zona con GLP, igual a cortafuegos obligatorio. Te reaparecerá en el transporte y en la cuarta y quinta categoría del vídeo dos.</a:t>
             </a:r>
           </a:p>
         </p:txBody>
@@ -1194,6 +1195,81 @@
           <a:lstStyle/>
           <a:p>
             <a:r>
+              <a:t>N1: Antes de cerrar, dame los cinco imprescindibles de este vídeo.</a:t>
+            </a:r>
+          </a:p>
+          <a:p>
+            <a:r>
+              <a:t>N2: Ahí van, apretados. Uno: la capacidad se calcula multiplicando por cero coma sesenta y cinco y contando los envases vacíos, que también suman. Dos: el almacenamiento es al aire libre, la botella siempre vertical y el trasvase está prohibido. Tres: el recorrido de evacuación no pasa de veinticinco metros. Cuatro: distancias interior seis, seis y dos, y exterior veinte, quince y diez. Y cinco: el cerramiento, muro de dos coma cinco hacia la calle, malla de dos el resto, y diez metros más si al otro lado hay colegio, hospital o alta tensión. Con esas cinco anclas tienes el esqueleto entero del vídeo colgado.</a:t>
+            </a:r>
+          </a:p>
+        </p:txBody>
+      </p:sp>
+      <p:sp>
+        <p:nvSpPr>
+          <p:cNvPr id="4" name="Slide Number Placeholder 3"/>
+          <p:cNvSpPr>
+            <a:spLocks noGrp="1"/>
+          </p:cNvSpPr>
+          <p:nvPr>
+            <p:ph type="sldNum" idx="5" sz="quarter"/>
+          </p:nvPr>
+        </p:nvSpPr>
+        <p:spPr/>
+      </p:sp>
+    </p:spTree>
+  </p:cSld>
+  <p:clrMapOvr>
+    <a:masterClrMapping/>
+  </p:clrMapOvr>
+</p:notes>
+</file>
+
+<file path=ppt/notesSlides/notesSlide19.xml><?xml version="1.0" encoding="utf-8"?>
+<p:notes xmlns:a="http://schemas.openxmlformats.org/drawingml/2006/main" xmlns:p="http://schemas.openxmlformats.org/presentationml/2006/main" xmlns:r="http://schemas.openxmlformats.org/officeDocument/2006/relationships">
+  <p:cSld>
+    <p:spTree>
+      <p:nvGrpSpPr>
+        <p:cNvPr id="1" name=""/>
+        <p:cNvGrpSpPr/>
+        <p:nvPr/>
+      </p:nvGrpSpPr>
+      <p:grpSpPr>
+        <a:xfrm>
+          <a:off x="0" y="0"/>
+          <a:ext cx="0" cy="0"/>
+          <a:chOff x="0" y="0"/>
+          <a:chExt cx="0" cy="0"/>
+        </a:xfrm>
+      </p:grpSpPr>
+      <p:sp>
+        <p:nvSpPr>
+          <p:cNvPr id="2" name="Slide Image Placeholder 1"/>
+          <p:cNvSpPr>
+            <a:spLocks noGrp="1"/>
+          </p:cNvSpPr>
+          <p:nvPr>
+            <p:ph type="sldImg" idx="2"/>
+          </p:nvPr>
+        </p:nvSpPr>
+        <p:spPr/>
+      </p:sp>
+      <p:sp>
+        <p:nvSpPr>
+          <p:cNvPr id="3" name="Notes Placeholder 2"/>
+          <p:cNvSpPr>
+            <a:spLocks noGrp="1"/>
+          </p:cNvSpPr>
+          <p:nvPr>
+            <p:ph type="body" idx="3" sz="quarter"/>
+          </p:nvPr>
+        </p:nvSpPr>
+        <p:spPr/>
+        <p:txBody>
+          <a:bodyPr/>
+          <a:lstStyle/>
+          <a:p>
+            <a:r>
               <a:t>N1: Cerramos fuerte. Si me quedo con lo esencial, ¿qué me llevo?</a:t>
             </a:r>
           </a:p>
@@ -1352,16 +1428,7 @@
         <p:txBody>
           <a:bodyPr/>
           <a:lstStyle/>
-          <a:p>
-            <a:r>
-              <a:t>N1: ¿Qué regula exactamente la ITC-ICG cero dos?</a:t>
-            </a:r>
-          </a:p>
-          <a:p>
-            <a:r>
-              <a:t>N2: Fija los requisitos técnicos esenciales y las medidas de seguridad mínimas para tres momentos de la vida de un centro: proyectarlo, construirlo y explotarlo. Y el objeto son los centros de almacenamiento y distribución de GLP envasado, esas naves llenas de bombonas de butano y propano, las mismas a las que se refiere el artículo dos del Reglamento. Fíjate en el matiz, porque cae: aquí hablamos de gas en envases, en botellas que van y vienen; el depósito fijo del chalé es otra instrucción distinta que veremos más adelante. Y de paso, esta ITC también recoge los criterios de transporte de esos envases, que rematamos en el vídeo dos.</a:t>
-            </a:r>
-          </a:p>
+          <a:p/>
         </p:txBody>
       </p:sp>
       <p:sp>
@@ -1429,12 +1496,12 @@
           <a:lstStyle/>
           <a:p>
             <a:r>
-              <a:t>N1: ¿Cuándo se considera que legalmente he modificado un centro?</a:t>
-            </a:r>
-          </a:p>
-          <a:p>
-            <a:r>
-              <a:t>N2: Solo cuando lo amplías y esa ampliación te hace cambiar de categoría. Vamos con un ejemplo de obra. Tienes un centro de tercera y le metes más bombonas, pero sigues estando dentro de los kilos de la tercera. Para el Reglamento no has hecho ninguna modificación reglamentaria: no tienes que rehacer papeles. Ahora bien, en cuanto cruzas el umbral de kilos y saltas a segunda, ahí sí hay modificación. Piénsalo como subir de división en el fútbol: mientras juegues en la misma liga, nada cambia; el día que asciendes, cambian las reglas. Ese matiz decide en la calle si toca legalizar de nuevo o no.</a:t>
+              <a:t>N1: ¿Qué regula exactamente la ITC-ICG cero dos?</a:t>
+            </a:r>
+          </a:p>
+          <a:p>
+            <a:r>
+              <a:t>N2: Fija los requisitos técnicos esenciales y las medidas de seguridad mínimas para tres momentos de la vida de un centro: proyectarlo, construirlo y explotarlo. Y el objeto son los centros de almacenamiento y distribución de GLP envasado, esas naves llenas de bombonas de butano y propano, las mismas a las que se refiere el artículo dos del Reglamento. Fíjate en el matiz, porque cae: aquí hablamos de gas en envases, en botellas que van y vienen; el depósito fijo del chalé es otra instrucción distinta que veremos más adelante. Y de paso, esta ITC también recoge los criterios de transporte de esos envases, que rematamos en el vídeo dos.</a:t>
             </a:r>
           </a:p>
         </p:txBody>
@@ -1504,12 +1571,12 @@
           <a:lstStyle/>
           <a:p>
             <a:r>
-              <a:t>N1: ¿Cómo se ordenan los centros, y por qué me suena al revés?</a:t>
-            </a:r>
-          </a:p>
-          <a:p>
-            <a:r>
-              <a:t>N2: Se clasifican por su capacidad nominal de contenido total, es decir, por los kilos de GLP que pueden almacenar. Y aquí está la trampa: la numeración va al revés de la intuición. La primera es la más grande, hasta doscientos cincuenta mil kilos, y la quinta es la más pequeña, hasta quinientos kilos, esa jaula que ves en la gasolinera. Para no perderte, memoriza los saltos clave de menor a mayor: quinientos, mil, doce mil quinientos, veinticinco mil y doscientos cincuenta mil kilos. Y quédate con que la cuarta y la quinta son las de poca cosa, tienda de barrio y gasolinera, con reglas mucho más suaves que veremos en el vídeo dos.</a:t>
+              <a:t>N1: ¿Cuándo se considera que legalmente he modificado un centro?</a:t>
+            </a:r>
+          </a:p>
+          <a:p>
+            <a:r>
+              <a:t>N2: Solo cuando lo amplías y esa ampliación te hace cambiar de categoría. Vamos con un ejemplo de obra. Tienes un centro de tercera y le metes más bombonas, pero sigues estando dentro de los kilos de la tercera. Para el Reglamento no has hecho ninguna modificación reglamentaria: no tienes que rehacer papeles. Ahora bien, en cuanto cruzas el umbral de kilos y saltas a segunda, ahí sí hay modificación. Piénsalo como subir de división en el fútbol: mientras juegues en la misma liga, nada cambia; el día que asciendes, cambian las reglas. Ese matiz decide en la calle si toca legalizar de nuevo o no.</a:t>
             </a:r>
           </a:p>
         </p:txBody>
@@ -1579,12 +1646,12 @@
           <a:lstStyle/>
           <a:p>
             <a:r>
-              <a:t>N1: ¿Cómo se calcula la capacidad y dónde están las trampas?</a:t>
-            </a:r>
-          </a:p>
-          <a:p>
-            <a:r>
-              <a:t>N2: La fórmula es capacidad total igual a capacidad nominal del envase, por el número de envases, por cero coma sesenta y cinco. Hay dos trampas de examen escondidas en una sola línea. La primera es ese cero coma sesenta y cinco: un coeficiente de seguridad, porque no se cuenta el cien por cien del volumen del envase. La segunda está en la letra ene, el número de envases: cuentas los llenos y también los vacíos. ¿Por qué los vacíos, si están vacíos? Porque una bombona vacía nunca lo está del todo, siempre le queda un poco de gas y da la lata igual. Así que a la hora de sumar kilos, la botella vacía también suma. Truco para acordarte: en el recuento no perdono ni las vacías. Y la capacidad total del centro es la suma de las parciales de cada tipo de envase.</a:t>
+              <a:t>N1: ¿Cómo se ordenan los centros, y por qué me suena al revés?</a:t>
+            </a:r>
+          </a:p>
+          <a:p>
+            <a:r>
+              <a:t>N2: Se clasifican por su capacidad nominal de contenido total, es decir, por los kilos de GLP que pueden almacenar. Y aquí está la trampa: la numeración va al revés de la intuición. La primera es la más grande, hasta doscientos cincuenta mil kilos, y la quinta es la más pequeña, hasta quinientos kilos, esa jaula que ves en la gasolinera. Para no perderte, memoriza los saltos clave de menor a mayor: quinientos, mil, doce mil quinientos, veinticinco mil y doscientos cincuenta mil kilos. Y quédate con que la cuarta y la quinta son las de poca cosa, tienda de barrio y gasolinera, con reglas mucho más suaves que veremos en el vídeo dos.</a:t>
             </a:r>
           </a:p>
         </p:txBody>
@@ -1654,12 +1721,12 @@
           <a:lstStyle/>
           <a:p>
             <a:r>
-              <a:t>N1: ¿Por qué las bombonas van fuera y no en un almacén cerrado?</a:t>
-            </a:r>
-          </a:p>
-          <a:p>
-            <a:r>
-              <a:t>N2: Porque un centro de bombonas no es un almacén cerrado. Las botellas van al aire libre, como mucho bajo una cubierta ligera. Y la razón es física, es el corazón de todo el tema: si hubiera una fuga en un recinto cerrado, el GLP, que pesa más que el aire, se acumularía a ras de suelo, se embolsaría, y con una simple chispa tendrías la explosión. Al aire libre, en cambio, el gas se disipa y se va. Además, la zona de envases llenos va separada y señalizada de la de vacíos, en una sola planta no subterránea, con el piso al nivel del terreno o por encima, nunca por debajo. Y ojo, estas reglas generales valen para todos los centros salvo los de quinta categoría.</a:t>
+              <a:t>N1: ¿Cómo se calcula la capacidad y dónde están las trampas?</a:t>
+            </a:r>
+          </a:p>
+          <a:p>
+            <a:r>
+              <a:t>N2: La fórmula es capacidad total igual a capacidad nominal del envase, por el número de envases, por cero coma sesenta y cinco. Hay dos trampas de examen escondidas en una sola línea. La primera es ese cero coma sesenta y cinco: un coeficiente de seguridad, porque no se cuenta el cien por cien del volumen del envase. La segunda está en la letra ene, el número de envases: cuentas los llenos y también los vacíos. ¿Por qué los vacíos, si están vacíos? Porque una bombona vacía nunca lo está del todo, siempre le queda un poco de gas y da la lata igual. Así que a la hora de sumar kilos, la botella vacía también suma. Truco para acordarte: en el recuento no perdono ni las vacías. Y la capacidad total del centro es la suma de las parciales de cada tipo de envase.</a:t>
             </a:r>
           </a:p>
         </p:txBody>
@@ -1729,12 +1796,12 @@
           <a:lstStyle/>
           <a:p>
             <a:r>
-              <a:t>N1: ¿Cómo se sale de un centro si hay un susto, y cómo se colocan las botellas?</a:t>
-            </a:r>
-          </a:p>
-          <a:p>
-            <a:r>
-              <a:t>N2: Empecemos por salir. Hay que prever la salida fácil del personal: el recorrido real hasta el exterior, sorteando cualquier obstáculo, no puede pasar de veinticinco metros. Se libran de esa regla los almacenamientos muy pequeños, de veinticinco metros cuadrados de superficie, o cuando la salida está a menos de seis metros. Y ahora la colocación, una regla de oro que verás repetida: los envases llenos con válvula de seguridad se colocan siempre en posición vertical, de pie, y en jaulas si se apilan en más de una altura. ¿Por qué de pie? Porque una botella tumbada deja la válvula tocando el líquido, y eso es una fuga esperando a pasar.</a:t>
+              <a:t>N1: ¿Por qué las bombonas van fuera y no en un almacén cerrado?</a:t>
+            </a:r>
+          </a:p>
+          <a:p>
+            <a:r>
+              <a:t>N2: Porque un centro de bombonas no es un almacén cerrado. Las botellas van al aire libre, como mucho bajo una cubierta ligera. Y la razón es física, es el corazón de todo el tema: si hubiera una fuga en un recinto cerrado, el GLP, que pesa más que el aire, se acumularía a ras de suelo, se embolsaría, y con una simple chispa tendrías la explosión. Al aire libre, en cambio, el gas se disipa y se va. Además, la zona de envases llenos va separada y señalizada de la de vacíos, en una sola planta no subterránea, con el piso al nivel del terreno o por encima, nunca por debajo. Y ojo, estas reglas generales valen para todos los centros salvo los de quinta categoría.</a:t>
             </a:r>
           </a:p>
         </p:txBody>
@@ -1804,12 +1871,12 @@
           <a:lstStyle/>
           <a:p>
             <a:r>
-              <a:t>N1: ¿Qué está terminantemente prohibido dentro de un centro?</a:t>
-            </a:r>
-          </a:p>
-          <a:p>
-            <a:r>
-              <a:t>N2: Todo lo que dé fuego. Nada de llamas libres ni de fuentes de calor que suban la temperatura de los envases, ni sustancias inflamables cerca. Por eso hay un letrero bien visible que dice gas inflamable, prohibido fumar y encender fuegos, y todo el que entra deja antes en la puerta el mechero, las cerillas, cualquier cosa que produzca chispa. Y aquí va lo que cae fijo en examen: en un centro de envases se prohíbe el llenado o el trasvase de gas de una botella a otra. Eso solo se hace en las plantas de llenado autorizadas, con sus básculas y su seguridad. Rellenar bombonas por tu cuenta es sobrellenar, fugar y jugártela; es de lo más peligroso y sancionable que existe.</a:t>
+              <a:t>N1: ¿Cómo se sale de un centro si hay un susto, y cómo se colocan las botellas?</a:t>
+            </a:r>
+          </a:p>
+          <a:p>
+            <a:r>
+              <a:t>N2: Empecemos por salir. Hay que prever la salida fácil del personal: el recorrido real hasta el exterior, sorteando cualquier obstáculo, no puede pasar de veinticinco metros. Se libran de esa regla los almacenamientos muy pequeños, de veinticinco metros cuadrados de superficie, o cuando la salida está a menos de seis metros. Y ahora la colocación, una regla de oro que verás repetida: los envases llenos con válvula de seguridad se colocan siempre en posición vertical, de pie, y en jaulas si se apilan en más de una altura. ¿Por qué de pie? Porque una botella tumbada deja la válvula tocando el líquido, y eso es una fuga esperando a pasar.</a:t>
             </a:r>
           </a:p>
         </p:txBody>
@@ -4884,7 +4951,7 @@
             <a:r>
               <a:rPr sz="1400" b="1" i="0">
                 <a:solidFill>
-                  <a:srgbClr val="CADCFC"/>
+                  <a:srgbClr val="F4A24C"/>
                 </a:solidFill>
                 <a:latin typeface="Montserrat"/>
               </a:rPr>
@@ -4895,13 +4962,57 @@
       </p:sp>
       <p:sp>
         <p:nvSpPr>
-          <p:cNvPr id="4" name="TextBox 3"/>
+          <p:cNvPr id="4" name="Rounded Rectangle 3"/>
+          <p:cNvSpPr/>
+          <p:nvPr/>
+        </p:nvSpPr>
+        <p:spPr>
+          <a:xfrm>
+            <a:off x="868680" y="2057400"/>
+            <a:ext cx="1463040" cy="82296"/>
+          </a:xfrm>
+          <a:prstGeom prst="roundRect">
+            <a:avLst/>
+          </a:prstGeom>
+          <a:solidFill>
+            <a:srgbClr val="E8801A"/>
+          </a:solidFill>
+          <a:ln>
+            <a:noFill/>
+          </a:ln>
+          <a:effectLst/>
+        </p:spPr>
+        <p:style>
+          <a:lnRef idx="1">
+            <a:schemeClr val="accent1"/>
+          </a:lnRef>
+          <a:fillRef idx="3">
+            <a:schemeClr val="accent1"/>
+          </a:fillRef>
+          <a:effectRef idx="2">
+            <a:schemeClr val="accent1"/>
+          </a:effectRef>
+          <a:fontRef idx="minor">
+            <a:schemeClr val="lt1"/>
+          </a:fontRef>
+        </p:style>
+        <p:txBody>
+          <a:bodyPr rtlCol="0" anchor="ctr"/>
+          <a:lstStyle/>
+          <a:p>
+            <a:pPr algn="ctr"/>
+          </a:p>
+        </p:txBody>
+      </p:sp>
+      <p:sp>
+        <p:nvSpPr>
+          <p:cNvPr id="5" name="TextBox 4"/>
           <p:cNvSpPr txBox="1"/>
           <p:nvPr/>
         </p:nvSpPr>
         <p:spPr>
           <a:xfrm>
-            <a:off x="822960" y="2194560"/>
+            <a:off x="822960" y="2286000"/>
             <a:ext cx="10515600" cy="2011680"/>
           </a:xfrm>
           <a:prstGeom prst="rect">
@@ -4940,7 +5051,7 @@
       </p:sp>
       <p:sp>
         <p:nvSpPr>
-          <p:cNvPr id="5" name="TextBox 4"/>
+          <p:cNvPr id="6" name="TextBox 5"/>
           <p:cNvSpPr txBox="1"/>
           <p:nvPr/>
         </p:nvSpPr>
@@ -5064,7 +5175,7 @@
                 </a:solidFill>
                 <a:latin typeface="Montserrat"/>
               </a:rPr>
-              <a:t>010 / 018</a:t>
+              <a:t>010 / 019</a:t>
             </a:r>
           </a:p>
         </p:txBody>
@@ -5112,7 +5223,7 @@
         <p:spPr>
           <a:xfrm>
             <a:off x="822960" y="457200"/>
-            <a:ext cx="8229600" cy="365760"/>
+            <a:ext cx="10058400" cy="365760"/>
           </a:xfrm>
           <a:prstGeom prst="rect">
             <a:avLst/>
@@ -5126,13 +5237,13 @@
           <a:lstStyle/>
           <a:p>
             <a:r>
-              <a:rPr sz="1200" b="1" i="0">
-                <a:solidFill>
-                  <a:srgbClr val="64748B"/>
-                </a:solidFill>
-                <a:latin typeface="Montserrat"/>
-              </a:rPr>
-              <a:t>APARTADO 3.2 · 1.ª, 2.ª Y 3.ª</a:t>
+              <a:rPr sz="1300" b="1" i="0">
+                <a:solidFill>
+                  <a:srgbClr val="E8801A"/>
+                </a:solidFill>
+                <a:latin typeface="Montserrat"/>
+              </a:rPr>
+              <a:t>APARTADO 3.1 · PROHIBICIONES</a:t>
             </a:r>
           </a:p>
         </p:txBody>
@@ -5160,26 +5271,70 @@
           <a:lstStyle/>
           <a:p>
             <a:r>
-              <a:rPr sz="2700" b="1" i="0">
+              <a:rPr sz="2800" b="1" i="0">
                 <a:solidFill>
                   <a:srgbClr val="1E2761"/>
                 </a:solidFill>
                 <a:latin typeface="Montserrat"/>
               </a:rPr>
-              <a:t>Distancias de seguridad</a:t>
-            </a:r>
-          </a:p>
-        </p:txBody>
-      </p:sp>
-      <p:sp>
-        <p:nvSpPr>
-          <p:cNvPr id="7" name="TextBox 6"/>
+              <a:t>Fuego y trasvase, prohibidos</a:t>
+            </a:r>
+          </a:p>
+        </p:txBody>
+      </p:sp>
+      <p:sp>
+        <p:nvSpPr>
+          <p:cNvPr id="7" name="Rounded Rectangle 6"/>
+          <p:cNvSpPr/>
+          <p:nvPr/>
+        </p:nvSpPr>
+        <p:spPr>
+          <a:xfrm>
+            <a:off x="868680" y="1627632"/>
+            <a:ext cx="2011680" cy="73152"/>
+          </a:xfrm>
+          <a:prstGeom prst="roundRect">
+            <a:avLst/>
+          </a:prstGeom>
+          <a:solidFill>
+            <a:srgbClr val="E8801A"/>
+          </a:solidFill>
+          <a:ln>
+            <a:noFill/>
+          </a:ln>
+          <a:effectLst/>
+        </p:spPr>
+        <p:style>
+          <a:lnRef idx="1">
+            <a:schemeClr val="accent1"/>
+          </a:lnRef>
+          <a:fillRef idx="3">
+            <a:schemeClr val="accent1"/>
+          </a:fillRef>
+          <a:effectRef idx="2">
+            <a:schemeClr val="accent1"/>
+          </a:effectRef>
+          <a:fontRef idx="minor">
+            <a:schemeClr val="lt1"/>
+          </a:fontRef>
+        </p:style>
+        <p:txBody>
+          <a:bodyPr rtlCol="0" anchor="ctr"/>
+          <a:lstStyle/>
+          <a:p>
+            <a:pPr algn="ctr"/>
+          </a:p>
+        </p:txBody>
+      </p:sp>
+      <p:sp>
+        <p:nvSpPr>
+          <p:cNvPr id="8" name="TextBox 7"/>
           <p:cNvSpPr txBox="1"/>
           <p:nvPr/>
         </p:nvSpPr>
         <p:spPr>
           <a:xfrm>
-            <a:off x="822960" y="1920240"/>
+            <a:off x="822960" y="1965960"/>
             <a:ext cx="4983480" cy="4206240"/>
           </a:xfrm>
           <a:prstGeom prst="rect">
@@ -5195,17 +5350,17 @@
           <a:p>
             <a:pPr>
               <a:spcAft>
-                <a:spcPts val="1000"/>
+                <a:spcPts val="1100"/>
               </a:spcAft>
             </a:pPr>
             <a:r>
               <a:rPr sz="1600" b="1" i="0">
                 <a:solidFill>
-                  <a:srgbClr val="2E3A80"/>
-                </a:solidFill>
-                <a:latin typeface="Montserrat"/>
-              </a:rPr>
-              <a:t>•  </a:t>
+                  <a:srgbClr val="E8801A"/>
+                </a:solidFill>
+                <a:latin typeface="Montserrat"/>
+              </a:rPr>
+              <a:t>▸  </a:t>
             </a:r>
             <a:r>
               <a:rPr sz="1600" b="0" i="0">
@@ -5214,23 +5369,23 @@
                 </a:solidFill>
                 <a:latin typeface="Montserrat"/>
               </a:rPr>
-              <a:t>Solo en zonas no residenciales</a:t>
+              <a:t>Sin llamas ni fuentes de calor</a:t>
             </a:r>
           </a:p>
           <a:p>
             <a:pPr>
               <a:spcAft>
-                <a:spcPts val="1000"/>
+                <a:spcPts val="1100"/>
               </a:spcAft>
             </a:pPr>
             <a:r>
               <a:rPr sz="1600" b="1" i="0">
                 <a:solidFill>
-                  <a:srgbClr val="2E3A80"/>
-                </a:solidFill>
-                <a:latin typeface="Montserrat"/>
-              </a:rPr>
-              <a:t>•  </a:t>
+                  <a:srgbClr val="E8801A"/>
+                </a:solidFill>
+                <a:latin typeface="Montserrat"/>
+              </a:rPr>
+              <a:t>▸  </a:t>
             </a:r>
             <a:r>
               <a:rPr sz="1600" b="0" i="0">
@@ -5239,23 +5394,23 @@
                 </a:solidFill>
                 <a:latin typeface="Montserrat"/>
               </a:rPr>
-              <a:t>Interior: 6 · 6 · 2 m</a:t>
+              <a:t>Cartel: prohibido fumar y encender</a:t>
             </a:r>
           </a:p>
           <a:p>
             <a:pPr>
               <a:spcAft>
-                <a:spcPts val="1000"/>
+                <a:spcPts val="1100"/>
               </a:spcAft>
             </a:pPr>
             <a:r>
               <a:rPr sz="1600" b="1" i="0">
                 <a:solidFill>
-                  <a:srgbClr val="2E3A80"/>
-                </a:solidFill>
-                <a:latin typeface="Montserrat"/>
-              </a:rPr>
-              <a:t>•  </a:t>
+                  <a:srgbClr val="E8801A"/>
+                </a:solidFill>
+                <a:latin typeface="Montserrat"/>
+              </a:rPr>
+              <a:t>▸  </a:t>
             </a:r>
             <a:r>
               <a:rPr sz="1600" b="0" i="0">
@@ -5264,23 +5419,23 @@
                 </a:solidFill>
                 <a:latin typeface="Montserrat"/>
               </a:rPr>
-              <a:t>Exterior: 20 · 15 · 10 m</a:t>
+              <a:t>Mechero y cerillas, en la puerta</a:t>
             </a:r>
           </a:p>
           <a:p>
             <a:pPr>
               <a:spcAft>
-                <a:spcPts val="1000"/>
+                <a:spcPts val="1100"/>
               </a:spcAft>
             </a:pPr>
             <a:r>
               <a:rPr sz="1600" b="1" i="0">
                 <a:solidFill>
-                  <a:srgbClr val="2E3A80"/>
-                </a:solidFill>
-                <a:latin typeface="Montserrat"/>
-              </a:rPr>
-              <a:t>•  </a:t>
+                  <a:srgbClr val="E8801A"/>
+                </a:solidFill>
+                <a:latin typeface="Montserrat"/>
+              </a:rPr>
+              <a:t>▸  </a:t>
             </a:r>
             <a:r>
               <a:rPr sz="1600" b="0" i="0">
@@ -5289,14 +5444,14 @@
                 </a:solidFill>
                 <a:latin typeface="Montserrat"/>
               </a:rPr>
-              <a:t>La exterior siempre es mayor</a:t>
-            </a:r>
-          </a:p>
-        </p:txBody>
-      </p:sp>
-      <p:sp>
-        <p:nvSpPr>
-          <p:cNvPr id="8" name="imgph" descr="IMGQ:industrial fence perimeter storage"/>
+              <a:t>Prohibido rellenar o trasvasar</a:t>
+            </a:r>
+          </a:p>
+        </p:txBody>
+      </p:sp>
+      <p:sp>
+        <p:nvSpPr>
+          <p:cNvPr id="9" name="imgph" descr="IMGQ:no smoking sign industrial gas"/>
           <p:cNvSpPr/>
           <p:nvPr/>
         </p:nvSpPr>
@@ -5342,7 +5497,7 @@
       </p:sp>
       <p:sp>
         <p:nvSpPr>
-          <p:cNvPr id="9" name="TextBox 8"/>
+          <p:cNvPr id="10" name="TextBox 9"/>
           <p:cNvSpPr txBox="1"/>
           <p:nvPr/>
         </p:nvSpPr>
@@ -5382,7 +5537,7 @@
                 </a:solidFill>
                 <a:latin typeface="Montserrat"/>
               </a:rPr>
-              <a:t>industrial fence perimeter storage</a:t>
+              <a:t>no smoking sign industrial gas</a:t>
             </a:r>
           </a:p>
         </p:txBody>
@@ -5479,7 +5634,7 @@
                 </a:solidFill>
                 <a:latin typeface="Montserrat"/>
               </a:rPr>
-              <a:t>011 / 018</a:t>
+              <a:t>011 / 019</a:t>
             </a:r>
           </a:p>
         </p:txBody>
@@ -5527,7 +5682,7 @@
         <p:spPr>
           <a:xfrm>
             <a:off x="822960" y="457200"/>
-            <a:ext cx="8229600" cy="365760"/>
+            <a:ext cx="10058400" cy="365760"/>
           </a:xfrm>
           <a:prstGeom prst="rect">
             <a:avLst/>
@@ -5541,13 +5696,13 @@
           <a:lstStyle/>
           <a:p>
             <a:r>
-              <a:rPr sz="1200" b="1" i="0">
-                <a:solidFill>
-                  <a:srgbClr val="64748B"/>
-                </a:solidFill>
-                <a:latin typeface="Montserrat"/>
-              </a:rPr>
-              <a:t>APARTADO 3.2 · DISTANCIAS</a:t>
+              <a:rPr sz="1300" b="1" i="0">
+                <a:solidFill>
+                  <a:srgbClr val="E8801A"/>
+                </a:solidFill>
+                <a:latin typeface="Montserrat"/>
+              </a:rPr>
+              <a:t>APARTADO 3.2 · 1.ª, 2.ª Y 3.ª</a:t>
             </a:r>
           </a:p>
         </p:txBody>
@@ -5575,26 +5730,70 @@
           <a:lstStyle/>
           <a:p>
             <a:r>
-              <a:rPr sz="2700" b="1" i="0">
+              <a:rPr sz="2800" b="1" i="0">
                 <a:solidFill>
                   <a:srgbClr val="1E2761"/>
                 </a:solidFill>
                 <a:latin typeface="Montserrat"/>
               </a:rPr>
-              <a:t>El +10 m de sitios sensibles</a:t>
-            </a:r>
-          </a:p>
-        </p:txBody>
-      </p:sp>
-      <p:sp>
-        <p:nvSpPr>
-          <p:cNvPr id="7" name="TextBox 6"/>
+              <a:t>Distancias de seguridad</a:t>
+            </a:r>
+          </a:p>
+        </p:txBody>
+      </p:sp>
+      <p:sp>
+        <p:nvSpPr>
+          <p:cNvPr id="7" name="Rounded Rectangle 6"/>
+          <p:cNvSpPr/>
+          <p:nvPr/>
+        </p:nvSpPr>
+        <p:spPr>
+          <a:xfrm>
+            <a:off x="868680" y="1627632"/>
+            <a:ext cx="2011680" cy="73152"/>
+          </a:xfrm>
+          <a:prstGeom prst="roundRect">
+            <a:avLst/>
+          </a:prstGeom>
+          <a:solidFill>
+            <a:srgbClr val="E8801A"/>
+          </a:solidFill>
+          <a:ln>
+            <a:noFill/>
+          </a:ln>
+          <a:effectLst/>
+        </p:spPr>
+        <p:style>
+          <a:lnRef idx="1">
+            <a:schemeClr val="accent1"/>
+          </a:lnRef>
+          <a:fillRef idx="3">
+            <a:schemeClr val="accent1"/>
+          </a:fillRef>
+          <a:effectRef idx="2">
+            <a:schemeClr val="accent1"/>
+          </a:effectRef>
+          <a:fontRef idx="minor">
+            <a:schemeClr val="lt1"/>
+          </a:fontRef>
+        </p:style>
+        <p:txBody>
+          <a:bodyPr rtlCol="0" anchor="ctr"/>
+          <a:lstStyle/>
+          <a:p>
+            <a:pPr algn="ctr"/>
+          </a:p>
+        </p:txBody>
+      </p:sp>
+      <p:sp>
+        <p:nvSpPr>
+          <p:cNvPr id="8" name="TextBox 7"/>
           <p:cNvSpPr txBox="1"/>
           <p:nvPr/>
         </p:nvSpPr>
         <p:spPr>
           <a:xfrm>
-            <a:off x="822960" y="1920240"/>
+            <a:off x="822960" y="1965960"/>
             <a:ext cx="4983480" cy="4206240"/>
           </a:xfrm>
           <a:prstGeom prst="rect">
@@ -5610,17 +5809,17 @@
           <a:p>
             <a:pPr>
               <a:spcAft>
-                <a:spcPts val="1000"/>
+                <a:spcPts val="1100"/>
               </a:spcAft>
             </a:pPr>
             <a:r>
               <a:rPr sz="1600" b="1" i="0">
                 <a:solidFill>
-                  <a:srgbClr val="2E3A80"/>
-                </a:solidFill>
-                <a:latin typeface="Montserrat"/>
-              </a:rPr>
-              <a:t>•  </a:t>
+                  <a:srgbClr val="E8801A"/>
+                </a:solidFill>
+                <a:latin typeface="Montserrat"/>
+              </a:rPr>
+              <a:t>▸  </a:t>
             </a:r>
             <a:r>
               <a:rPr sz="1600" b="0" i="0">
@@ -5629,23 +5828,23 @@
                 </a:solidFill>
                 <a:latin typeface="Montserrat"/>
               </a:rPr>
-              <a:t>Colegios, hospitales, hoteles</a:t>
+              <a:t>Solo en zonas no residenciales</a:t>
             </a:r>
           </a:p>
           <a:p>
             <a:pPr>
               <a:spcAft>
-                <a:spcPts val="1000"/>
+                <a:spcPts val="1100"/>
               </a:spcAft>
             </a:pPr>
             <a:r>
               <a:rPr sz="1600" b="1" i="0">
                 <a:solidFill>
-                  <a:srgbClr val="2E3A80"/>
-                </a:solidFill>
-                <a:latin typeface="Montserrat"/>
-              </a:rPr>
-              <a:t>•  </a:t>
+                  <a:srgbClr val="E8801A"/>
+                </a:solidFill>
+                <a:latin typeface="Montserrat"/>
+              </a:rPr>
+              <a:t>▸  </a:t>
             </a:r>
             <a:r>
               <a:rPr sz="1600" b="0" i="0">
@@ -5654,23 +5853,23 @@
                 </a:solidFill>
                 <a:latin typeface="Montserrat"/>
               </a:rPr>
-              <a:t>Cuarteles, mercados, museos</a:t>
+              <a:t>Interior: 6 · 6 · 2 m</a:t>
             </a:r>
           </a:p>
           <a:p>
             <a:pPr>
               <a:spcAft>
-                <a:spcPts val="1000"/>
+                <a:spcPts val="1100"/>
               </a:spcAft>
             </a:pPr>
             <a:r>
               <a:rPr sz="1600" b="1" i="0">
                 <a:solidFill>
-                  <a:srgbClr val="2E3A80"/>
-                </a:solidFill>
-                <a:latin typeface="Montserrat"/>
-              </a:rPr>
-              <a:t>•  </a:t>
+                  <a:srgbClr val="E8801A"/>
+                </a:solidFill>
+                <a:latin typeface="Montserrat"/>
+              </a:rPr>
+              <a:t>▸  </a:t>
             </a:r>
             <a:r>
               <a:rPr sz="1600" b="0" i="0">
@@ -5679,23 +5878,23 @@
                 </a:solidFill>
                 <a:latin typeface="Montserrat"/>
               </a:rPr>
-              <a:t>Vías de tren y tranvía</a:t>
+              <a:t>Exterior: 20 · 15 · 10 m</a:t>
             </a:r>
           </a:p>
           <a:p>
             <a:pPr>
               <a:spcAft>
-                <a:spcPts val="1000"/>
+                <a:spcPts val="1100"/>
               </a:spcAft>
             </a:pPr>
             <a:r>
               <a:rPr sz="1600" b="1" i="0">
                 <a:solidFill>
-                  <a:srgbClr val="2E3A80"/>
-                </a:solidFill>
-                <a:latin typeface="Montserrat"/>
-              </a:rPr>
-              <a:t>•  </a:t>
+                  <a:srgbClr val="E8801A"/>
+                </a:solidFill>
+                <a:latin typeface="Montserrat"/>
+              </a:rPr>
+              <a:t>▸  </a:t>
             </a:r>
             <a:r>
               <a:rPr sz="1600" b="0" i="0">
@@ -5704,14 +5903,14 @@
                 </a:solidFill>
                 <a:latin typeface="Montserrat"/>
               </a:rPr>
-              <a:t>Líneas eléctricas de alta tensión</a:t>
-            </a:r>
-          </a:p>
-        </p:txBody>
-      </p:sp>
-      <p:sp>
-        <p:nvSpPr>
-          <p:cNvPr id="8" name="imgph" descr="IMGQ:school building exterior street"/>
+              <a:t>La exterior siempre es mayor</a:t>
+            </a:r>
+          </a:p>
+        </p:txBody>
+      </p:sp>
+      <p:sp>
+        <p:nvSpPr>
+          <p:cNvPr id="9" name="imgph" descr="IMGQ:industrial fence perimeter storage"/>
           <p:cNvSpPr/>
           <p:nvPr/>
         </p:nvSpPr>
@@ -5757,7 +5956,7 @@
       </p:sp>
       <p:sp>
         <p:nvSpPr>
-          <p:cNvPr id="9" name="TextBox 8"/>
+          <p:cNvPr id="10" name="TextBox 9"/>
           <p:cNvSpPr txBox="1"/>
           <p:nvPr/>
         </p:nvSpPr>
@@ -5797,7 +5996,7 @@
                 </a:solidFill>
                 <a:latin typeface="Montserrat"/>
               </a:rPr>
-              <a:t>school building exterior street</a:t>
+              <a:t>industrial fence perimeter storage</a:t>
             </a:r>
           </a:p>
         </p:txBody>
@@ -5894,7 +6093,7 @@
                 </a:solidFill>
                 <a:latin typeface="Montserrat"/>
               </a:rPr>
-              <a:t>012 / 018</a:t>
+              <a:t>012 / 019</a:t>
             </a:r>
           </a:p>
         </p:txBody>
@@ -5942,7 +6141,7 @@
         <p:spPr>
           <a:xfrm>
             <a:off x="822960" y="457200"/>
-            <a:ext cx="8229600" cy="365760"/>
+            <a:ext cx="10058400" cy="365760"/>
           </a:xfrm>
           <a:prstGeom prst="rect">
             <a:avLst/>
@@ -5956,13 +6155,13 @@
           <a:lstStyle/>
           <a:p>
             <a:r>
-              <a:rPr sz="1200" b="1" i="0">
-                <a:solidFill>
-                  <a:srgbClr val="64748B"/>
-                </a:solidFill>
-                <a:latin typeface="Montserrat"/>
-              </a:rPr>
-              <a:t>APARTADO 3.2 · CERRAMIENTO</a:t>
+              <a:rPr sz="1300" b="1" i="0">
+                <a:solidFill>
+                  <a:srgbClr val="E8801A"/>
+                </a:solidFill>
+                <a:latin typeface="Montserrat"/>
+              </a:rPr>
+              <a:t>APARTADO 3.2 · DISTANCIAS</a:t>
             </a:r>
           </a:p>
         </p:txBody>
@@ -5990,26 +6189,70 @@
           <a:lstStyle/>
           <a:p>
             <a:r>
-              <a:rPr sz="2700" b="1" i="0">
+              <a:rPr sz="2800" b="1" i="0">
                 <a:solidFill>
                   <a:srgbClr val="1E2761"/>
                 </a:solidFill>
                 <a:latin typeface="Montserrat"/>
               </a:rPr>
-              <a:t>El muro y la malla</a:t>
-            </a:r>
-          </a:p>
-        </p:txBody>
-      </p:sp>
-      <p:sp>
-        <p:nvSpPr>
-          <p:cNvPr id="7" name="TextBox 6"/>
+              <a:t>El +10 m de sitios sensibles</a:t>
+            </a:r>
+          </a:p>
+        </p:txBody>
+      </p:sp>
+      <p:sp>
+        <p:nvSpPr>
+          <p:cNvPr id="7" name="Rounded Rectangle 6"/>
+          <p:cNvSpPr/>
+          <p:nvPr/>
+        </p:nvSpPr>
+        <p:spPr>
+          <a:xfrm>
+            <a:off x="868680" y="1627632"/>
+            <a:ext cx="2011680" cy="73152"/>
+          </a:xfrm>
+          <a:prstGeom prst="roundRect">
+            <a:avLst/>
+          </a:prstGeom>
+          <a:solidFill>
+            <a:srgbClr val="E8801A"/>
+          </a:solidFill>
+          <a:ln>
+            <a:noFill/>
+          </a:ln>
+          <a:effectLst/>
+        </p:spPr>
+        <p:style>
+          <a:lnRef idx="1">
+            <a:schemeClr val="accent1"/>
+          </a:lnRef>
+          <a:fillRef idx="3">
+            <a:schemeClr val="accent1"/>
+          </a:fillRef>
+          <a:effectRef idx="2">
+            <a:schemeClr val="accent1"/>
+          </a:effectRef>
+          <a:fontRef idx="minor">
+            <a:schemeClr val="lt1"/>
+          </a:fontRef>
+        </p:style>
+        <p:txBody>
+          <a:bodyPr rtlCol="0" anchor="ctr"/>
+          <a:lstStyle/>
+          <a:p>
+            <a:pPr algn="ctr"/>
+          </a:p>
+        </p:txBody>
+      </p:sp>
+      <p:sp>
+        <p:nvSpPr>
+          <p:cNvPr id="8" name="TextBox 7"/>
           <p:cNvSpPr txBox="1"/>
           <p:nvPr/>
         </p:nvSpPr>
         <p:spPr>
           <a:xfrm>
-            <a:off x="822960" y="1920240"/>
+            <a:off x="822960" y="1965960"/>
             <a:ext cx="4983480" cy="4206240"/>
           </a:xfrm>
           <a:prstGeom prst="rect">
@@ -6025,17 +6268,17 @@
           <a:p>
             <a:pPr>
               <a:spcAft>
-                <a:spcPts val="1000"/>
+                <a:spcPts val="1100"/>
               </a:spcAft>
             </a:pPr>
             <a:r>
               <a:rPr sz="1600" b="1" i="0">
                 <a:solidFill>
-                  <a:srgbClr val="2E3A80"/>
-                </a:solidFill>
-                <a:latin typeface="Montserrat"/>
-              </a:rPr>
-              <a:t>•  </a:t>
+                  <a:srgbClr val="E8801A"/>
+                </a:solidFill>
+                <a:latin typeface="Montserrat"/>
+              </a:rPr>
+              <a:t>▸  </a:t>
             </a:r>
             <a:r>
               <a:rPr sz="1600" b="0" i="0">
@@ -6044,23 +6287,23 @@
                 </a:solidFill>
                 <a:latin typeface="Montserrat"/>
               </a:rPr>
-              <a:t>A 10 m mínimo del almacenamiento</a:t>
+              <a:t>Colegios, hospitales, hoteles</a:t>
             </a:r>
           </a:p>
           <a:p>
             <a:pPr>
               <a:spcAft>
-                <a:spcPts val="1000"/>
+                <a:spcPts val="1100"/>
               </a:spcAft>
             </a:pPr>
             <a:r>
               <a:rPr sz="1600" b="1" i="0">
                 <a:solidFill>
-                  <a:srgbClr val="2E3A80"/>
-                </a:solidFill>
-                <a:latin typeface="Montserrat"/>
-              </a:rPr>
-              <a:t>•  </a:t>
+                  <a:srgbClr val="E8801A"/>
+                </a:solidFill>
+                <a:latin typeface="Montserrat"/>
+              </a:rPr>
+              <a:t>▸  </a:t>
             </a:r>
             <a:r>
               <a:rPr sz="1600" b="0" i="0">
@@ -6069,23 +6312,23 @@
                 </a:solidFill>
                 <a:latin typeface="Montserrat"/>
               </a:rPr>
-              <a:t>Todos los edificios, dentro</a:t>
+              <a:t>Cuarteles, mercados, museos</a:t>
             </a:r>
           </a:p>
           <a:p>
             <a:pPr>
               <a:spcAft>
-                <a:spcPts val="1000"/>
+                <a:spcPts val="1100"/>
               </a:spcAft>
             </a:pPr>
             <a:r>
               <a:rPr sz="1600" b="1" i="0">
                 <a:solidFill>
-                  <a:srgbClr val="2E3A80"/>
-                </a:solidFill>
-                <a:latin typeface="Montserrat"/>
-              </a:rPr>
-              <a:t>•  </a:t>
+                  <a:srgbClr val="E8801A"/>
+                </a:solidFill>
+                <a:latin typeface="Montserrat"/>
+              </a:rPr>
+              <a:t>▸  </a:t>
             </a:r>
             <a:r>
               <a:rPr sz="1600" b="0" i="0">
@@ -6094,23 +6337,23 @@
                 </a:solidFill>
                 <a:latin typeface="Montserrat"/>
               </a:rPr>
-              <a:t>A la calle: muro EI 180, 2,5 m</a:t>
+              <a:t>Vías de tren y tranvía</a:t>
             </a:r>
           </a:p>
           <a:p>
             <a:pPr>
               <a:spcAft>
-                <a:spcPts val="1000"/>
+                <a:spcPts val="1100"/>
               </a:spcAft>
             </a:pPr>
             <a:r>
               <a:rPr sz="1600" b="1" i="0">
                 <a:solidFill>
-                  <a:srgbClr val="2E3A80"/>
-                </a:solidFill>
-                <a:latin typeface="Montserrat"/>
-              </a:rPr>
-              <a:t>•  </a:t>
+                  <a:srgbClr val="E8801A"/>
+                </a:solidFill>
+                <a:latin typeface="Montserrat"/>
+              </a:rPr>
+              <a:t>▸  </a:t>
             </a:r>
             <a:r>
               <a:rPr sz="1600" b="0" i="0">
@@ -6119,14 +6362,14 @@
                 </a:solidFill>
                 <a:latin typeface="Montserrat"/>
               </a:rPr>
-              <a:t>Resto: malla metálica, 2 m</a:t>
-            </a:r>
-          </a:p>
-        </p:txBody>
-      </p:sp>
-      <p:sp>
-        <p:nvSpPr>
-          <p:cNvPr id="8" name="imgph" descr="IMGQ:metal mesh fence industrial wall"/>
+              <a:t>Líneas eléctricas de alta tensión</a:t>
+            </a:r>
+          </a:p>
+        </p:txBody>
+      </p:sp>
+      <p:sp>
+        <p:nvSpPr>
+          <p:cNvPr id="9" name="imgph" descr="IMGQ:school building exterior street"/>
           <p:cNvSpPr/>
           <p:nvPr/>
         </p:nvSpPr>
@@ -6172,7 +6415,7 @@
       </p:sp>
       <p:sp>
         <p:nvSpPr>
-          <p:cNvPr id="9" name="TextBox 8"/>
+          <p:cNvPr id="10" name="TextBox 9"/>
           <p:cNvSpPr txBox="1"/>
           <p:nvPr/>
         </p:nvSpPr>
@@ -6212,7 +6455,7 @@
                 </a:solidFill>
                 <a:latin typeface="Montserrat"/>
               </a:rPr>
-              <a:t>metal mesh fence industrial wall</a:t>
+              <a:t>school building exterior street</a:t>
             </a:r>
           </a:p>
         </p:txBody>
@@ -6309,7 +6552,7 @@
                 </a:solidFill>
                 <a:latin typeface="Montserrat"/>
               </a:rPr>
-              <a:t>013 / 018</a:t>
+              <a:t>013 / 019</a:t>
             </a:r>
           </a:p>
         </p:txBody>
@@ -6357,7 +6600,7 @@
         <p:spPr>
           <a:xfrm>
             <a:off x="822960" y="457200"/>
-            <a:ext cx="8229600" cy="365760"/>
+            <a:ext cx="10058400" cy="365760"/>
           </a:xfrm>
           <a:prstGeom prst="rect">
             <a:avLst/>
@@ -6371,13 +6614,13 @@
           <a:lstStyle/>
           <a:p>
             <a:r>
-              <a:rPr sz="1200" b="1" i="0">
-                <a:solidFill>
-                  <a:srgbClr val="64748B"/>
-                </a:solidFill>
-                <a:latin typeface="Montserrat"/>
-              </a:rPr>
-              <a:t>APARTADO 3.2 · APILADO</a:t>
+              <a:rPr sz="1300" b="1" i="0">
+                <a:solidFill>
+                  <a:srgbClr val="E8801A"/>
+                </a:solidFill>
+                <a:latin typeface="Montserrat"/>
+              </a:rPr>
+              <a:t>APARTADO 3.2 · CERRAMIENTO</a:t>
             </a:r>
           </a:p>
         </p:txBody>
@@ -6405,26 +6648,70 @@
           <a:lstStyle/>
           <a:p>
             <a:r>
-              <a:rPr sz="2700" b="1" i="0">
+              <a:rPr sz="2800" b="1" i="0">
                 <a:solidFill>
                   <a:srgbClr val="1E2761"/>
                 </a:solidFill>
                 <a:latin typeface="Montserrat"/>
               </a:rPr>
-              <a:t>Alturas de las jaulas</a:t>
-            </a:r>
-          </a:p>
-        </p:txBody>
-      </p:sp>
-      <p:sp>
-        <p:nvSpPr>
-          <p:cNvPr id="7" name="TextBox 6"/>
+              <a:t>El muro y la malla</a:t>
+            </a:r>
+          </a:p>
+        </p:txBody>
+      </p:sp>
+      <p:sp>
+        <p:nvSpPr>
+          <p:cNvPr id="7" name="Rounded Rectangle 6"/>
+          <p:cNvSpPr/>
+          <p:nvPr/>
+        </p:nvSpPr>
+        <p:spPr>
+          <a:xfrm>
+            <a:off x="868680" y="1627632"/>
+            <a:ext cx="2011680" cy="73152"/>
+          </a:xfrm>
+          <a:prstGeom prst="roundRect">
+            <a:avLst/>
+          </a:prstGeom>
+          <a:solidFill>
+            <a:srgbClr val="E8801A"/>
+          </a:solidFill>
+          <a:ln>
+            <a:noFill/>
+          </a:ln>
+          <a:effectLst/>
+        </p:spPr>
+        <p:style>
+          <a:lnRef idx="1">
+            <a:schemeClr val="accent1"/>
+          </a:lnRef>
+          <a:fillRef idx="3">
+            <a:schemeClr val="accent1"/>
+          </a:fillRef>
+          <a:effectRef idx="2">
+            <a:schemeClr val="accent1"/>
+          </a:effectRef>
+          <a:fontRef idx="minor">
+            <a:schemeClr val="lt1"/>
+          </a:fontRef>
+        </p:style>
+        <p:txBody>
+          <a:bodyPr rtlCol="0" anchor="ctr"/>
+          <a:lstStyle/>
+          <a:p>
+            <a:pPr algn="ctr"/>
+          </a:p>
+        </p:txBody>
+      </p:sp>
+      <p:sp>
+        <p:nvSpPr>
+          <p:cNvPr id="8" name="TextBox 7"/>
           <p:cNvSpPr txBox="1"/>
           <p:nvPr/>
         </p:nvSpPr>
         <p:spPr>
           <a:xfrm>
-            <a:off x="822960" y="1920240"/>
+            <a:off x="822960" y="1965960"/>
             <a:ext cx="4983480" cy="4206240"/>
           </a:xfrm>
           <a:prstGeom prst="rect">
@@ -6440,17 +6727,17 @@
           <a:p>
             <a:pPr>
               <a:spcAft>
-                <a:spcPts val="1000"/>
+                <a:spcPts val="1100"/>
               </a:spcAft>
             </a:pPr>
             <a:r>
               <a:rPr sz="1600" b="1" i="0">
                 <a:solidFill>
-                  <a:srgbClr val="2E3A80"/>
-                </a:solidFill>
-                <a:latin typeface="Montserrat"/>
-              </a:rPr>
-              <a:t>•  </a:t>
+                  <a:srgbClr val="E8801A"/>
+                </a:solidFill>
+                <a:latin typeface="Montserrat"/>
+              </a:rPr>
+              <a:t>▸  </a:t>
             </a:r>
             <a:r>
               <a:rPr sz="1600" b="0" i="0">
@@ -6459,23 +6746,23 @@
                 </a:solidFill>
                 <a:latin typeface="Montserrat"/>
               </a:rPr>
-              <a:t>Domésticas ≤ 15 kg: 4 llenas / 6 vacías</a:t>
+              <a:t>A 10 m mínimo del almacenamiento</a:t>
             </a:r>
           </a:p>
           <a:p>
             <a:pPr>
               <a:spcAft>
-                <a:spcPts val="1000"/>
+                <a:spcPts val="1100"/>
               </a:spcAft>
             </a:pPr>
             <a:r>
               <a:rPr sz="1600" b="1" i="0">
                 <a:solidFill>
-                  <a:srgbClr val="2E3A80"/>
-                </a:solidFill>
-                <a:latin typeface="Montserrat"/>
-              </a:rPr>
-              <a:t>•  </a:t>
+                  <a:srgbClr val="E8801A"/>
+                </a:solidFill>
+                <a:latin typeface="Montserrat"/>
+              </a:rPr>
+              <a:t>▸  </a:t>
             </a:r>
             <a:r>
               <a:rPr sz="1600" b="0" i="0">
@@ -6484,23 +6771,23 @@
                 </a:solidFill>
                 <a:latin typeface="Montserrat"/>
               </a:rPr>
-              <a:t>Más de 15 kg: 1 sola altura</a:t>
+              <a:t>Todos los edificios, dentro</a:t>
             </a:r>
           </a:p>
           <a:p>
             <a:pPr>
               <a:spcAft>
-                <a:spcPts val="1000"/>
+                <a:spcPts val="1100"/>
               </a:spcAft>
             </a:pPr>
             <a:r>
               <a:rPr sz="1600" b="1" i="0">
                 <a:solidFill>
-                  <a:srgbClr val="2E3A80"/>
-                </a:solidFill>
-                <a:latin typeface="Montserrat"/>
-              </a:rPr>
-              <a:t>•  </a:t>
+                  <a:srgbClr val="E8801A"/>
+                </a:solidFill>
+                <a:latin typeface="Montserrat"/>
+              </a:rPr>
+              <a:t>▸  </a:t>
             </a:r>
             <a:r>
               <a:rPr sz="1600" b="0" i="0">
@@ -6509,23 +6796,23 @@
                 </a:solidFill>
                 <a:latin typeface="Montserrat"/>
               </a:rPr>
-              <a:t>Acceso con carretilla elevadora</a:t>
+              <a:t>A la calle: muro EI 180, 2,5 m</a:t>
             </a:r>
           </a:p>
           <a:p>
             <a:pPr>
               <a:spcAft>
-                <a:spcPts val="1000"/>
+                <a:spcPts val="1100"/>
               </a:spcAft>
             </a:pPr>
             <a:r>
               <a:rPr sz="1600" b="1" i="0">
                 <a:solidFill>
-                  <a:srgbClr val="2E3A80"/>
-                </a:solidFill>
-                <a:latin typeface="Montserrat"/>
-              </a:rPr>
-              <a:t>•  </a:t>
+                  <a:srgbClr val="E8801A"/>
+                </a:solidFill>
+                <a:latin typeface="Montserrat"/>
+              </a:rPr>
+              <a:t>▸  </a:t>
             </a:r>
             <a:r>
               <a:rPr sz="1600" b="0" i="0">
@@ -6534,14 +6821,14 @@
                 </a:solidFill>
                 <a:latin typeface="Montserrat"/>
               </a:rPr>
-              <a:t>Nada de imanes ni eslingas malas</a:t>
-            </a:r>
-          </a:p>
-        </p:txBody>
-      </p:sp>
-      <p:sp>
-        <p:nvSpPr>
-          <p:cNvPr id="8" name="imgph" descr="IMGQ:forklift warehouse cage pallet"/>
+              <a:t>Resto: malla metálica, 2 m</a:t>
+            </a:r>
+          </a:p>
+        </p:txBody>
+      </p:sp>
+      <p:sp>
+        <p:nvSpPr>
+          <p:cNvPr id="9" name="imgph" descr="IMGQ:metal mesh fence industrial wall"/>
           <p:cNvSpPr/>
           <p:nvPr/>
         </p:nvSpPr>
@@ -6587,7 +6874,7 @@
       </p:sp>
       <p:sp>
         <p:nvSpPr>
-          <p:cNvPr id="9" name="TextBox 8"/>
+          <p:cNvPr id="10" name="TextBox 9"/>
           <p:cNvSpPr txBox="1"/>
           <p:nvPr/>
         </p:nvSpPr>
@@ -6627,7 +6914,7 @@
                 </a:solidFill>
                 <a:latin typeface="Montserrat"/>
               </a:rPr>
-              <a:t>forklift warehouse cage pallet</a:t>
+              <a:t>metal mesh fence industrial wall</a:t>
             </a:r>
           </a:p>
         </p:txBody>
@@ -6724,7 +7011,7 @@
                 </a:solidFill>
                 <a:latin typeface="Montserrat"/>
               </a:rPr>
-              <a:t>014 / 018</a:t>
+              <a:t>014 / 019</a:t>
             </a:r>
           </a:p>
         </p:txBody>
@@ -6772,7 +7059,7 @@
         <p:spPr>
           <a:xfrm>
             <a:off x="822960" y="457200"/>
-            <a:ext cx="8229600" cy="365760"/>
+            <a:ext cx="10058400" cy="365760"/>
           </a:xfrm>
           <a:prstGeom prst="rect">
             <a:avLst/>
@@ -6786,13 +7073,13 @@
           <a:lstStyle/>
           <a:p>
             <a:r>
-              <a:rPr sz="1200" b="1" i="0">
-                <a:solidFill>
-                  <a:srgbClr val="64748B"/>
-                </a:solidFill>
-                <a:latin typeface="Montserrat"/>
-              </a:rPr>
-              <a:t>APARTADO 3.2 · INCENDIOS</a:t>
+              <a:rPr sz="1300" b="1" i="0">
+                <a:solidFill>
+                  <a:srgbClr val="E8801A"/>
+                </a:solidFill>
+                <a:latin typeface="Montserrat"/>
+              </a:rPr>
+              <a:t>APARTADO 3.2 · APILADO</a:t>
             </a:r>
           </a:p>
         </p:txBody>
@@ -6820,26 +7107,70 @@
           <a:lstStyle/>
           <a:p>
             <a:r>
-              <a:rPr sz="2700" b="1" i="0">
+              <a:rPr sz="2800" b="1" i="0">
                 <a:solidFill>
                   <a:srgbClr val="1E2761"/>
                 </a:solidFill>
                 <a:latin typeface="Montserrat"/>
               </a:rPr>
-              <a:t>Agua contra incendios (1.ª)</a:t>
-            </a:r>
-          </a:p>
-        </p:txBody>
-      </p:sp>
-      <p:sp>
-        <p:nvSpPr>
-          <p:cNvPr id="7" name="TextBox 6"/>
+              <a:t>Alturas de las jaulas</a:t>
+            </a:r>
+          </a:p>
+        </p:txBody>
+      </p:sp>
+      <p:sp>
+        <p:nvSpPr>
+          <p:cNvPr id="7" name="Rounded Rectangle 6"/>
+          <p:cNvSpPr/>
+          <p:nvPr/>
+        </p:nvSpPr>
+        <p:spPr>
+          <a:xfrm>
+            <a:off x="868680" y="1627632"/>
+            <a:ext cx="2011680" cy="73152"/>
+          </a:xfrm>
+          <a:prstGeom prst="roundRect">
+            <a:avLst/>
+          </a:prstGeom>
+          <a:solidFill>
+            <a:srgbClr val="E8801A"/>
+          </a:solidFill>
+          <a:ln>
+            <a:noFill/>
+          </a:ln>
+          <a:effectLst/>
+        </p:spPr>
+        <p:style>
+          <a:lnRef idx="1">
+            <a:schemeClr val="accent1"/>
+          </a:lnRef>
+          <a:fillRef idx="3">
+            <a:schemeClr val="accent1"/>
+          </a:fillRef>
+          <a:effectRef idx="2">
+            <a:schemeClr val="accent1"/>
+          </a:effectRef>
+          <a:fontRef idx="minor">
+            <a:schemeClr val="lt1"/>
+          </a:fontRef>
+        </p:style>
+        <p:txBody>
+          <a:bodyPr rtlCol="0" anchor="ctr"/>
+          <a:lstStyle/>
+          <a:p>
+            <a:pPr algn="ctr"/>
+          </a:p>
+        </p:txBody>
+      </p:sp>
+      <p:sp>
+        <p:nvSpPr>
+          <p:cNvPr id="8" name="TextBox 7"/>
           <p:cNvSpPr txBox="1"/>
           <p:nvPr/>
         </p:nvSpPr>
         <p:spPr>
           <a:xfrm>
-            <a:off x="822960" y="1920240"/>
+            <a:off x="822960" y="1965960"/>
             <a:ext cx="4983480" cy="4206240"/>
           </a:xfrm>
           <a:prstGeom prst="rect">
@@ -6855,17 +7186,17 @@
           <a:p>
             <a:pPr>
               <a:spcAft>
-                <a:spcPts val="1000"/>
+                <a:spcPts val="1100"/>
               </a:spcAft>
             </a:pPr>
             <a:r>
               <a:rPr sz="1600" b="1" i="0">
                 <a:solidFill>
-                  <a:srgbClr val="2E3A80"/>
-                </a:solidFill>
-                <a:latin typeface="Montserrat"/>
-              </a:rPr>
-              <a:t>•  </a:t>
+                  <a:srgbClr val="E8801A"/>
+                </a:solidFill>
+                <a:latin typeface="Montserrat"/>
+              </a:rPr>
+              <a:t>▸  </a:t>
             </a:r>
             <a:r>
               <a:rPr sz="1600" b="0" i="0">
@@ -6874,23 +7205,23 @@
                 </a:solidFill>
                 <a:latin typeface="Montserrat"/>
               </a:rPr>
-              <a:t>Red de agua a 5 kg/cm²</a:t>
+              <a:t>Domésticas ≤ 15 kg: 4 llenas / 6 vacías</a:t>
             </a:r>
           </a:p>
           <a:p>
             <a:pPr>
               <a:spcAft>
-                <a:spcPts val="1000"/>
+                <a:spcPts val="1100"/>
               </a:spcAft>
             </a:pPr>
             <a:r>
               <a:rPr sz="1600" b="1" i="0">
                 <a:solidFill>
-                  <a:srgbClr val="2E3A80"/>
-                </a:solidFill>
-                <a:latin typeface="Montserrat"/>
-              </a:rPr>
-              <a:t>•  </a:t>
+                  <a:srgbClr val="E8801A"/>
+                </a:solidFill>
+                <a:latin typeface="Montserrat"/>
+              </a:rPr>
+              <a:t>▸  </a:t>
             </a:r>
             <a:r>
               <a:rPr sz="1600" b="0" i="0">
@@ -6899,23 +7230,23 @@
                 </a:solidFill>
                 <a:latin typeface="Montserrat"/>
               </a:rPr>
-              <a:t>Bocas DN25 a 10 m del almacén</a:t>
+              <a:t>Más de 15 kg: 1 sola altura</a:t>
             </a:r>
           </a:p>
           <a:p>
             <a:pPr>
               <a:spcAft>
-                <a:spcPts val="1000"/>
+                <a:spcPts val="1100"/>
               </a:spcAft>
             </a:pPr>
             <a:r>
               <a:rPr sz="1600" b="1" i="0">
                 <a:solidFill>
-                  <a:srgbClr val="2E3A80"/>
-                </a:solidFill>
-                <a:latin typeface="Montserrat"/>
-              </a:rPr>
-              <a:t>•  </a:t>
+                  <a:srgbClr val="E8801A"/>
+                </a:solidFill>
+                <a:latin typeface="Montserrat"/>
+              </a:rPr>
+              <a:t>▸  </a:t>
             </a:r>
             <a:r>
               <a:rPr sz="1600" b="0" i="0">
@@ -6924,23 +7255,23 @@
                 </a:solidFill>
                 <a:latin typeface="Montserrat"/>
               </a:rPr>
-              <a:t>6 bocas en 1.ª · 2 en 2.ª y 3.ª</a:t>
+              <a:t>Acceso con carretilla elevadora</a:t>
             </a:r>
           </a:p>
           <a:p>
             <a:pPr>
               <a:spcAft>
-                <a:spcPts val="1000"/>
+                <a:spcPts val="1100"/>
               </a:spcAft>
             </a:pPr>
             <a:r>
               <a:rPr sz="1600" b="1" i="0">
                 <a:solidFill>
-                  <a:srgbClr val="2E3A80"/>
-                </a:solidFill>
-                <a:latin typeface="Montserrat"/>
-              </a:rPr>
-              <a:t>•  </a:t>
+                  <a:srgbClr val="E8801A"/>
+                </a:solidFill>
+                <a:latin typeface="Montserrat"/>
+              </a:rPr>
+              <a:t>▸  </a:t>
             </a:r>
             <a:r>
               <a:rPr sz="1600" b="0" i="0">
@@ -6949,14 +7280,14 @@
                 </a:solidFill>
                 <a:latin typeface="Montserrat"/>
               </a:rPr>
-              <a:t>Sin agua de calle: 90 min de autonomía</a:t>
-            </a:r>
-          </a:p>
-        </p:txBody>
-      </p:sp>
-      <p:sp>
-        <p:nvSpPr>
-          <p:cNvPr id="8" name="imgph" descr="IMGQ:fire hose reel red wall"/>
+              <a:t>Nada de imanes ni eslingas malas</a:t>
+            </a:r>
+          </a:p>
+        </p:txBody>
+      </p:sp>
+      <p:sp>
+        <p:nvSpPr>
+          <p:cNvPr id="9" name="imgph" descr="IMGQ:forklift warehouse cage pallet"/>
           <p:cNvSpPr/>
           <p:nvPr/>
         </p:nvSpPr>
@@ -7002,7 +7333,7 @@
       </p:sp>
       <p:sp>
         <p:nvSpPr>
-          <p:cNvPr id="9" name="TextBox 8"/>
+          <p:cNvPr id="10" name="TextBox 9"/>
           <p:cNvSpPr txBox="1"/>
           <p:nvPr/>
         </p:nvSpPr>
@@ -7042,7 +7373,7 @@
                 </a:solidFill>
                 <a:latin typeface="Montserrat"/>
               </a:rPr>
-              <a:t>fire hose reel red wall</a:t>
+              <a:t>forklift warehouse cage pallet</a:t>
             </a:r>
           </a:p>
         </p:txBody>
@@ -7139,7 +7470,7 @@
                 </a:solidFill>
                 <a:latin typeface="Montserrat"/>
               </a:rPr>
-              <a:t>015 / 018</a:t>
+              <a:t>015 / 019</a:t>
             </a:r>
           </a:p>
         </p:txBody>
@@ -7187,7 +7518,7 @@
         <p:spPr>
           <a:xfrm>
             <a:off x="822960" y="457200"/>
-            <a:ext cx="8229600" cy="365760"/>
+            <a:ext cx="10058400" cy="365760"/>
           </a:xfrm>
           <a:prstGeom prst="rect">
             <a:avLst/>
@@ -7201,13 +7532,13 @@
           <a:lstStyle/>
           <a:p>
             <a:r>
-              <a:rPr sz="1200" b="1" i="0">
-                <a:solidFill>
-                  <a:srgbClr val="64748B"/>
-                </a:solidFill>
-                <a:latin typeface="Montserrat"/>
-              </a:rPr>
-              <a:t>APARTADO 3.2 · EXTINTORES</a:t>
+              <a:rPr sz="1300" b="1" i="0">
+                <a:solidFill>
+                  <a:srgbClr val="E8801A"/>
+                </a:solidFill>
+                <a:latin typeface="Montserrat"/>
+              </a:rPr>
+              <a:t>APARTADO 3.2 · INCENDIOS</a:t>
             </a:r>
           </a:p>
         </p:txBody>
@@ -7235,26 +7566,70 @@
           <a:lstStyle/>
           <a:p>
             <a:r>
-              <a:rPr sz="2700" b="1" i="0">
+              <a:rPr sz="2800" b="1" i="0">
                 <a:solidFill>
                   <a:srgbClr val="1E2761"/>
                 </a:solidFill>
                 <a:latin typeface="Montserrat"/>
               </a:rPr>
-              <a:t>El Cuadro II, sin agobios</a:t>
-            </a:r>
-          </a:p>
-        </p:txBody>
-      </p:sp>
-      <p:sp>
-        <p:nvSpPr>
-          <p:cNvPr id="7" name="TextBox 6"/>
+              <a:t>Agua contra incendios (1.ª)</a:t>
+            </a:r>
+          </a:p>
+        </p:txBody>
+      </p:sp>
+      <p:sp>
+        <p:nvSpPr>
+          <p:cNvPr id="7" name="Rounded Rectangle 6"/>
+          <p:cNvSpPr/>
+          <p:nvPr/>
+        </p:nvSpPr>
+        <p:spPr>
+          <a:xfrm>
+            <a:off x="868680" y="1627632"/>
+            <a:ext cx="2011680" cy="73152"/>
+          </a:xfrm>
+          <a:prstGeom prst="roundRect">
+            <a:avLst/>
+          </a:prstGeom>
+          <a:solidFill>
+            <a:srgbClr val="E8801A"/>
+          </a:solidFill>
+          <a:ln>
+            <a:noFill/>
+          </a:ln>
+          <a:effectLst/>
+        </p:spPr>
+        <p:style>
+          <a:lnRef idx="1">
+            <a:schemeClr val="accent1"/>
+          </a:lnRef>
+          <a:fillRef idx="3">
+            <a:schemeClr val="accent1"/>
+          </a:fillRef>
+          <a:effectRef idx="2">
+            <a:schemeClr val="accent1"/>
+          </a:effectRef>
+          <a:fontRef idx="minor">
+            <a:schemeClr val="lt1"/>
+          </a:fontRef>
+        </p:style>
+        <p:txBody>
+          <a:bodyPr rtlCol="0" anchor="ctr"/>
+          <a:lstStyle/>
+          <a:p>
+            <a:pPr algn="ctr"/>
+          </a:p>
+        </p:txBody>
+      </p:sp>
+      <p:sp>
+        <p:nvSpPr>
+          <p:cNvPr id="8" name="TextBox 7"/>
           <p:cNvSpPr txBox="1"/>
           <p:nvPr/>
         </p:nvSpPr>
         <p:spPr>
           <a:xfrm>
-            <a:off x="822960" y="1920240"/>
+            <a:off x="822960" y="1965960"/>
             <a:ext cx="4983480" cy="4206240"/>
           </a:xfrm>
           <a:prstGeom prst="rect">
@@ -7270,17 +7645,17 @@
           <a:p>
             <a:pPr>
               <a:spcAft>
-                <a:spcPts val="1000"/>
+                <a:spcPts val="1100"/>
               </a:spcAft>
             </a:pPr>
             <a:r>
               <a:rPr sz="1600" b="1" i="0">
                 <a:solidFill>
-                  <a:srgbClr val="2E3A80"/>
-                </a:solidFill>
-                <a:latin typeface="Montserrat"/>
-              </a:rPr>
-              <a:t>•  </a:t>
+                  <a:srgbClr val="E8801A"/>
+                </a:solidFill>
+                <a:latin typeface="Montserrat"/>
+              </a:rPr>
+              <a:t>▸  </a:t>
             </a:r>
             <a:r>
               <a:rPr sz="1600" b="0" i="0">
@@ -7289,23 +7664,23 @@
                 </a:solidFill>
                 <a:latin typeface="Montserrat"/>
               </a:rPr>
-              <a:t>A más centro, más extintores</a:t>
+              <a:t>Red de agua a 5 kg/cm²</a:t>
             </a:r>
           </a:p>
           <a:p>
             <a:pPr>
               <a:spcAft>
-                <a:spcPts val="1000"/>
+                <a:spcPts val="1100"/>
               </a:spcAft>
             </a:pPr>
             <a:r>
               <a:rPr sz="1600" b="1" i="0">
                 <a:solidFill>
-                  <a:srgbClr val="2E3A80"/>
-                </a:solidFill>
-                <a:latin typeface="Montserrat"/>
-              </a:rPr>
-              <a:t>•  </a:t>
+                  <a:srgbClr val="E8801A"/>
+                </a:solidFill>
+                <a:latin typeface="Montserrat"/>
+              </a:rPr>
+              <a:t>▸  </a:t>
             </a:r>
             <a:r>
               <a:rPr sz="1600" b="0" i="0">
@@ -7314,23 +7689,23 @@
                 </a:solidFill>
                 <a:latin typeface="Montserrat"/>
               </a:rPr>
-              <a:t>3.ª: 5 extintores 21A-113B</a:t>
+              <a:t>Bocas DN25 a 10 m del almacén</a:t>
             </a:r>
           </a:p>
           <a:p>
             <a:pPr>
               <a:spcAft>
-                <a:spcPts val="1000"/>
+                <a:spcPts val="1100"/>
               </a:spcAft>
             </a:pPr>
             <a:r>
               <a:rPr sz="1600" b="1" i="0">
                 <a:solidFill>
-                  <a:srgbClr val="2E3A80"/>
-                </a:solidFill>
-                <a:latin typeface="Montserrat"/>
-              </a:rPr>
-              <a:t>•  </a:t>
+                  <a:srgbClr val="E8801A"/>
+                </a:solidFill>
+                <a:latin typeface="Montserrat"/>
+              </a:rPr>
+              <a:t>▸  </a:t>
             </a:r>
             <a:r>
               <a:rPr sz="1600" b="0" i="0">
@@ -7339,23 +7714,23 @@
                 </a:solidFill>
                 <a:latin typeface="Montserrat"/>
               </a:rPr>
-              <a:t>1.ª grande crece por tramos</a:t>
+              <a:t>6 bocas en 1.ª · 2 en 2.ª y 3.ª</a:t>
             </a:r>
           </a:p>
           <a:p>
             <a:pPr>
               <a:spcAft>
-                <a:spcPts val="1000"/>
+                <a:spcPts val="1100"/>
               </a:spcAft>
             </a:pPr>
             <a:r>
               <a:rPr sz="1600" b="1" i="0">
                 <a:solidFill>
-                  <a:srgbClr val="2E3A80"/>
-                </a:solidFill>
-                <a:latin typeface="Montserrat"/>
-              </a:rPr>
-              <a:t>•  </a:t>
+                  <a:srgbClr val="E8801A"/>
+                </a:solidFill>
+                <a:latin typeface="Montserrat"/>
+              </a:rPr>
+              <a:t>▸  </a:t>
             </a:r>
             <a:r>
               <a:rPr sz="1600" b="0" i="0">
@@ -7364,14 +7739,14 @@
                 </a:solidFill>
                 <a:latin typeface="Montserrat"/>
               </a:rPr>
-              <a:t>1 de 43A-183B = 2 de 21A-113B</a:t>
-            </a:r>
-          </a:p>
-        </p:txBody>
-      </p:sp>
-      <p:sp>
-        <p:nvSpPr>
-          <p:cNvPr id="8" name="imgph" descr="IMGQ:red fire extinguisher industrial"/>
+              <a:t>Sin agua de calle: 90 min de autonomía</a:t>
+            </a:r>
+          </a:p>
+        </p:txBody>
+      </p:sp>
+      <p:sp>
+        <p:nvSpPr>
+          <p:cNvPr id="9" name="imgph" descr="IMGQ:fire hose reel red wall"/>
           <p:cNvSpPr/>
           <p:nvPr/>
         </p:nvSpPr>
@@ -7417,7 +7792,7 @@
       </p:sp>
       <p:sp>
         <p:nvSpPr>
-          <p:cNvPr id="9" name="TextBox 8"/>
+          <p:cNvPr id="10" name="TextBox 9"/>
           <p:cNvSpPr txBox="1"/>
           <p:nvPr/>
         </p:nvSpPr>
@@ -7457,7 +7832,7 @@
                 </a:solidFill>
                 <a:latin typeface="Montserrat"/>
               </a:rPr>
-              <a:t>red fire extinguisher industrial</a:t>
+              <a:t>fire hose reel red wall</a:t>
             </a:r>
           </a:p>
         </p:txBody>
@@ -7554,7 +7929,7 @@
                 </a:solidFill>
                 <a:latin typeface="Montserrat"/>
               </a:rPr>
-              <a:t>016 / 018</a:t>
+              <a:t>016 / 019</a:t>
             </a:r>
           </a:p>
         </p:txBody>
@@ -7602,7 +7977,7 @@
         <p:spPr>
           <a:xfrm>
             <a:off x="822960" y="457200"/>
-            <a:ext cx="8229600" cy="365760"/>
+            <a:ext cx="10058400" cy="365760"/>
           </a:xfrm>
           <a:prstGeom prst="rect">
             <a:avLst/>
@@ -7616,13 +7991,13 @@
           <a:lstStyle/>
           <a:p>
             <a:r>
-              <a:rPr sz="1200" b="1" i="0">
-                <a:solidFill>
-                  <a:srgbClr val="64748B"/>
-                </a:solidFill>
-                <a:latin typeface="Montserrat"/>
-              </a:rPr>
-              <a:t>APARTADO 3.2 · OTRAS EXIGENCIAS</a:t>
+              <a:rPr sz="1300" b="1" i="0">
+                <a:solidFill>
+                  <a:srgbClr val="E8801A"/>
+                </a:solidFill>
+                <a:latin typeface="Montserrat"/>
+              </a:rPr>
+              <a:t>APARTADO 3.2 · EXTINTORES</a:t>
             </a:r>
           </a:p>
         </p:txBody>
@@ -7650,26 +8025,70 @@
           <a:lstStyle/>
           <a:p>
             <a:r>
-              <a:rPr sz="2700" b="1" i="0">
+              <a:rPr sz="2800" b="1" i="0">
                 <a:solidFill>
                   <a:srgbClr val="1E2761"/>
                 </a:solidFill>
                 <a:latin typeface="Montserrat"/>
               </a:rPr>
-              <a:t>Rayos y cortafuegos</a:t>
-            </a:r>
-          </a:p>
-        </p:txBody>
-      </p:sp>
-      <p:sp>
-        <p:nvSpPr>
-          <p:cNvPr id="7" name="TextBox 6"/>
+              <a:t>El Cuadro II, sin agobios</a:t>
+            </a:r>
+          </a:p>
+        </p:txBody>
+      </p:sp>
+      <p:sp>
+        <p:nvSpPr>
+          <p:cNvPr id="7" name="Rounded Rectangle 6"/>
+          <p:cNvSpPr/>
+          <p:nvPr/>
+        </p:nvSpPr>
+        <p:spPr>
+          <a:xfrm>
+            <a:off x="868680" y="1627632"/>
+            <a:ext cx="2011680" cy="73152"/>
+          </a:xfrm>
+          <a:prstGeom prst="roundRect">
+            <a:avLst/>
+          </a:prstGeom>
+          <a:solidFill>
+            <a:srgbClr val="E8801A"/>
+          </a:solidFill>
+          <a:ln>
+            <a:noFill/>
+          </a:ln>
+          <a:effectLst/>
+        </p:spPr>
+        <p:style>
+          <a:lnRef idx="1">
+            <a:schemeClr val="accent1"/>
+          </a:lnRef>
+          <a:fillRef idx="3">
+            <a:schemeClr val="accent1"/>
+          </a:fillRef>
+          <a:effectRef idx="2">
+            <a:schemeClr val="accent1"/>
+          </a:effectRef>
+          <a:fontRef idx="minor">
+            <a:schemeClr val="lt1"/>
+          </a:fontRef>
+        </p:style>
+        <p:txBody>
+          <a:bodyPr rtlCol="0" anchor="ctr"/>
+          <a:lstStyle/>
+          <a:p>
+            <a:pPr algn="ctr"/>
+          </a:p>
+        </p:txBody>
+      </p:sp>
+      <p:sp>
+        <p:nvSpPr>
+          <p:cNvPr id="8" name="TextBox 7"/>
           <p:cNvSpPr txBox="1"/>
           <p:nvPr/>
         </p:nvSpPr>
         <p:spPr>
           <a:xfrm>
-            <a:off x="822960" y="1920240"/>
+            <a:off x="822960" y="1965960"/>
             <a:ext cx="4983480" cy="4206240"/>
           </a:xfrm>
           <a:prstGeom prst="rect">
@@ -7685,17 +8104,17 @@
           <a:p>
             <a:pPr>
               <a:spcAft>
-                <a:spcPts val="1000"/>
+                <a:spcPts val="1100"/>
               </a:spcAft>
             </a:pPr>
             <a:r>
               <a:rPr sz="1600" b="1" i="0">
                 <a:solidFill>
-                  <a:srgbClr val="2E3A80"/>
-                </a:solidFill>
-                <a:latin typeface="Montserrat"/>
-              </a:rPr>
-              <a:t>•  </a:t>
+                  <a:srgbClr val="E8801A"/>
+                </a:solidFill>
+                <a:latin typeface="Montserrat"/>
+              </a:rPr>
+              <a:t>▸  </a:t>
             </a:r>
             <a:r>
               <a:rPr sz="1600" b="0" i="0">
@@ -7704,23 +8123,23 @@
                 </a:solidFill>
                 <a:latin typeface="Montserrat"/>
               </a:rPr>
-              <a:t>Protección contra rayos</a:t>
+              <a:t>A más centro, más extintores</a:t>
             </a:r>
           </a:p>
           <a:p>
             <a:pPr>
               <a:spcAft>
-                <a:spcPts val="1000"/>
+                <a:spcPts val="1100"/>
               </a:spcAft>
             </a:pPr>
             <a:r>
               <a:rPr sz="1600" b="1" i="0">
                 <a:solidFill>
-                  <a:srgbClr val="2E3A80"/>
-                </a:solidFill>
-                <a:latin typeface="Montserrat"/>
-              </a:rPr>
-              <a:t>•  </a:t>
+                  <a:srgbClr val="E8801A"/>
+                </a:solidFill>
+                <a:latin typeface="Montserrat"/>
+              </a:rPr>
+              <a:t>▸  </a:t>
             </a:r>
             <a:r>
               <a:rPr sz="1600" b="0" i="0">
@@ -7729,23 +8148,23 @@
                 </a:solidFill>
                 <a:latin typeface="Montserrat"/>
               </a:rPr>
-              <a:t>Sin transformadores de alta tensión</a:t>
+              <a:t>3.ª: 5 extintores 21A-113B</a:t>
             </a:r>
           </a:p>
           <a:p>
             <a:pPr>
               <a:spcAft>
-                <a:spcPts val="1000"/>
+                <a:spcPts val="1100"/>
               </a:spcAft>
             </a:pPr>
             <a:r>
               <a:rPr sz="1600" b="1" i="0">
                 <a:solidFill>
-                  <a:srgbClr val="2E3A80"/>
-                </a:solidFill>
-                <a:latin typeface="Montserrat"/>
-              </a:rPr>
-              <a:t>•  </a:t>
+                  <a:srgbClr val="E8801A"/>
+                </a:solidFill>
+                <a:latin typeface="Montserrat"/>
+              </a:rPr>
+              <a:t>▸  </a:t>
             </a:r>
             <a:r>
               <a:rPr sz="1600" b="0" i="0">
@@ -7754,23 +8173,23 @@
                 </a:solidFill>
                 <a:latin typeface="Montserrat"/>
               </a:rPr>
-              <a:t>Comunicación con el exterior</a:t>
+              <a:t>1.ª grande crece por tramos</a:t>
             </a:r>
           </a:p>
           <a:p>
             <a:pPr>
               <a:spcAft>
-                <a:spcPts val="1000"/>
+                <a:spcPts val="1100"/>
               </a:spcAft>
             </a:pPr>
             <a:r>
               <a:rPr sz="1600" b="1" i="0">
                 <a:solidFill>
-                  <a:srgbClr val="2E3A80"/>
-                </a:solidFill>
-                <a:latin typeface="Montserrat"/>
-              </a:rPr>
-              <a:t>•  </a:t>
+                  <a:srgbClr val="E8801A"/>
+                </a:solidFill>
+                <a:latin typeface="Montserrat"/>
+              </a:rPr>
+              <a:t>▸  </a:t>
             </a:r>
             <a:r>
               <a:rPr sz="1600" b="0" i="0">
@@ -7779,14 +8198,14 @@
                 </a:solidFill>
                 <a:latin typeface="Montserrat"/>
               </a:rPr>
-              <a:t>Motor con cortafuegos en el escape</a:t>
-            </a:r>
-          </a:p>
-        </p:txBody>
-      </p:sp>
-      <p:sp>
-        <p:nvSpPr>
-          <p:cNvPr id="8" name="imgph" descr="IMGQ:exhaust pipe truck engine detail"/>
+              <a:t>1 de 43A-183B = 2 de 21A-113B</a:t>
+            </a:r>
+          </a:p>
+        </p:txBody>
+      </p:sp>
+      <p:sp>
+        <p:nvSpPr>
+          <p:cNvPr id="9" name="imgph" descr="IMGQ:red fire extinguisher industrial"/>
           <p:cNvSpPr/>
           <p:nvPr/>
         </p:nvSpPr>
@@ -7832,7 +8251,7 @@
       </p:sp>
       <p:sp>
         <p:nvSpPr>
-          <p:cNvPr id="9" name="TextBox 8"/>
+          <p:cNvPr id="10" name="TextBox 9"/>
           <p:cNvSpPr txBox="1"/>
           <p:nvPr/>
         </p:nvSpPr>
@@ -7872,7 +8291,7 @@
                 </a:solidFill>
                 <a:latin typeface="Montserrat"/>
               </a:rPr>
-              <a:t>exhaust pipe truck engine detail</a:t>
+              <a:t>red fire extinguisher industrial</a:t>
             </a:r>
           </a:p>
         </p:txBody>
@@ -7969,7 +8388,7 @@
                 </a:solidFill>
                 <a:latin typeface="Montserrat"/>
               </a:rPr>
-              <a:t>017 / 018</a:t>
+              <a:t>017 / 019</a:t>
             </a:r>
           </a:p>
         </p:txBody>
@@ -8017,7 +8436,7 @@
         <p:spPr>
           <a:xfrm>
             <a:off x="822960" y="457200"/>
-            <a:ext cx="8229600" cy="365760"/>
+            <a:ext cx="10058400" cy="365760"/>
           </a:xfrm>
           <a:prstGeom prst="rect">
             <a:avLst/>
@@ -8031,13 +8450,13 @@
           <a:lstStyle/>
           <a:p>
             <a:r>
-              <a:rPr sz="1200" b="1" i="0">
-                <a:solidFill>
-                  <a:srgbClr val="64748B"/>
-                </a:solidFill>
-                <a:latin typeface="Montserrat"/>
-              </a:rPr>
-              <a:t>REPASO RELÁMPAGO</a:t>
+              <a:rPr sz="1300" b="1" i="0">
+                <a:solidFill>
+                  <a:srgbClr val="E8801A"/>
+                </a:solidFill>
+                <a:latin typeface="Montserrat"/>
+              </a:rPr>
+              <a:t>APARTADO 3.2 · OTRAS EXIGENCIAS</a:t>
             </a:r>
           </a:p>
         </p:txBody>
@@ -8065,26 +8484,70 @@
           <a:lstStyle/>
           <a:p>
             <a:r>
-              <a:rPr sz="2700" b="1" i="0">
+              <a:rPr sz="2800" b="1" i="0">
                 <a:solidFill>
                   <a:srgbClr val="1E2761"/>
                 </a:solidFill>
                 <a:latin typeface="Montserrat"/>
               </a:rPr>
-              <a:t>Cinco anclas antes del cierre</a:t>
-            </a:r>
-          </a:p>
-        </p:txBody>
-      </p:sp>
-      <p:sp>
-        <p:nvSpPr>
-          <p:cNvPr id="7" name="TextBox 6"/>
+              <a:t>Rayos y cortafuegos</a:t>
+            </a:r>
+          </a:p>
+        </p:txBody>
+      </p:sp>
+      <p:sp>
+        <p:nvSpPr>
+          <p:cNvPr id="7" name="Rounded Rectangle 6"/>
+          <p:cNvSpPr/>
+          <p:nvPr/>
+        </p:nvSpPr>
+        <p:spPr>
+          <a:xfrm>
+            <a:off x="868680" y="1627632"/>
+            <a:ext cx="2011680" cy="73152"/>
+          </a:xfrm>
+          <a:prstGeom prst="roundRect">
+            <a:avLst/>
+          </a:prstGeom>
+          <a:solidFill>
+            <a:srgbClr val="E8801A"/>
+          </a:solidFill>
+          <a:ln>
+            <a:noFill/>
+          </a:ln>
+          <a:effectLst/>
+        </p:spPr>
+        <p:style>
+          <a:lnRef idx="1">
+            <a:schemeClr val="accent1"/>
+          </a:lnRef>
+          <a:fillRef idx="3">
+            <a:schemeClr val="accent1"/>
+          </a:fillRef>
+          <a:effectRef idx="2">
+            <a:schemeClr val="accent1"/>
+          </a:effectRef>
+          <a:fontRef idx="minor">
+            <a:schemeClr val="lt1"/>
+          </a:fontRef>
+        </p:style>
+        <p:txBody>
+          <a:bodyPr rtlCol="0" anchor="ctr"/>
+          <a:lstStyle/>
+          <a:p>
+            <a:pPr algn="ctr"/>
+          </a:p>
+        </p:txBody>
+      </p:sp>
+      <p:sp>
+        <p:nvSpPr>
+          <p:cNvPr id="8" name="TextBox 7"/>
           <p:cNvSpPr txBox="1"/>
           <p:nvPr/>
         </p:nvSpPr>
         <p:spPr>
           <a:xfrm>
-            <a:off x="822960" y="1920240"/>
+            <a:off x="822960" y="1965960"/>
             <a:ext cx="4983480" cy="4206240"/>
           </a:xfrm>
           <a:prstGeom prst="rect">
@@ -8100,17 +8563,17 @@
           <a:p>
             <a:pPr>
               <a:spcAft>
-                <a:spcPts val="1000"/>
+                <a:spcPts val="1100"/>
               </a:spcAft>
             </a:pPr>
             <a:r>
               <a:rPr sz="1600" b="1" i="0">
                 <a:solidFill>
-                  <a:srgbClr val="2E3A80"/>
-                </a:solidFill>
-                <a:latin typeface="Montserrat"/>
-              </a:rPr>
-              <a:t>•  </a:t>
+                  <a:srgbClr val="E8801A"/>
+                </a:solidFill>
+                <a:latin typeface="Montserrat"/>
+              </a:rPr>
+              <a:t>▸  </a:t>
             </a:r>
             <a:r>
               <a:rPr sz="1600" b="0" i="0">
@@ -8119,23 +8582,23 @@
                 </a:solidFill>
                 <a:latin typeface="Montserrat"/>
               </a:rPr>
-              <a:t>Fórmula × 0,65 y vacíos que suman</a:t>
+              <a:t>Protección contra rayos</a:t>
             </a:r>
           </a:p>
           <a:p>
             <a:pPr>
               <a:spcAft>
-                <a:spcPts val="1000"/>
+                <a:spcPts val="1100"/>
               </a:spcAft>
             </a:pPr>
             <a:r>
               <a:rPr sz="1600" b="1" i="0">
                 <a:solidFill>
-                  <a:srgbClr val="2E3A80"/>
-                </a:solidFill>
-                <a:latin typeface="Montserrat"/>
-              </a:rPr>
-              <a:t>•  </a:t>
+                  <a:srgbClr val="E8801A"/>
+                </a:solidFill>
+                <a:latin typeface="Montserrat"/>
+              </a:rPr>
+              <a:t>▸  </a:t>
             </a:r>
             <a:r>
               <a:rPr sz="1600" b="0" i="0">
@@ -8144,23 +8607,23 @@
                 </a:solidFill>
                 <a:latin typeface="Montserrat"/>
               </a:rPr>
-              <a:t>Al aire libre · vertical · sin trasvase</a:t>
+              <a:t>Sin transformadores de alta tensión</a:t>
             </a:r>
           </a:p>
           <a:p>
             <a:pPr>
               <a:spcAft>
-                <a:spcPts val="1000"/>
+                <a:spcPts val="1100"/>
               </a:spcAft>
             </a:pPr>
             <a:r>
               <a:rPr sz="1600" b="1" i="0">
                 <a:solidFill>
-                  <a:srgbClr val="2E3A80"/>
-                </a:solidFill>
-                <a:latin typeface="Montserrat"/>
-              </a:rPr>
-              <a:t>•  </a:t>
+                  <a:srgbClr val="E8801A"/>
+                </a:solidFill>
+                <a:latin typeface="Montserrat"/>
+              </a:rPr>
+              <a:t>▸  </a:t>
             </a:r>
             <a:r>
               <a:rPr sz="1600" b="0" i="0">
@@ -8169,23 +8632,23 @@
                 </a:solidFill>
                 <a:latin typeface="Montserrat"/>
               </a:rPr>
-              <a:t>Evacuación ≤ 25 m</a:t>
+              <a:t>Comunicación con el exterior</a:t>
             </a:r>
           </a:p>
           <a:p>
             <a:pPr>
               <a:spcAft>
-                <a:spcPts val="1000"/>
+                <a:spcPts val="1100"/>
               </a:spcAft>
             </a:pPr>
             <a:r>
               <a:rPr sz="1600" b="1" i="0">
                 <a:solidFill>
-                  <a:srgbClr val="2E3A80"/>
-                </a:solidFill>
-                <a:latin typeface="Montserrat"/>
-              </a:rPr>
-              <a:t>•  </a:t>
+                  <a:srgbClr val="E8801A"/>
+                </a:solidFill>
+                <a:latin typeface="Montserrat"/>
+              </a:rPr>
+              <a:t>▸  </a:t>
             </a:r>
             <a:r>
               <a:rPr sz="1600" b="0" i="0">
@@ -8194,39 +8657,14 @@
                 </a:solidFill>
                 <a:latin typeface="Montserrat"/>
               </a:rPr>
-              <a:t>Interior 6/6/2 · exterior 20/15/10</a:t>
-            </a:r>
-          </a:p>
-          <a:p>
-            <a:pPr>
-              <a:spcAft>
-                <a:spcPts val="1000"/>
-              </a:spcAft>
-            </a:pPr>
-            <a:r>
-              <a:rPr sz="1600" b="1" i="0">
-                <a:solidFill>
-                  <a:srgbClr val="2E3A80"/>
-                </a:solidFill>
-                <a:latin typeface="Montserrat"/>
-              </a:rPr>
-              <a:t>•  </a:t>
-            </a:r>
-            <a:r>
-              <a:rPr sz="1600" b="0" i="0">
-                <a:solidFill>
-                  <a:srgbClr val="1B2330"/>
-                </a:solidFill>
-                <a:latin typeface="Montserrat"/>
-              </a:rPr>
-              <a:t>Muro 2,5 m / malla 2 m · +10 m sensibles</a:t>
-            </a:r>
-          </a:p>
-        </p:txBody>
-      </p:sp>
-      <p:sp>
-        <p:nvSpPr>
-          <p:cNvPr id="8" name="imgph" descr="IMGQ:gas cylinders outdoor depot rows"/>
+              <a:t>Motor con cortafuegos en el escape</a:t>
+            </a:r>
+          </a:p>
+        </p:txBody>
+      </p:sp>
+      <p:sp>
+        <p:nvSpPr>
+          <p:cNvPr id="9" name="imgph" descr="IMGQ:exhaust pipe truck engine detail"/>
           <p:cNvSpPr/>
           <p:nvPr/>
         </p:nvSpPr>
@@ -8272,7 +8710,7 @@
       </p:sp>
       <p:sp>
         <p:nvSpPr>
-          <p:cNvPr id="9" name="TextBox 8"/>
+          <p:cNvPr id="10" name="TextBox 9"/>
           <p:cNvSpPr txBox="1"/>
           <p:nvPr/>
         </p:nvSpPr>
@@ -8312,7 +8750,7 @@
                 </a:solidFill>
                 <a:latin typeface="Montserrat"/>
               </a:rPr>
-              <a:t>gas cylinders outdoor depot rows</a:t>
+              <a:t>exhaust pipe truck engine detail</a:t>
             </a:r>
           </a:p>
         </p:txBody>
@@ -8350,6 +8788,490 @@
             <a:avLst/>
           </a:prstGeom>
           <a:solidFill>
+            <a:srgbClr val="FFFFFF"/>
+          </a:solidFill>
+          <a:ln>
+            <a:noFill/>
+          </a:ln>
+          <a:effectLst/>
+        </p:spPr>
+        <p:style>
+          <a:lnRef idx="1">
+            <a:schemeClr val="accent1"/>
+          </a:lnRef>
+          <a:fillRef idx="3">
+            <a:schemeClr val="accent1"/>
+          </a:fillRef>
+          <a:effectRef idx="2">
+            <a:schemeClr val="accent1"/>
+          </a:effectRef>
+          <a:fontRef idx="minor">
+            <a:schemeClr val="lt1"/>
+          </a:fontRef>
+        </p:style>
+        <p:txBody>
+          <a:bodyPr rtlCol="0" anchor="ctr"/>
+          <a:lstStyle/>
+          <a:p>
+            <a:pPr algn="ctr"/>
+          </a:p>
+        </p:txBody>
+      </p:sp>
+      <p:sp>
+        <p:nvSpPr>
+          <p:cNvPr id="3" name="TextBox 2"/>
+          <p:cNvSpPr txBox="1"/>
+          <p:nvPr/>
+        </p:nvSpPr>
+        <p:spPr>
+          <a:xfrm>
+            <a:off x="10607040" y="320040"/>
+            <a:ext cx="1371600" cy="365760"/>
+          </a:xfrm>
+          <a:prstGeom prst="rect">
+            <a:avLst/>
+          </a:prstGeom>
+          <a:noFill/>
+        </p:spPr>
+        <p:txBody>
+          <a:bodyPr wrap="square">
+            <a:spAutoFit/>
+          </a:bodyPr>
+          <a:lstStyle/>
+          <a:p>
+            <a:pPr algn="r"/>
+            <a:r>
+              <a:rPr sz="1000" b="1" i="0">
+                <a:solidFill>
+                  <a:srgbClr val="64748B"/>
+                </a:solidFill>
+                <a:latin typeface="Montserrat"/>
+              </a:rPr>
+              <a:t>018 / 019</a:t>
+            </a:r>
+          </a:p>
+        </p:txBody>
+      </p:sp>
+      <p:sp>
+        <p:nvSpPr>
+          <p:cNvPr id="4" name="TextBox 3"/>
+          <p:cNvSpPr txBox="1"/>
+          <p:nvPr/>
+        </p:nvSpPr>
+        <p:spPr>
+          <a:xfrm>
+            <a:off x="457200" y="6419088"/>
+            <a:ext cx="8229600" cy="365760"/>
+          </a:xfrm>
+          <a:prstGeom prst="rect">
+            <a:avLst/>
+          </a:prstGeom>
+          <a:noFill/>
+        </p:spPr>
+        <p:txBody>
+          <a:bodyPr wrap="square">
+            <a:spAutoFit/>
+          </a:bodyPr>
+          <a:lstStyle/>
+          <a:p>
+            <a:r>
+              <a:rPr sz="900" b="0" i="0">
+                <a:solidFill>
+                  <a:srgbClr val="64748B"/>
+                </a:solidFill>
+                <a:latin typeface="Montserrat"/>
+              </a:rPr>
+              <a:t>Curso Gas B · Tema 02 · Centros de envases de GLP (I)</a:t>
+            </a:r>
+          </a:p>
+        </p:txBody>
+      </p:sp>
+      <p:sp>
+        <p:nvSpPr>
+          <p:cNvPr id="5" name="TextBox 4"/>
+          <p:cNvSpPr txBox="1"/>
+          <p:nvPr/>
+        </p:nvSpPr>
+        <p:spPr>
+          <a:xfrm>
+            <a:off x="822960" y="457200"/>
+            <a:ext cx="10058400" cy="365760"/>
+          </a:xfrm>
+          <a:prstGeom prst="rect">
+            <a:avLst/>
+          </a:prstGeom>
+          <a:noFill/>
+        </p:spPr>
+        <p:txBody>
+          <a:bodyPr wrap="square">
+            <a:spAutoFit/>
+          </a:bodyPr>
+          <a:lstStyle/>
+          <a:p>
+            <a:r>
+              <a:rPr sz="1300" b="1" i="0">
+                <a:solidFill>
+                  <a:srgbClr val="E8801A"/>
+                </a:solidFill>
+                <a:latin typeface="Montserrat"/>
+              </a:rPr>
+              <a:t>REPASO RELÁMPAGO</a:t>
+            </a:r>
+          </a:p>
+        </p:txBody>
+      </p:sp>
+      <p:sp>
+        <p:nvSpPr>
+          <p:cNvPr id="6" name="TextBox 5"/>
+          <p:cNvSpPr txBox="1"/>
+          <p:nvPr/>
+        </p:nvSpPr>
+        <p:spPr>
+          <a:xfrm>
+            <a:off x="822960" y="868680"/>
+            <a:ext cx="10515600" cy="914400"/>
+          </a:xfrm>
+          <a:prstGeom prst="rect">
+            <a:avLst/>
+          </a:prstGeom>
+          <a:noFill/>
+        </p:spPr>
+        <p:txBody>
+          <a:bodyPr wrap="square">
+            <a:spAutoFit/>
+          </a:bodyPr>
+          <a:lstStyle/>
+          <a:p>
+            <a:r>
+              <a:rPr sz="2800" b="1" i="0">
+                <a:solidFill>
+                  <a:srgbClr val="1E2761"/>
+                </a:solidFill>
+                <a:latin typeface="Montserrat"/>
+              </a:rPr>
+              <a:t>Cinco anclas antes del cierre</a:t>
+            </a:r>
+          </a:p>
+        </p:txBody>
+      </p:sp>
+      <p:sp>
+        <p:nvSpPr>
+          <p:cNvPr id="7" name="Rounded Rectangle 6"/>
+          <p:cNvSpPr/>
+          <p:nvPr/>
+        </p:nvSpPr>
+        <p:spPr>
+          <a:xfrm>
+            <a:off x="868680" y="1627632"/>
+            <a:ext cx="2011680" cy="73152"/>
+          </a:xfrm>
+          <a:prstGeom prst="roundRect">
+            <a:avLst/>
+          </a:prstGeom>
+          <a:solidFill>
+            <a:srgbClr val="E8801A"/>
+          </a:solidFill>
+          <a:ln>
+            <a:noFill/>
+          </a:ln>
+          <a:effectLst/>
+        </p:spPr>
+        <p:style>
+          <a:lnRef idx="1">
+            <a:schemeClr val="accent1"/>
+          </a:lnRef>
+          <a:fillRef idx="3">
+            <a:schemeClr val="accent1"/>
+          </a:fillRef>
+          <a:effectRef idx="2">
+            <a:schemeClr val="accent1"/>
+          </a:effectRef>
+          <a:fontRef idx="minor">
+            <a:schemeClr val="lt1"/>
+          </a:fontRef>
+        </p:style>
+        <p:txBody>
+          <a:bodyPr rtlCol="0" anchor="ctr"/>
+          <a:lstStyle/>
+          <a:p>
+            <a:pPr algn="ctr"/>
+          </a:p>
+        </p:txBody>
+      </p:sp>
+      <p:sp>
+        <p:nvSpPr>
+          <p:cNvPr id="8" name="TextBox 7"/>
+          <p:cNvSpPr txBox="1"/>
+          <p:nvPr/>
+        </p:nvSpPr>
+        <p:spPr>
+          <a:xfrm>
+            <a:off x="822960" y="1965960"/>
+            <a:ext cx="4983480" cy="4206240"/>
+          </a:xfrm>
+          <a:prstGeom prst="rect">
+            <a:avLst/>
+          </a:prstGeom>
+          <a:noFill/>
+        </p:spPr>
+        <p:txBody>
+          <a:bodyPr wrap="square">
+            <a:spAutoFit/>
+          </a:bodyPr>
+          <a:lstStyle/>
+          <a:p>
+            <a:pPr>
+              <a:spcAft>
+                <a:spcPts val="1100"/>
+              </a:spcAft>
+            </a:pPr>
+            <a:r>
+              <a:rPr sz="1600" b="1" i="0">
+                <a:solidFill>
+                  <a:srgbClr val="E8801A"/>
+                </a:solidFill>
+                <a:latin typeface="Montserrat"/>
+              </a:rPr>
+              <a:t>▸  </a:t>
+            </a:r>
+            <a:r>
+              <a:rPr sz="1600" b="0" i="0">
+                <a:solidFill>
+                  <a:srgbClr val="1B2330"/>
+                </a:solidFill>
+                <a:latin typeface="Montserrat"/>
+              </a:rPr>
+              <a:t>Fórmula × 0,65 y vacíos que suman</a:t>
+            </a:r>
+          </a:p>
+          <a:p>
+            <a:pPr>
+              <a:spcAft>
+                <a:spcPts val="1100"/>
+              </a:spcAft>
+            </a:pPr>
+            <a:r>
+              <a:rPr sz="1600" b="1" i="0">
+                <a:solidFill>
+                  <a:srgbClr val="E8801A"/>
+                </a:solidFill>
+                <a:latin typeface="Montserrat"/>
+              </a:rPr>
+              <a:t>▸  </a:t>
+            </a:r>
+            <a:r>
+              <a:rPr sz="1600" b="0" i="0">
+                <a:solidFill>
+                  <a:srgbClr val="1B2330"/>
+                </a:solidFill>
+                <a:latin typeface="Montserrat"/>
+              </a:rPr>
+              <a:t>Al aire libre · vertical · sin trasvase</a:t>
+            </a:r>
+          </a:p>
+          <a:p>
+            <a:pPr>
+              <a:spcAft>
+                <a:spcPts val="1100"/>
+              </a:spcAft>
+            </a:pPr>
+            <a:r>
+              <a:rPr sz="1600" b="1" i="0">
+                <a:solidFill>
+                  <a:srgbClr val="E8801A"/>
+                </a:solidFill>
+                <a:latin typeface="Montserrat"/>
+              </a:rPr>
+              <a:t>▸  </a:t>
+            </a:r>
+            <a:r>
+              <a:rPr sz="1600" b="0" i="0">
+                <a:solidFill>
+                  <a:srgbClr val="1B2330"/>
+                </a:solidFill>
+                <a:latin typeface="Montserrat"/>
+              </a:rPr>
+              <a:t>Evacuación ≤ 25 m</a:t>
+            </a:r>
+          </a:p>
+          <a:p>
+            <a:pPr>
+              <a:spcAft>
+                <a:spcPts val="1100"/>
+              </a:spcAft>
+            </a:pPr>
+            <a:r>
+              <a:rPr sz="1600" b="1" i="0">
+                <a:solidFill>
+                  <a:srgbClr val="E8801A"/>
+                </a:solidFill>
+                <a:latin typeface="Montserrat"/>
+              </a:rPr>
+              <a:t>▸  </a:t>
+            </a:r>
+            <a:r>
+              <a:rPr sz="1600" b="0" i="0">
+                <a:solidFill>
+                  <a:srgbClr val="1B2330"/>
+                </a:solidFill>
+                <a:latin typeface="Montserrat"/>
+              </a:rPr>
+              <a:t>Interior 6/6/2 · exterior 20/15/10</a:t>
+            </a:r>
+          </a:p>
+          <a:p>
+            <a:pPr>
+              <a:spcAft>
+                <a:spcPts val="1100"/>
+              </a:spcAft>
+            </a:pPr>
+            <a:r>
+              <a:rPr sz="1600" b="1" i="0">
+                <a:solidFill>
+                  <a:srgbClr val="E8801A"/>
+                </a:solidFill>
+                <a:latin typeface="Montserrat"/>
+              </a:rPr>
+              <a:t>▸  </a:t>
+            </a:r>
+            <a:r>
+              <a:rPr sz="1600" b="0" i="0">
+                <a:solidFill>
+                  <a:srgbClr val="1B2330"/>
+                </a:solidFill>
+                <a:latin typeface="Montserrat"/>
+              </a:rPr>
+              <a:t>Muro 2,5 m / malla 2 m · +10 m sensibles</a:t>
+            </a:r>
+          </a:p>
+        </p:txBody>
+      </p:sp>
+      <p:sp>
+        <p:nvSpPr>
+          <p:cNvPr id="9" name="imgph" descr="IMGQ:gas cylinders outdoor depot rows"/>
+          <p:cNvSpPr/>
+          <p:nvPr/>
+        </p:nvSpPr>
+        <p:spPr>
+          <a:xfrm>
+            <a:off x="5806440" y="1051560"/>
+            <a:ext cx="5298947" cy="4629150"/>
+          </a:xfrm>
+          <a:prstGeom prst="roundRect">
+            <a:avLst/>
+          </a:prstGeom>
+          <a:solidFill>
+            <a:srgbClr val="F3F6FB"/>
+          </a:solidFill>
+          <a:ln w="12700">
+            <a:solidFill>
+              <a:srgbClr val="C7D2E6"/>
+            </a:solidFill>
+          </a:ln>
+          <a:effectLst/>
+        </p:spPr>
+        <p:style>
+          <a:lnRef idx="1">
+            <a:schemeClr val="accent1"/>
+          </a:lnRef>
+          <a:fillRef idx="3">
+            <a:schemeClr val="accent1"/>
+          </a:fillRef>
+          <a:effectRef idx="2">
+            <a:schemeClr val="accent1"/>
+          </a:effectRef>
+          <a:fontRef idx="minor">
+            <a:schemeClr val="lt1"/>
+          </a:fontRef>
+        </p:style>
+        <p:txBody>
+          <a:bodyPr rtlCol="0" anchor="ctr"/>
+          <a:lstStyle/>
+          <a:p>
+            <a:pPr algn="ctr"/>
+          </a:p>
+        </p:txBody>
+      </p:sp>
+      <p:sp>
+        <p:nvSpPr>
+          <p:cNvPr id="10" name="TextBox 9"/>
+          <p:cNvSpPr txBox="1"/>
+          <p:nvPr/>
+        </p:nvSpPr>
+        <p:spPr>
+          <a:xfrm>
+            <a:off x="6080760" y="2726055"/>
+            <a:ext cx="4750307" cy="1280160"/>
+          </a:xfrm>
+          <a:prstGeom prst="rect">
+            <a:avLst/>
+          </a:prstGeom>
+          <a:noFill/>
+        </p:spPr>
+        <p:txBody>
+          <a:bodyPr wrap="square">
+            <a:spAutoFit/>
+          </a:bodyPr>
+          <a:lstStyle/>
+          <a:p>
+            <a:pPr algn="ctr"/>
+            <a:r>
+              <a:rPr sz="1400" b="1" i="0">
+                <a:solidFill>
+                  <a:srgbClr val="64748B"/>
+                </a:solidFill>
+                <a:latin typeface="Montserrat"/>
+              </a:rPr>
+              <a:t>IMAGEN REALISTA</a:t>
+            </a:r>
+          </a:p>
+          <a:p>
+            <a:pPr algn="ctr"/>
+            <a:r>
+              <a:rPr sz="1100" b="0" i="1">
+                <a:solidFill>
+                  <a:srgbClr val="64748B"/>
+                </a:solidFill>
+                <a:latin typeface="Montserrat"/>
+              </a:rPr>
+              <a:t>gas cylinders outdoor depot rows</a:t>
+            </a:r>
+          </a:p>
+        </p:txBody>
+      </p:sp>
+    </p:spTree>
+  </p:cSld>
+  <p:clrMapOvr>
+    <a:masterClrMapping/>
+  </p:clrMapOvr>
+</p:sld>
+</file>
+
+<file path=ppt/slides/slide19.xml><?xml version="1.0" encoding="utf-8"?>
+<p:sld xmlns:a="http://schemas.openxmlformats.org/drawingml/2006/main" xmlns:p="http://schemas.openxmlformats.org/presentationml/2006/main" xmlns:r="http://schemas.openxmlformats.org/officeDocument/2006/relationships">
+  <p:cSld>
+    <p:spTree>
+      <p:nvGrpSpPr>
+        <p:cNvPr id="1" name=""/>
+        <p:cNvGrpSpPr/>
+        <p:nvPr/>
+      </p:nvGrpSpPr>
+      <p:grpSpPr/>
+      <p:sp>
+        <p:nvSpPr>
+          <p:cNvPr id="2" name="Rectangle 1"/>
+          <p:cNvSpPr/>
+          <p:nvPr/>
+        </p:nvSpPr>
+        <p:spPr>
+          <a:xfrm>
+            <a:off x="0" y="0"/>
+            <a:ext cx="12191695" cy="6858000"/>
+          </a:xfrm>
+          <a:prstGeom prst="rect">
+            <a:avLst/>
+          </a:prstGeom>
+          <a:solidFill>
             <a:srgbClr val="1E2761"/>
           </a:solidFill>
           <a:ln>
@@ -8404,7 +9326,7 @@
             <a:r>
               <a:rPr sz="1400" b="1" i="0">
                 <a:solidFill>
-                  <a:srgbClr val="CADCFC"/>
+                  <a:srgbClr val="F4A24C"/>
                 </a:solidFill>
                 <a:latin typeface="Montserrat"/>
               </a:rPr>
@@ -8415,13 +9337,57 @@
       </p:sp>
       <p:sp>
         <p:nvSpPr>
-          <p:cNvPr id="4" name="TextBox 3"/>
+          <p:cNvPr id="4" name="Rounded Rectangle 3"/>
+          <p:cNvSpPr/>
+          <p:nvPr/>
+        </p:nvSpPr>
+        <p:spPr>
+          <a:xfrm>
+            <a:off x="868680" y="1051560"/>
+            <a:ext cx="1463040" cy="82296"/>
+          </a:xfrm>
+          <a:prstGeom prst="roundRect">
+            <a:avLst/>
+          </a:prstGeom>
+          <a:solidFill>
+            <a:srgbClr val="E8801A"/>
+          </a:solidFill>
+          <a:ln>
+            <a:noFill/>
+          </a:ln>
+          <a:effectLst/>
+        </p:spPr>
+        <p:style>
+          <a:lnRef idx="1">
+            <a:schemeClr val="accent1"/>
+          </a:lnRef>
+          <a:fillRef idx="3">
+            <a:schemeClr val="accent1"/>
+          </a:fillRef>
+          <a:effectRef idx="2">
+            <a:schemeClr val="accent1"/>
+          </a:effectRef>
+          <a:fontRef idx="minor">
+            <a:schemeClr val="lt1"/>
+          </a:fontRef>
+        </p:style>
+        <p:txBody>
+          <a:bodyPr rtlCol="0" anchor="ctr"/>
+          <a:lstStyle/>
+          <a:p>
+            <a:pPr algn="ctr"/>
+          </a:p>
+        </p:txBody>
+      </p:sp>
+      <p:sp>
+        <p:nvSpPr>
+          <p:cNvPr id="5" name="TextBox 4"/>
           <p:cNvSpPr txBox="1"/>
           <p:nvPr/>
         </p:nvSpPr>
         <p:spPr>
           <a:xfrm>
-            <a:off x="822960" y="1143000"/>
+            <a:off x="822960" y="1234440"/>
             <a:ext cx="10515600" cy="1097280"/>
           </a:xfrm>
           <a:prstGeom prst="rect">
@@ -8449,14 +9415,14 @@
       </p:sp>
       <p:sp>
         <p:nvSpPr>
-          <p:cNvPr id="5" name="TextBox 4"/>
+          <p:cNvPr id="6" name="TextBox 5"/>
           <p:cNvSpPr txBox="1"/>
           <p:nvPr/>
         </p:nvSpPr>
         <p:spPr>
           <a:xfrm>
-            <a:off x="822960" y="2514600"/>
-            <a:ext cx="10515600" cy="2834640"/>
+            <a:off x="822960" y="2606040"/>
+            <a:ext cx="10515600" cy="2743200"/>
           </a:xfrm>
           <a:prstGeom prst="rect">
             <a:avLst/>
@@ -8477,7 +9443,7 @@
             <a:r>
               <a:rPr sz="2000" b="1" i="0">
                 <a:solidFill>
-                  <a:srgbClr val="CADCFC"/>
+                  <a:srgbClr val="F4A24C"/>
                 </a:solidFill>
                 <a:latin typeface="Montserrat"/>
               </a:rPr>
@@ -8502,7 +9468,7 @@
             <a:r>
               <a:rPr sz="2000" b="1" i="0">
                 <a:solidFill>
-                  <a:srgbClr val="CADCFC"/>
+                  <a:srgbClr val="F4A24C"/>
                 </a:solidFill>
                 <a:latin typeface="Montserrat"/>
               </a:rPr>
@@ -8527,7 +9493,7 @@
             <a:r>
               <a:rPr sz="2000" b="1" i="0">
                 <a:solidFill>
-                  <a:srgbClr val="CADCFC"/>
+                  <a:srgbClr val="F4A24C"/>
                 </a:solidFill>
                 <a:latin typeface="Montserrat"/>
               </a:rPr>
@@ -8552,7 +9518,7 @@
             <a:r>
               <a:rPr sz="2000" b="1" i="0">
                 <a:solidFill>
-                  <a:srgbClr val="CADCFC"/>
+                  <a:srgbClr val="F4A24C"/>
                 </a:solidFill>
                 <a:latin typeface="Montserrat"/>
               </a:rPr>
@@ -8572,20 +9538,20 @@
       </p:sp>
       <p:sp>
         <p:nvSpPr>
-          <p:cNvPr id="6" name="Rounded Rectangle 5"/>
+          <p:cNvPr id="7" name="Rounded Rectangle 6"/>
           <p:cNvSpPr/>
           <p:nvPr/>
         </p:nvSpPr>
         <p:spPr>
           <a:xfrm>
             <a:off x="822960" y="5532120"/>
-            <a:ext cx="10515600" cy="777240"/>
+            <a:ext cx="10515600" cy="822960"/>
           </a:xfrm>
           <a:prstGeom prst="roundRect">
             <a:avLst/>
           </a:prstGeom>
           <a:solidFill>
-            <a:srgbClr val="2E3A80"/>
+            <a:srgbClr val="E8801A"/>
           </a:solidFill>
           <a:ln>
             <a:noFill/>
@@ -8616,13 +9582,13 @@
       </p:sp>
       <p:sp>
         <p:nvSpPr>
-          <p:cNvPr id="7" name="TextBox 6"/>
+          <p:cNvPr id="8" name="TextBox 7"/>
           <p:cNvSpPr txBox="1"/>
           <p:nvPr/>
         </p:nvSpPr>
         <p:spPr>
           <a:xfrm>
-            <a:off x="1051560" y="5605272"/>
+            <a:off x="1051560" y="5623560"/>
             <a:ext cx="10058400" cy="640080"/>
           </a:xfrm>
           <a:prstGeom prst="rect">
@@ -8639,7 +9605,7 @@
             <a:r>
               <a:rPr sz="1500" b="1" i="1">
                 <a:solidFill>
-                  <a:srgbClr val="CADCFC"/>
+                  <a:srgbClr val="1E2761"/>
                 </a:solidFill>
                 <a:latin typeface="Montserrat"/>
               </a:rPr>
@@ -8740,7 +9706,7 @@
                 </a:solidFill>
                 <a:latin typeface="Montserrat"/>
               </a:rPr>
-              <a:t>002 / 018</a:t>
+              <a:t>002 / 019</a:t>
             </a:r>
           </a:p>
         </p:txBody>
@@ -8804,7 +9770,7 @@
             <a:r>
               <a:rPr sz="2700" b="1" i="0">
                 <a:solidFill>
-                  <a:srgbClr val="1E2761"/>
+                  <a:srgbClr val="E8801A"/>
                 </a:solidFill>
                 <a:latin typeface="Montserrat"/>
               </a:rPr>
@@ -8816,6 +9782,50 @@
       <p:sp>
         <p:nvSpPr>
           <p:cNvPr id="6" name="Rounded Rectangle 5"/>
+          <p:cNvSpPr/>
+          <p:nvPr/>
+        </p:nvSpPr>
+        <p:spPr>
+          <a:xfrm>
+            <a:off x="868680" y="1234440"/>
+            <a:ext cx="1463040" cy="73152"/>
+          </a:xfrm>
+          <a:prstGeom prst="roundRect">
+            <a:avLst/>
+          </a:prstGeom>
+          <a:solidFill>
+            <a:srgbClr val="1E2761"/>
+          </a:solidFill>
+          <a:ln>
+            <a:noFill/>
+          </a:ln>
+          <a:effectLst/>
+        </p:spPr>
+        <p:style>
+          <a:lnRef idx="1">
+            <a:schemeClr val="accent1"/>
+          </a:lnRef>
+          <a:fillRef idx="3">
+            <a:schemeClr val="accent1"/>
+          </a:fillRef>
+          <a:effectRef idx="2">
+            <a:schemeClr val="accent1"/>
+          </a:effectRef>
+          <a:fontRef idx="minor">
+            <a:schemeClr val="lt1"/>
+          </a:fontRef>
+        </p:style>
+        <p:txBody>
+          <a:bodyPr rtlCol="0" anchor="ctr"/>
+          <a:lstStyle/>
+          <a:p>
+            <a:pPr algn="ctr"/>
+          </a:p>
+        </p:txBody>
+      </p:sp>
+      <p:sp>
+        <p:nvSpPr>
+          <p:cNvPr id="7" name="Rounded Rectangle 6"/>
           <p:cNvSpPr/>
           <p:nvPr/>
         </p:nvSpPr>
@@ -8861,7 +9871,7 @@
       </p:sp>
       <p:sp>
         <p:nvSpPr>
-          <p:cNvPr id="7" name="TextBox 6"/>
+          <p:cNvPr id="8" name="TextBox 7"/>
           <p:cNvSpPr txBox="1"/>
           <p:nvPr/>
         </p:nvSpPr>
@@ -8896,7 +9906,7 @@
       </p:sp>
       <p:sp>
         <p:nvSpPr>
-          <p:cNvPr id="8" name="TextBox 7"/>
+          <p:cNvPr id="9" name="TextBox 8"/>
           <p:cNvSpPr txBox="1"/>
           <p:nvPr/>
         </p:nvSpPr>
@@ -8931,7 +9941,7 @@
       </p:sp>
       <p:sp>
         <p:nvSpPr>
-          <p:cNvPr id="9" name="Rounded Rectangle 8"/>
+          <p:cNvPr id="10" name="Rounded Rectangle 9"/>
           <p:cNvSpPr/>
           <p:nvPr/>
         </p:nvSpPr>
@@ -8977,7 +9987,7 @@
       </p:sp>
       <p:sp>
         <p:nvSpPr>
-          <p:cNvPr id="10" name="TextBox 9"/>
+          <p:cNvPr id="11" name="TextBox 10"/>
           <p:cNvSpPr txBox="1"/>
           <p:nvPr/>
         </p:nvSpPr>
@@ -9012,7 +10022,7 @@
       </p:sp>
       <p:sp>
         <p:nvSpPr>
-          <p:cNvPr id="11" name="TextBox 10"/>
+          <p:cNvPr id="12" name="TextBox 11"/>
           <p:cNvSpPr txBox="1"/>
           <p:nvPr/>
         </p:nvSpPr>
@@ -9047,7 +10057,7 @@
       </p:sp>
       <p:sp>
         <p:nvSpPr>
-          <p:cNvPr id="12" name="Rounded Rectangle 11"/>
+          <p:cNvPr id="13" name="Rounded Rectangle 12"/>
           <p:cNvSpPr/>
           <p:nvPr/>
         </p:nvSpPr>
@@ -9093,7 +10103,7 @@
       </p:sp>
       <p:sp>
         <p:nvSpPr>
-          <p:cNvPr id="13" name="TextBox 12"/>
+          <p:cNvPr id="14" name="TextBox 13"/>
           <p:cNvSpPr txBox="1"/>
           <p:nvPr/>
         </p:nvSpPr>
@@ -9128,7 +10138,7 @@
       </p:sp>
       <p:sp>
         <p:nvSpPr>
-          <p:cNvPr id="14" name="TextBox 13"/>
+          <p:cNvPr id="15" name="TextBox 14"/>
           <p:cNvSpPr txBox="1"/>
           <p:nvPr/>
         </p:nvSpPr>
@@ -9253,7 +10263,7 @@
                 </a:solidFill>
                 <a:latin typeface="Montserrat"/>
               </a:rPr>
-              <a:t>003 / 018</a:t>
+              <a:t>003 / 019</a:t>
             </a:r>
           </a:p>
         </p:txBody>
@@ -9300,7 +10310,7 @@
         </p:nvSpPr>
         <p:spPr>
           <a:xfrm>
-            <a:off x="822960" y="457200"/>
+            <a:off x="822960" y="502920"/>
             <a:ext cx="8229600" cy="365760"/>
           </a:xfrm>
           <a:prstGeom prst="rect">
@@ -9315,13 +10325,13 @@
           <a:lstStyle/>
           <a:p>
             <a:r>
-              <a:rPr sz="1200" b="1" i="0">
-                <a:solidFill>
-                  <a:srgbClr val="64748B"/>
-                </a:solidFill>
-                <a:latin typeface="Montserrat"/>
-              </a:rPr>
-              <a:t>APARTADO 1 · OBJETO</a:t>
+              <a:rPr sz="1300" b="1" i="0">
+                <a:solidFill>
+                  <a:srgbClr val="E8801A"/>
+                </a:solidFill>
+                <a:latin typeface="Montserrat"/>
+              </a:rPr>
+              <a:t>PARTES DE ESTE VÍDEO</a:t>
             </a:r>
           </a:p>
         </p:txBody>
@@ -9334,7 +10344,7 @@
         </p:nvSpPr>
         <p:spPr>
           <a:xfrm>
-            <a:off x="822960" y="868680"/>
+            <a:off x="822960" y="914400"/>
             <a:ext cx="10515600" cy="914400"/>
           </a:xfrm>
           <a:prstGeom prst="rect">
@@ -9355,155 +10365,30 @@
                 </a:solidFill>
                 <a:latin typeface="Montserrat"/>
               </a:rPr>
-              <a:t>¿De qué manda esta ITC?</a:t>
-            </a:r>
-          </a:p>
-        </p:txBody>
-      </p:sp>
-      <p:sp>
-        <p:nvSpPr>
-          <p:cNvPr id="7" name="TextBox 6"/>
-          <p:cNvSpPr txBox="1"/>
-          <p:nvPr/>
-        </p:nvSpPr>
-        <p:spPr>
-          <a:xfrm>
-            <a:off x="822960" y="1920240"/>
-            <a:ext cx="4983480" cy="4206240"/>
-          </a:xfrm>
-          <a:prstGeom prst="rect">
-            <a:avLst/>
-          </a:prstGeom>
-          <a:noFill/>
-        </p:spPr>
-        <p:txBody>
-          <a:bodyPr wrap="square">
-            <a:spAutoFit/>
-          </a:bodyPr>
-          <a:lstStyle/>
-          <a:p>
-            <a:pPr>
-              <a:spcAft>
-                <a:spcPts val="1000"/>
-              </a:spcAft>
-            </a:pPr>
-            <a:r>
-              <a:rPr sz="1600" b="1" i="0">
-                <a:solidFill>
-                  <a:srgbClr val="2E3A80"/>
-                </a:solidFill>
-                <a:latin typeface="Montserrat"/>
-              </a:rPr>
-              <a:t>•  </a:t>
-            </a:r>
-            <a:r>
-              <a:rPr sz="1600" b="0" i="0">
-                <a:solidFill>
-                  <a:srgbClr val="1B2330"/>
-                </a:solidFill>
-                <a:latin typeface="Montserrat"/>
-              </a:rPr>
-              <a:t>Requisitos técnicos y seguridad mínima</a:t>
-            </a:r>
-          </a:p>
-          <a:p>
-            <a:pPr>
-              <a:spcAft>
-                <a:spcPts val="1000"/>
-              </a:spcAft>
-            </a:pPr>
-            <a:r>
-              <a:rPr sz="1600" b="1" i="0">
-                <a:solidFill>
-                  <a:srgbClr val="2E3A80"/>
-                </a:solidFill>
-                <a:latin typeface="Montserrat"/>
-              </a:rPr>
-              <a:t>•  </a:t>
-            </a:r>
-            <a:r>
-              <a:rPr sz="1600" b="0" i="0">
-                <a:solidFill>
-                  <a:srgbClr val="1B2330"/>
-                </a:solidFill>
-                <a:latin typeface="Montserrat"/>
-              </a:rPr>
-              <a:t>Proyectar · construir · explotar</a:t>
-            </a:r>
-          </a:p>
-          <a:p>
-            <a:pPr>
-              <a:spcAft>
-                <a:spcPts val="1000"/>
-              </a:spcAft>
-            </a:pPr>
-            <a:r>
-              <a:rPr sz="1600" b="1" i="0">
-                <a:solidFill>
-                  <a:srgbClr val="2E3A80"/>
-                </a:solidFill>
-                <a:latin typeface="Montserrat"/>
-              </a:rPr>
-              <a:t>•  </a:t>
-            </a:r>
-            <a:r>
-              <a:rPr sz="1600" b="0" i="0">
-                <a:solidFill>
-                  <a:srgbClr val="1B2330"/>
-                </a:solidFill>
-                <a:latin typeface="Montserrat"/>
-              </a:rPr>
-              <a:t>Centros de GLP envasado</a:t>
-            </a:r>
-          </a:p>
-          <a:p>
-            <a:pPr>
-              <a:spcAft>
-                <a:spcPts val="1000"/>
-              </a:spcAft>
-            </a:pPr>
-            <a:r>
-              <a:rPr sz="1600" b="1" i="0">
-                <a:solidFill>
-                  <a:srgbClr val="2E3A80"/>
-                </a:solidFill>
-                <a:latin typeface="Montserrat"/>
-              </a:rPr>
-              <a:t>•  </a:t>
-            </a:r>
-            <a:r>
-              <a:rPr sz="1600" b="0" i="0">
-                <a:solidFill>
-                  <a:srgbClr val="1B2330"/>
-                </a:solidFill>
-                <a:latin typeface="Montserrat"/>
-              </a:rPr>
-              <a:t>Butano y propano en bombonas</a:t>
-            </a:r>
-          </a:p>
-        </p:txBody>
-      </p:sp>
-      <p:sp>
-        <p:nvSpPr>
-          <p:cNvPr id="8" name="imgph" descr="IMGQ:gas cylinders storage warehouse"/>
+              <a:t>En este vídeo</a:t>
+            </a:r>
+          </a:p>
+        </p:txBody>
+      </p:sp>
+      <p:sp>
+        <p:nvSpPr>
+          <p:cNvPr id="7" name="Rounded Rectangle 6"/>
           <p:cNvSpPr/>
           <p:nvPr/>
         </p:nvSpPr>
         <p:spPr>
           <a:xfrm>
-            <a:off x="5806440" y="1051560"/>
-            <a:ext cx="5298947" cy="4629150"/>
+            <a:off x="868680" y="1673352"/>
+            <a:ext cx="2011680" cy="73152"/>
           </a:xfrm>
           <a:prstGeom prst="roundRect">
             <a:avLst/>
           </a:prstGeom>
           <a:solidFill>
-            <a:srgbClr val="F3F6FB"/>
+            <a:srgbClr val="E8801A"/>
           </a:solidFill>
-          <a:ln w="12700">
-            <a:solidFill>
-              <a:srgbClr val="C7D2E6"/>
-            </a:solidFill>
+          <a:ln>
+            <a:noFill/>
           </a:ln>
           <a:effectLst/>
         </p:spPr>
@@ -9531,14 +10416,14 @@
       </p:sp>
       <p:sp>
         <p:nvSpPr>
-          <p:cNvPr id="9" name="TextBox 8"/>
+          <p:cNvPr id="8" name="TextBox 7"/>
           <p:cNvSpPr txBox="1"/>
           <p:nvPr/>
         </p:nvSpPr>
         <p:spPr>
           <a:xfrm>
-            <a:off x="6080760" y="2726055"/>
-            <a:ext cx="4750307" cy="1280160"/>
+            <a:off x="822960" y="2103120"/>
+            <a:ext cx="10515600" cy="4023360"/>
           </a:xfrm>
           <a:prstGeom prst="rect">
             <a:avLst/>
@@ -9551,27 +10436,128 @@
           </a:bodyPr>
           <a:lstStyle/>
           <a:p>
-            <a:pPr algn="ctr"/>
-            <a:r>
-              <a:rPr sz="1400" b="1" i="0">
-                <a:solidFill>
-                  <a:srgbClr val="64748B"/>
-                </a:solidFill>
-                <a:latin typeface="Montserrat"/>
-              </a:rPr>
-              <a:t>IMAGEN REALISTA</a:t>
-            </a:r>
-          </a:p>
-          <a:p>
-            <a:pPr algn="ctr"/>
-            <a:r>
-              <a:rPr sz="1100" b="0" i="1">
-                <a:solidFill>
-                  <a:srgbClr val="64748B"/>
-                </a:solidFill>
-                <a:latin typeface="Montserrat"/>
-              </a:rPr>
-              <a:t>gas cylinders storage warehouse</a:t>
+            <a:pPr>
+              <a:spcAft>
+                <a:spcPts val="900"/>
+              </a:spcAft>
+            </a:pPr>
+            <a:r>
+              <a:rPr sz="1800" b="1" i="0">
+                <a:solidFill>
+                  <a:srgbClr val="E8801A"/>
+                </a:solidFill>
+                <a:latin typeface="Montserrat"/>
+              </a:rPr>
+              <a:t>01   </a:t>
+            </a:r>
+            <a:r>
+              <a:rPr sz="1700" b="0" i="0">
+                <a:solidFill>
+                  <a:srgbClr val="1B2330"/>
+                </a:solidFill>
+                <a:latin typeface="Montserrat"/>
+              </a:rPr>
+              <a:t>Apartado 1</a:t>
+            </a:r>
+          </a:p>
+          <a:p>
+            <a:pPr>
+              <a:spcAft>
+                <a:spcPts val="900"/>
+              </a:spcAft>
+            </a:pPr>
+            <a:r>
+              <a:rPr sz="1800" b="1" i="0">
+                <a:solidFill>
+                  <a:srgbClr val="E8801A"/>
+                </a:solidFill>
+                <a:latin typeface="Montserrat"/>
+              </a:rPr>
+              <a:t>02   </a:t>
+            </a:r>
+            <a:r>
+              <a:rPr sz="1700" b="0" i="0">
+                <a:solidFill>
+                  <a:srgbClr val="1B2330"/>
+                </a:solidFill>
+                <a:latin typeface="Montserrat"/>
+              </a:rPr>
+              <a:t>Apartado 2</a:t>
+            </a:r>
+          </a:p>
+          <a:p>
+            <a:pPr>
+              <a:spcAft>
+                <a:spcPts val="900"/>
+              </a:spcAft>
+            </a:pPr>
+            <a:r>
+              <a:rPr sz="1800" b="1" i="0">
+                <a:solidFill>
+                  <a:srgbClr val="E8801A"/>
+                </a:solidFill>
+                <a:latin typeface="Montserrat"/>
+              </a:rPr>
+              <a:t>03   </a:t>
+            </a:r>
+            <a:r>
+              <a:rPr sz="1700" b="0" i="0">
+                <a:solidFill>
+                  <a:srgbClr val="1B2330"/>
+                </a:solidFill>
+                <a:latin typeface="Montserrat"/>
+              </a:rPr>
+              <a:t>Apartado 3.1</a:t>
+            </a:r>
+          </a:p>
+          <a:p>
+            <a:pPr>
+              <a:spcAft>
+                <a:spcPts val="900"/>
+              </a:spcAft>
+            </a:pPr>
+            <a:r>
+              <a:rPr sz="1800" b="1" i="0">
+                <a:solidFill>
+                  <a:srgbClr val="E8801A"/>
+                </a:solidFill>
+                <a:latin typeface="Montserrat"/>
+              </a:rPr>
+              <a:t>04   </a:t>
+            </a:r>
+            <a:r>
+              <a:rPr sz="1700" b="0" i="0">
+                <a:solidFill>
+                  <a:srgbClr val="1B2330"/>
+                </a:solidFill>
+                <a:latin typeface="Montserrat"/>
+              </a:rPr>
+              <a:t>Apartado 3.2</a:t>
+            </a:r>
+          </a:p>
+          <a:p>
+            <a:pPr>
+              <a:spcAft>
+                <a:spcPts val="900"/>
+              </a:spcAft>
+            </a:pPr>
+            <a:r>
+              <a:rPr sz="1800" b="1" i="0">
+                <a:solidFill>
+                  <a:srgbClr val="E8801A"/>
+                </a:solidFill>
+                <a:latin typeface="Montserrat"/>
+              </a:rPr>
+              <a:t>05   </a:t>
+            </a:r>
+            <a:r>
+              <a:rPr sz="1700" b="0" i="0">
+                <a:solidFill>
+                  <a:srgbClr val="1B2330"/>
+                </a:solidFill>
+                <a:latin typeface="Montserrat"/>
+              </a:rPr>
+              <a:t>Repaso relámpago</a:t>
             </a:r>
           </a:p>
         </p:txBody>
@@ -9668,7 +10654,7 @@
                 </a:solidFill>
                 <a:latin typeface="Montserrat"/>
               </a:rPr>
-              <a:t>004 / 018</a:t>
+              <a:t>004 / 019</a:t>
             </a:r>
           </a:p>
         </p:txBody>
@@ -9716,7 +10702,7 @@
         <p:spPr>
           <a:xfrm>
             <a:off x="822960" y="457200"/>
-            <a:ext cx="8229600" cy="365760"/>
+            <a:ext cx="10058400" cy="365760"/>
           </a:xfrm>
           <a:prstGeom prst="rect">
             <a:avLst/>
@@ -9730,13 +10716,13 @@
           <a:lstStyle/>
           <a:p>
             <a:r>
-              <a:rPr sz="1200" b="1" i="0">
-                <a:solidFill>
-                  <a:srgbClr val="64748B"/>
-                </a:solidFill>
-                <a:latin typeface="Montserrat"/>
-              </a:rPr>
-              <a:t>APARTADO 1 · MODIFICACIÓN</a:t>
+              <a:rPr sz="1300" b="1" i="0">
+                <a:solidFill>
+                  <a:srgbClr val="E8801A"/>
+                </a:solidFill>
+                <a:latin typeface="Montserrat"/>
+              </a:rPr>
+              <a:t>APARTADO 1 · OBJETO</a:t>
             </a:r>
           </a:p>
         </p:txBody>
@@ -9764,26 +10750,70 @@
           <a:lstStyle/>
           <a:p>
             <a:r>
-              <a:rPr sz="2700" b="1" i="0">
+              <a:rPr sz="2800" b="1" i="0">
                 <a:solidFill>
                   <a:srgbClr val="1E2761"/>
                 </a:solidFill>
                 <a:latin typeface="Montserrat"/>
               </a:rPr>
-              <a:t>Cuándo se toca un centro</a:t>
-            </a:r>
-          </a:p>
-        </p:txBody>
-      </p:sp>
-      <p:sp>
-        <p:nvSpPr>
-          <p:cNvPr id="7" name="TextBox 6"/>
+              <a:t>¿De qué manda esta ITC?</a:t>
+            </a:r>
+          </a:p>
+        </p:txBody>
+      </p:sp>
+      <p:sp>
+        <p:nvSpPr>
+          <p:cNvPr id="7" name="Rounded Rectangle 6"/>
+          <p:cNvSpPr/>
+          <p:nvPr/>
+        </p:nvSpPr>
+        <p:spPr>
+          <a:xfrm>
+            <a:off x="868680" y="1627632"/>
+            <a:ext cx="2011680" cy="73152"/>
+          </a:xfrm>
+          <a:prstGeom prst="roundRect">
+            <a:avLst/>
+          </a:prstGeom>
+          <a:solidFill>
+            <a:srgbClr val="E8801A"/>
+          </a:solidFill>
+          <a:ln>
+            <a:noFill/>
+          </a:ln>
+          <a:effectLst/>
+        </p:spPr>
+        <p:style>
+          <a:lnRef idx="1">
+            <a:schemeClr val="accent1"/>
+          </a:lnRef>
+          <a:fillRef idx="3">
+            <a:schemeClr val="accent1"/>
+          </a:fillRef>
+          <a:effectRef idx="2">
+            <a:schemeClr val="accent1"/>
+          </a:effectRef>
+          <a:fontRef idx="minor">
+            <a:schemeClr val="lt1"/>
+          </a:fontRef>
+        </p:style>
+        <p:txBody>
+          <a:bodyPr rtlCol="0" anchor="ctr"/>
+          <a:lstStyle/>
+          <a:p>
+            <a:pPr algn="ctr"/>
+          </a:p>
+        </p:txBody>
+      </p:sp>
+      <p:sp>
+        <p:nvSpPr>
+          <p:cNvPr id="8" name="TextBox 7"/>
           <p:cNvSpPr txBox="1"/>
           <p:nvPr/>
         </p:nvSpPr>
         <p:spPr>
           <a:xfrm>
-            <a:off x="822960" y="1920240"/>
+            <a:off x="822960" y="1965960"/>
             <a:ext cx="4983480" cy="4206240"/>
           </a:xfrm>
           <a:prstGeom prst="rect">
@@ -9799,17 +10829,17 @@
           <a:p>
             <a:pPr>
               <a:spcAft>
-                <a:spcPts val="1000"/>
+                <a:spcPts val="1100"/>
               </a:spcAft>
             </a:pPr>
             <a:r>
               <a:rPr sz="1600" b="1" i="0">
                 <a:solidFill>
-                  <a:srgbClr val="2E3A80"/>
-                </a:solidFill>
-                <a:latin typeface="Montserrat"/>
-              </a:rPr>
-              <a:t>•  </a:t>
+                  <a:srgbClr val="E8801A"/>
+                </a:solidFill>
+                <a:latin typeface="Montserrat"/>
+              </a:rPr>
+              <a:t>▸  </a:t>
             </a:r>
             <a:r>
               <a:rPr sz="1600" b="0" i="0">
@@ -9818,23 +10848,23 @@
                 </a:solidFill>
                 <a:latin typeface="Montserrat"/>
               </a:rPr>
-              <a:t>Modificar = ampliar y cambiar de categoría</a:t>
+              <a:t>Requisitos técnicos y seguridad mínima</a:t>
             </a:r>
           </a:p>
           <a:p>
             <a:pPr>
               <a:spcAft>
-                <a:spcPts val="1000"/>
+                <a:spcPts val="1100"/>
               </a:spcAft>
             </a:pPr>
             <a:r>
               <a:rPr sz="1600" b="1" i="0">
                 <a:solidFill>
-                  <a:srgbClr val="2E3A80"/>
-                </a:solidFill>
-                <a:latin typeface="Montserrat"/>
-              </a:rPr>
-              <a:t>•  </a:t>
+                  <a:srgbClr val="E8801A"/>
+                </a:solidFill>
+                <a:latin typeface="Montserrat"/>
+              </a:rPr>
+              <a:t>▸  </a:t>
             </a:r>
             <a:r>
               <a:rPr sz="1600" b="0" i="0">
@@ -9843,23 +10873,23 @@
                 </a:solidFill>
                 <a:latin typeface="Montserrat"/>
               </a:rPr>
-              <a:t>Más bombonas sin saltar: no cuenta</a:t>
+              <a:t>Proyectar · construir · explotar</a:t>
             </a:r>
           </a:p>
           <a:p>
             <a:pPr>
               <a:spcAft>
-                <a:spcPts val="1000"/>
+                <a:spcPts val="1100"/>
               </a:spcAft>
             </a:pPr>
             <a:r>
               <a:rPr sz="1600" b="1" i="0">
                 <a:solidFill>
-                  <a:srgbClr val="2E3A80"/>
-                </a:solidFill>
-                <a:latin typeface="Montserrat"/>
-              </a:rPr>
-              <a:t>•  </a:t>
+                  <a:srgbClr val="E8801A"/>
+                </a:solidFill>
+                <a:latin typeface="Montserrat"/>
+              </a:rPr>
+              <a:t>▸  </a:t>
             </a:r>
             <a:r>
               <a:rPr sz="1600" b="0" i="0">
@@ -9868,14 +10898,39 @@
                 </a:solidFill>
                 <a:latin typeface="Montserrat"/>
               </a:rPr>
-              <a:t>Cruzar el umbral de kilos: sí cuenta</a:t>
-            </a:r>
-          </a:p>
-        </p:txBody>
-      </p:sp>
-      <p:sp>
-        <p:nvSpPr>
-          <p:cNvPr id="8" name="imgph" descr="IMGQ:warehouse worker clipboard inventory"/>
+              <a:t>Centros de GLP envasado</a:t>
+            </a:r>
+          </a:p>
+          <a:p>
+            <a:pPr>
+              <a:spcAft>
+                <a:spcPts val="1100"/>
+              </a:spcAft>
+            </a:pPr>
+            <a:r>
+              <a:rPr sz="1600" b="1" i="0">
+                <a:solidFill>
+                  <a:srgbClr val="E8801A"/>
+                </a:solidFill>
+                <a:latin typeface="Montserrat"/>
+              </a:rPr>
+              <a:t>▸  </a:t>
+            </a:r>
+            <a:r>
+              <a:rPr sz="1600" b="0" i="0">
+                <a:solidFill>
+                  <a:srgbClr val="1B2330"/>
+                </a:solidFill>
+                <a:latin typeface="Montserrat"/>
+              </a:rPr>
+              <a:t>Butano y propano en bombonas</a:t>
+            </a:r>
+          </a:p>
+        </p:txBody>
+      </p:sp>
+      <p:sp>
+        <p:nvSpPr>
+          <p:cNvPr id="9" name="imgph" descr="IMGQ:gas cylinders storage warehouse"/>
           <p:cNvSpPr/>
           <p:nvPr/>
         </p:nvSpPr>
@@ -9921,7 +10976,7 @@
       </p:sp>
       <p:sp>
         <p:nvSpPr>
-          <p:cNvPr id="9" name="TextBox 8"/>
+          <p:cNvPr id="10" name="TextBox 9"/>
           <p:cNvSpPr txBox="1"/>
           <p:nvPr/>
         </p:nvSpPr>
@@ -9961,7 +11016,7 @@
                 </a:solidFill>
                 <a:latin typeface="Montserrat"/>
               </a:rPr>
-              <a:t>warehouse worker clipboard inventory</a:t>
+              <a:t>gas cylinders storage warehouse</a:t>
             </a:r>
           </a:p>
         </p:txBody>
@@ -10058,7 +11113,7 @@
                 </a:solidFill>
                 <a:latin typeface="Montserrat"/>
               </a:rPr>
-              <a:t>005 / 018</a:t>
+              <a:t>005 / 019</a:t>
             </a:r>
           </a:p>
         </p:txBody>
@@ -10106,7 +11161,7 @@
         <p:spPr>
           <a:xfrm>
             <a:off x="822960" y="457200"/>
-            <a:ext cx="8229600" cy="365760"/>
+            <a:ext cx="10058400" cy="365760"/>
           </a:xfrm>
           <a:prstGeom prst="rect">
             <a:avLst/>
@@ -10120,13 +11175,13 @@
           <a:lstStyle/>
           <a:p>
             <a:r>
-              <a:rPr sz="1200" b="1" i="0">
-                <a:solidFill>
-                  <a:srgbClr val="64748B"/>
-                </a:solidFill>
-                <a:latin typeface="Montserrat"/>
-              </a:rPr>
-              <a:t>APARTADO 2 · CLASIFICACIÓN</a:t>
+              <a:rPr sz="1300" b="1" i="0">
+                <a:solidFill>
+                  <a:srgbClr val="E8801A"/>
+                </a:solidFill>
+                <a:latin typeface="Montserrat"/>
+              </a:rPr>
+              <a:t>APARTADO 1 · MODIFICACIÓN</a:t>
             </a:r>
           </a:p>
         </p:txBody>
@@ -10154,26 +11209,70 @@
           <a:lstStyle/>
           <a:p>
             <a:r>
-              <a:rPr sz="2700" b="1" i="0">
+              <a:rPr sz="2800" b="1" i="0">
                 <a:solidFill>
                   <a:srgbClr val="1E2761"/>
                 </a:solidFill>
                 <a:latin typeface="Montserrat"/>
               </a:rPr>
-              <a:t>Las cinco categorías</a:t>
-            </a:r>
-          </a:p>
-        </p:txBody>
-      </p:sp>
-      <p:sp>
-        <p:nvSpPr>
-          <p:cNvPr id="7" name="TextBox 6"/>
+              <a:t>Cuándo se toca un centro</a:t>
+            </a:r>
+          </a:p>
+        </p:txBody>
+      </p:sp>
+      <p:sp>
+        <p:nvSpPr>
+          <p:cNvPr id="7" name="Rounded Rectangle 6"/>
+          <p:cNvSpPr/>
+          <p:nvPr/>
+        </p:nvSpPr>
+        <p:spPr>
+          <a:xfrm>
+            <a:off x="868680" y="1627632"/>
+            <a:ext cx="2011680" cy="73152"/>
+          </a:xfrm>
+          <a:prstGeom prst="roundRect">
+            <a:avLst/>
+          </a:prstGeom>
+          <a:solidFill>
+            <a:srgbClr val="E8801A"/>
+          </a:solidFill>
+          <a:ln>
+            <a:noFill/>
+          </a:ln>
+          <a:effectLst/>
+        </p:spPr>
+        <p:style>
+          <a:lnRef idx="1">
+            <a:schemeClr val="accent1"/>
+          </a:lnRef>
+          <a:fillRef idx="3">
+            <a:schemeClr val="accent1"/>
+          </a:fillRef>
+          <a:effectRef idx="2">
+            <a:schemeClr val="accent1"/>
+          </a:effectRef>
+          <a:fontRef idx="minor">
+            <a:schemeClr val="lt1"/>
+          </a:fontRef>
+        </p:style>
+        <p:txBody>
+          <a:bodyPr rtlCol="0" anchor="ctr"/>
+          <a:lstStyle/>
+          <a:p>
+            <a:pPr algn="ctr"/>
+          </a:p>
+        </p:txBody>
+      </p:sp>
+      <p:sp>
+        <p:nvSpPr>
+          <p:cNvPr id="8" name="TextBox 7"/>
           <p:cNvSpPr txBox="1"/>
           <p:nvPr/>
         </p:nvSpPr>
         <p:spPr>
           <a:xfrm>
-            <a:off x="822960" y="1920240"/>
+            <a:off x="822960" y="1965960"/>
             <a:ext cx="4983480" cy="4206240"/>
           </a:xfrm>
           <a:prstGeom prst="rect">
@@ -10189,17 +11288,17 @@
           <a:p>
             <a:pPr>
               <a:spcAft>
-                <a:spcPts val="1000"/>
+                <a:spcPts val="1100"/>
               </a:spcAft>
             </a:pPr>
             <a:r>
               <a:rPr sz="1600" b="1" i="0">
                 <a:solidFill>
-                  <a:srgbClr val="2E3A80"/>
-                </a:solidFill>
-                <a:latin typeface="Montserrat"/>
-              </a:rPr>
-              <a:t>•  </a:t>
+                  <a:srgbClr val="E8801A"/>
+                </a:solidFill>
+                <a:latin typeface="Montserrat"/>
+              </a:rPr>
+              <a:t>▸  </a:t>
             </a:r>
             <a:r>
               <a:rPr sz="1600" b="0" i="0">
@@ -10208,23 +11307,23 @@
                 </a:solidFill>
                 <a:latin typeface="Montserrat"/>
               </a:rPr>
-              <a:t>1.ª: hasta 250.000 kg</a:t>
+              <a:t>Modificar = ampliar y cambiar de categoría</a:t>
             </a:r>
           </a:p>
           <a:p>
             <a:pPr>
               <a:spcAft>
-                <a:spcPts val="1000"/>
+                <a:spcPts val="1100"/>
               </a:spcAft>
             </a:pPr>
             <a:r>
               <a:rPr sz="1600" b="1" i="0">
                 <a:solidFill>
-                  <a:srgbClr val="2E3A80"/>
-                </a:solidFill>
-                <a:latin typeface="Montserrat"/>
-              </a:rPr>
-              <a:t>•  </a:t>
+                  <a:srgbClr val="E8801A"/>
+                </a:solidFill>
+                <a:latin typeface="Montserrat"/>
+              </a:rPr>
+              <a:t>▸  </a:t>
             </a:r>
             <a:r>
               <a:rPr sz="1600" b="0" i="0">
@@ -10233,23 +11332,23 @@
                 </a:solidFill>
                 <a:latin typeface="Montserrat"/>
               </a:rPr>
-              <a:t>2.ª: hasta 25.000 kg</a:t>
+              <a:t>Más bombonas sin saltar: no cuenta</a:t>
             </a:r>
           </a:p>
           <a:p>
             <a:pPr>
               <a:spcAft>
-                <a:spcPts val="1000"/>
+                <a:spcPts val="1100"/>
               </a:spcAft>
             </a:pPr>
             <a:r>
               <a:rPr sz="1600" b="1" i="0">
                 <a:solidFill>
-                  <a:srgbClr val="2E3A80"/>
-                </a:solidFill>
-                <a:latin typeface="Montserrat"/>
-              </a:rPr>
-              <a:t>•  </a:t>
+                  <a:srgbClr val="E8801A"/>
+                </a:solidFill>
+                <a:latin typeface="Montserrat"/>
+              </a:rPr>
+              <a:t>▸  </a:t>
             </a:r>
             <a:r>
               <a:rPr sz="1600" b="0" i="0">
@@ -10258,64 +11357,14 @@
                 </a:solidFill>
                 <a:latin typeface="Montserrat"/>
               </a:rPr>
-              <a:t>3.ª: hasta 12.500 kg</a:t>
-            </a:r>
-          </a:p>
-          <a:p>
-            <a:pPr>
-              <a:spcAft>
-                <a:spcPts val="1000"/>
-              </a:spcAft>
-            </a:pPr>
-            <a:r>
-              <a:rPr sz="1600" b="1" i="0">
-                <a:solidFill>
-                  <a:srgbClr val="2E3A80"/>
-                </a:solidFill>
-                <a:latin typeface="Montserrat"/>
-              </a:rPr>
-              <a:t>•  </a:t>
-            </a:r>
-            <a:r>
-              <a:rPr sz="1600" b="0" i="0">
-                <a:solidFill>
-                  <a:srgbClr val="1B2330"/>
-                </a:solidFill>
-                <a:latin typeface="Montserrat"/>
-              </a:rPr>
-              <a:t>4.ª: hasta 1.000 kg</a:t>
-            </a:r>
-          </a:p>
-          <a:p>
-            <a:pPr>
-              <a:spcAft>
-                <a:spcPts val="1000"/>
-              </a:spcAft>
-            </a:pPr>
-            <a:r>
-              <a:rPr sz="1600" b="1" i="0">
-                <a:solidFill>
-                  <a:srgbClr val="2E3A80"/>
-                </a:solidFill>
-                <a:latin typeface="Montserrat"/>
-              </a:rPr>
-              <a:t>•  </a:t>
-            </a:r>
-            <a:r>
-              <a:rPr sz="1600" b="0" i="0">
-                <a:solidFill>
-                  <a:srgbClr val="1B2330"/>
-                </a:solidFill>
-                <a:latin typeface="Montserrat"/>
-              </a:rPr>
-              <a:t>5.ª: hasta 500 kg</a:t>
-            </a:r>
-          </a:p>
-        </p:txBody>
-      </p:sp>
-      <p:sp>
-        <p:nvSpPr>
-          <p:cNvPr id="8" name="imgph" descr="IMGQ:propane cylinders rows outdoor depot"/>
+              <a:t>Cruzar el umbral de kilos: sí cuenta</a:t>
+            </a:r>
+          </a:p>
+        </p:txBody>
+      </p:sp>
+      <p:sp>
+        <p:nvSpPr>
+          <p:cNvPr id="9" name="imgph" descr="IMGQ:warehouse worker clipboard inventory"/>
           <p:cNvSpPr/>
           <p:nvPr/>
         </p:nvSpPr>
@@ -10361,7 +11410,7 @@
       </p:sp>
       <p:sp>
         <p:nvSpPr>
-          <p:cNvPr id="9" name="TextBox 8"/>
+          <p:cNvPr id="10" name="TextBox 9"/>
           <p:cNvSpPr txBox="1"/>
           <p:nvPr/>
         </p:nvSpPr>
@@ -10401,7 +11450,7 @@
                 </a:solidFill>
                 <a:latin typeface="Montserrat"/>
               </a:rPr>
-              <a:t>propane cylinders rows outdoor depot</a:t>
+              <a:t>warehouse worker clipboard inventory</a:t>
             </a:r>
           </a:p>
         </p:txBody>
@@ -10498,7 +11547,7 @@
                 </a:solidFill>
                 <a:latin typeface="Montserrat"/>
               </a:rPr>
-              <a:t>006 / 018</a:t>
+              <a:t>006 / 019</a:t>
             </a:r>
           </a:p>
         </p:txBody>
@@ -10546,7 +11595,7 @@
         <p:spPr>
           <a:xfrm>
             <a:off x="822960" y="457200"/>
-            <a:ext cx="8229600" cy="365760"/>
+            <a:ext cx="10058400" cy="365760"/>
           </a:xfrm>
           <a:prstGeom prst="rect">
             <a:avLst/>
@@ -10560,13 +11609,13 @@
           <a:lstStyle/>
           <a:p>
             <a:r>
-              <a:rPr sz="1200" b="1" i="0">
-                <a:solidFill>
-                  <a:srgbClr val="64748B"/>
-                </a:solidFill>
-                <a:latin typeface="Montserrat"/>
-              </a:rPr>
-              <a:t>APARTADO 2 · CÁLCULO</a:t>
+              <a:rPr sz="1300" b="1" i="0">
+                <a:solidFill>
+                  <a:srgbClr val="E8801A"/>
+                </a:solidFill>
+                <a:latin typeface="Montserrat"/>
+              </a:rPr>
+              <a:t>APARTADO 2 · CLASIFICACIÓN</a:t>
             </a:r>
           </a:p>
         </p:txBody>
@@ -10594,26 +11643,70 @@
           <a:lstStyle/>
           <a:p>
             <a:r>
-              <a:rPr sz="2700" b="1" i="0">
+              <a:rPr sz="2800" b="1" i="0">
                 <a:solidFill>
                   <a:srgbClr val="1E2761"/>
                 </a:solidFill>
                 <a:latin typeface="Montserrat"/>
               </a:rPr>
-              <a:t>Ct = Cn × N × 0,65</a:t>
-            </a:r>
-          </a:p>
-        </p:txBody>
-      </p:sp>
-      <p:sp>
-        <p:nvSpPr>
-          <p:cNvPr id="7" name="TextBox 6"/>
+              <a:t>Las cinco categorías</a:t>
+            </a:r>
+          </a:p>
+        </p:txBody>
+      </p:sp>
+      <p:sp>
+        <p:nvSpPr>
+          <p:cNvPr id="7" name="Rounded Rectangle 6"/>
+          <p:cNvSpPr/>
+          <p:nvPr/>
+        </p:nvSpPr>
+        <p:spPr>
+          <a:xfrm>
+            <a:off x="868680" y="1627632"/>
+            <a:ext cx="2011680" cy="73152"/>
+          </a:xfrm>
+          <a:prstGeom prst="roundRect">
+            <a:avLst/>
+          </a:prstGeom>
+          <a:solidFill>
+            <a:srgbClr val="E8801A"/>
+          </a:solidFill>
+          <a:ln>
+            <a:noFill/>
+          </a:ln>
+          <a:effectLst/>
+        </p:spPr>
+        <p:style>
+          <a:lnRef idx="1">
+            <a:schemeClr val="accent1"/>
+          </a:lnRef>
+          <a:fillRef idx="3">
+            <a:schemeClr val="accent1"/>
+          </a:fillRef>
+          <a:effectRef idx="2">
+            <a:schemeClr val="accent1"/>
+          </a:effectRef>
+          <a:fontRef idx="minor">
+            <a:schemeClr val="lt1"/>
+          </a:fontRef>
+        </p:style>
+        <p:txBody>
+          <a:bodyPr rtlCol="0" anchor="ctr"/>
+          <a:lstStyle/>
+          <a:p>
+            <a:pPr algn="ctr"/>
+          </a:p>
+        </p:txBody>
+      </p:sp>
+      <p:sp>
+        <p:nvSpPr>
+          <p:cNvPr id="8" name="TextBox 7"/>
           <p:cNvSpPr txBox="1"/>
           <p:nvPr/>
         </p:nvSpPr>
         <p:spPr>
           <a:xfrm>
-            <a:off x="822960" y="1920240"/>
+            <a:off x="822960" y="1965960"/>
             <a:ext cx="4983480" cy="4206240"/>
           </a:xfrm>
           <a:prstGeom prst="rect">
@@ -10629,17 +11722,17 @@
           <a:p>
             <a:pPr>
               <a:spcAft>
-                <a:spcPts val="1000"/>
+                <a:spcPts val="1100"/>
               </a:spcAft>
             </a:pPr>
             <a:r>
               <a:rPr sz="1600" b="1" i="0">
                 <a:solidFill>
-                  <a:srgbClr val="2E3A80"/>
-                </a:solidFill>
-                <a:latin typeface="Montserrat"/>
-              </a:rPr>
-              <a:t>•  </a:t>
+                  <a:srgbClr val="E8801A"/>
+                </a:solidFill>
+                <a:latin typeface="Montserrat"/>
+              </a:rPr>
+              <a:t>▸  </a:t>
             </a:r>
             <a:r>
               <a:rPr sz="1600" b="0" i="0">
@@ -10648,23 +11741,23 @@
                 </a:solidFill>
                 <a:latin typeface="Montserrat"/>
               </a:rPr>
-              <a:t>Cn: capacidad nominal del envase</a:t>
+              <a:t>1.ª: hasta 250.000 kg</a:t>
             </a:r>
           </a:p>
           <a:p>
             <a:pPr>
               <a:spcAft>
-                <a:spcPts val="1000"/>
+                <a:spcPts val="1100"/>
               </a:spcAft>
             </a:pPr>
             <a:r>
               <a:rPr sz="1600" b="1" i="0">
                 <a:solidFill>
-                  <a:srgbClr val="2E3A80"/>
-                </a:solidFill>
-                <a:latin typeface="Montserrat"/>
-              </a:rPr>
-              <a:t>•  </a:t>
+                  <a:srgbClr val="E8801A"/>
+                </a:solidFill>
+                <a:latin typeface="Montserrat"/>
+              </a:rPr>
+              <a:t>▸  </a:t>
             </a:r>
             <a:r>
               <a:rPr sz="1600" b="0" i="0">
@@ -10673,23 +11766,23 @@
                 </a:solidFill>
                 <a:latin typeface="Montserrat"/>
               </a:rPr>
-              <a:t>N: envases llenos Y vacíos</a:t>
+              <a:t>2.ª: hasta 25.000 kg</a:t>
             </a:r>
           </a:p>
           <a:p>
             <a:pPr>
               <a:spcAft>
-                <a:spcPts val="1000"/>
+                <a:spcPts val="1100"/>
               </a:spcAft>
             </a:pPr>
             <a:r>
               <a:rPr sz="1600" b="1" i="0">
                 <a:solidFill>
-                  <a:srgbClr val="2E3A80"/>
-                </a:solidFill>
-                <a:latin typeface="Montserrat"/>
-              </a:rPr>
-              <a:t>•  </a:t>
+                  <a:srgbClr val="E8801A"/>
+                </a:solidFill>
+                <a:latin typeface="Montserrat"/>
+              </a:rPr>
+              <a:t>▸  </a:t>
             </a:r>
             <a:r>
               <a:rPr sz="1600" b="0" i="0">
@@ -10698,23 +11791,23 @@
                 </a:solidFill>
                 <a:latin typeface="Montserrat"/>
               </a:rPr>
-              <a:t>× 0,65: margen de seguridad</a:t>
+              <a:t>3.ª: hasta 12.500 kg</a:t>
             </a:r>
           </a:p>
           <a:p>
             <a:pPr>
               <a:spcAft>
-                <a:spcPts val="1000"/>
+                <a:spcPts val="1100"/>
               </a:spcAft>
             </a:pPr>
             <a:r>
               <a:rPr sz="1600" b="1" i="0">
                 <a:solidFill>
-                  <a:srgbClr val="2E3A80"/>
-                </a:solidFill>
-                <a:latin typeface="Montserrat"/>
-              </a:rPr>
-              <a:t>•  </a:t>
+                  <a:srgbClr val="E8801A"/>
+                </a:solidFill>
+                <a:latin typeface="Montserrat"/>
+              </a:rPr>
+              <a:t>▸  </a:t>
             </a:r>
             <a:r>
               <a:rPr sz="1600" b="0" i="0">
@@ -10723,14 +11816,39 @@
                 </a:solidFill>
                 <a:latin typeface="Montserrat"/>
               </a:rPr>
-              <a:t>Total = suma de parciales</a:t>
-            </a:r>
-          </a:p>
-        </p:txBody>
-      </p:sp>
-      <p:sp>
-        <p:nvSpPr>
-          <p:cNvPr id="8" name="imgph" descr="IMGQ:empty gas cylinders warehouse row"/>
+              <a:t>4.ª: hasta 1.000 kg</a:t>
+            </a:r>
+          </a:p>
+          <a:p>
+            <a:pPr>
+              <a:spcAft>
+                <a:spcPts val="1100"/>
+              </a:spcAft>
+            </a:pPr>
+            <a:r>
+              <a:rPr sz="1600" b="1" i="0">
+                <a:solidFill>
+                  <a:srgbClr val="E8801A"/>
+                </a:solidFill>
+                <a:latin typeface="Montserrat"/>
+              </a:rPr>
+              <a:t>▸  </a:t>
+            </a:r>
+            <a:r>
+              <a:rPr sz="1600" b="0" i="0">
+                <a:solidFill>
+                  <a:srgbClr val="1B2330"/>
+                </a:solidFill>
+                <a:latin typeface="Montserrat"/>
+              </a:rPr>
+              <a:t>5.ª: hasta 500 kg</a:t>
+            </a:r>
+          </a:p>
+        </p:txBody>
+      </p:sp>
+      <p:sp>
+        <p:nvSpPr>
+          <p:cNvPr id="9" name="imgph" descr="IMGQ:propane cylinders rows outdoor depot"/>
           <p:cNvSpPr/>
           <p:nvPr/>
         </p:nvSpPr>
@@ -10776,7 +11894,7 @@
       </p:sp>
       <p:sp>
         <p:nvSpPr>
-          <p:cNvPr id="9" name="TextBox 8"/>
+          <p:cNvPr id="10" name="TextBox 9"/>
           <p:cNvSpPr txBox="1"/>
           <p:nvPr/>
         </p:nvSpPr>
@@ -10816,7 +11934,7 @@
                 </a:solidFill>
                 <a:latin typeface="Montserrat"/>
               </a:rPr>
-              <a:t>empty gas cylinders warehouse row</a:t>
+              <a:t>propane cylinders rows outdoor depot</a:t>
             </a:r>
           </a:p>
         </p:txBody>
@@ -10913,7 +12031,7 @@
                 </a:solidFill>
                 <a:latin typeface="Montserrat"/>
               </a:rPr>
-              <a:t>007 / 018</a:t>
+              <a:t>007 / 019</a:t>
             </a:r>
           </a:p>
         </p:txBody>
@@ -10961,7 +12079,7 @@
         <p:spPr>
           <a:xfrm>
             <a:off x="822960" y="457200"/>
-            <a:ext cx="8229600" cy="365760"/>
+            <a:ext cx="10058400" cy="365760"/>
           </a:xfrm>
           <a:prstGeom prst="rect">
             <a:avLst/>
@@ -10975,13 +12093,13 @@
           <a:lstStyle/>
           <a:p>
             <a:r>
-              <a:rPr sz="1200" b="1" i="0">
-                <a:solidFill>
-                  <a:srgbClr val="64748B"/>
-                </a:solidFill>
-                <a:latin typeface="Montserrat"/>
-              </a:rPr>
-              <a:t>APARTADO 3.1 · DISEÑO GENERAL</a:t>
+              <a:rPr sz="1300" b="1" i="0">
+                <a:solidFill>
+                  <a:srgbClr val="E8801A"/>
+                </a:solidFill>
+                <a:latin typeface="Montserrat"/>
+              </a:rPr>
+              <a:t>APARTADO 2 · CÁLCULO</a:t>
             </a:r>
           </a:p>
         </p:txBody>
@@ -11009,26 +12127,70 @@
           <a:lstStyle/>
           <a:p>
             <a:r>
-              <a:rPr sz="2700" b="1" i="0">
+              <a:rPr sz="2800" b="1" i="0">
                 <a:solidFill>
                   <a:srgbClr val="1E2761"/>
                 </a:solidFill>
                 <a:latin typeface="Montserrat"/>
               </a:rPr>
-              <a:t>Siempre al aire libre</a:t>
-            </a:r>
-          </a:p>
-        </p:txBody>
-      </p:sp>
-      <p:sp>
-        <p:nvSpPr>
-          <p:cNvPr id="7" name="TextBox 6"/>
+              <a:t>Ct = Cn × N × 0,65</a:t>
+            </a:r>
+          </a:p>
+        </p:txBody>
+      </p:sp>
+      <p:sp>
+        <p:nvSpPr>
+          <p:cNvPr id="7" name="Rounded Rectangle 6"/>
+          <p:cNvSpPr/>
+          <p:nvPr/>
+        </p:nvSpPr>
+        <p:spPr>
+          <a:xfrm>
+            <a:off x="868680" y="1627632"/>
+            <a:ext cx="2011680" cy="73152"/>
+          </a:xfrm>
+          <a:prstGeom prst="roundRect">
+            <a:avLst/>
+          </a:prstGeom>
+          <a:solidFill>
+            <a:srgbClr val="E8801A"/>
+          </a:solidFill>
+          <a:ln>
+            <a:noFill/>
+          </a:ln>
+          <a:effectLst/>
+        </p:spPr>
+        <p:style>
+          <a:lnRef idx="1">
+            <a:schemeClr val="accent1"/>
+          </a:lnRef>
+          <a:fillRef idx="3">
+            <a:schemeClr val="accent1"/>
+          </a:fillRef>
+          <a:effectRef idx="2">
+            <a:schemeClr val="accent1"/>
+          </a:effectRef>
+          <a:fontRef idx="minor">
+            <a:schemeClr val="lt1"/>
+          </a:fontRef>
+        </p:style>
+        <p:txBody>
+          <a:bodyPr rtlCol="0" anchor="ctr"/>
+          <a:lstStyle/>
+          <a:p>
+            <a:pPr algn="ctr"/>
+          </a:p>
+        </p:txBody>
+      </p:sp>
+      <p:sp>
+        <p:nvSpPr>
+          <p:cNvPr id="8" name="TextBox 7"/>
           <p:cNvSpPr txBox="1"/>
           <p:nvPr/>
         </p:nvSpPr>
         <p:spPr>
           <a:xfrm>
-            <a:off x="822960" y="1920240"/>
+            <a:off x="822960" y="1965960"/>
             <a:ext cx="4983480" cy="4206240"/>
           </a:xfrm>
           <a:prstGeom prst="rect">
@@ -11044,17 +12206,17 @@
           <a:p>
             <a:pPr>
               <a:spcAft>
-                <a:spcPts val="1000"/>
+                <a:spcPts val="1100"/>
               </a:spcAft>
             </a:pPr>
             <a:r>
               <a:rPr sz="1600" b="1" i="0">
                 <a:solidFill>
-                  <a:srgbClr val="2E3A80"/>
-                </a:solidFill>
-                <a:latin typeface="Montserrat"/>
-              </a:rPr>
-              <a:t>•  </a:t>
+                  <a:srgbClr val="E8801A"/>
+                </a:solidFill>
+                <a:latin typeface="Montserrat"/>
+              </a:rPr>
+              <a:t>▸  </a:t>
             </a:r>
             <a:r>
               <a:rPr sz="1600" b="0" i="0">
@@ -11063,23 +12225,23 @@
                 </a:solidFill>
                 <a:latin typeface="Montserrat"/>
               </a:rPr>
-              <a:t>Almacenamiento al aire libre</a:t>
+              <a:t>Cn: capacidad nominal del envase</a:t>
             </a:r>
           </a:p>
           <a:p>
             <a:pPr>
               <a:spcAft>
-                <a:spcPts val="1000"/>
+                <a:spcPts val="1100"/>
               </a:spcAft>
             </a:pPr>
             <a:r>
               <a:rPr sz="1600" b="1" i="0">
                 <a:solidFill>
-                  <a:srgbClr val="2E3A80"/>
-                </a:solidFill>
-                <a:latin typeface="Montserrat"/>
-              </a:rPr>
-              <a:t>•  </a:t>
+                  <a:srgbClr val="E8801A"/>
+                </a:solidFill>
+                <a:latin typeface="Montserrat"/>
+              </a:rPr>
+              <a:t>▸  </a:t>
             </a:r>
             <a:r>
               <a:rPr sz="1600" b="0" i="0">
@@ -11088,23 +12250,23 @@
                 </a:solidFill>
                 <a:latin typeface="Montserrat"/>
               </a:rPr>
-              <a:t>A lo sumo, cubierta ligera</a:t>
+              <a:t>N: envases llenos Y vacíos</a:t>
             </a:r>
           </a:p>
           <a:p>
             <a:pPr>
               <a:spcAft>
-                <a:spcPts val="1000"/>
+                <a:spcPts val="1100"/>
               </a:spcAft>
             </a:pPr>
             <a:r>
               <a:rPr sz="1600" b="1" i="0">
                 <a:solidFill>
-                  <a:srgbClr val="2E3A80"/>
-                </a:solidFill>
-                <a:latin typeface="Montserrat"/>
-              </a:rPr>
-              <a:t>•  </a:t>
+                  <a:srgbClr val="E8801A"/>
+                </a:solidFill>
+                <a:latin typeface="Montserrat"/>
+              </a:rPr>
+              <a:t>▸  </a:t>
             </a:r>
             <a:r>
               <a:rPr sz="1600" b="0" i="0">
@@ -11113,23 +12275,23 @@
                 </a:solidFill>
                 <a:latin typeface="Montserrat"/>
               </a:rPr>
-              <a:t>Una sola planta, no subterránea</a:t>
+              <a:t>× 0,65: margen de seguridad</a:t>
             </a:r>
           </a:p>
           <a:p>
             <a:pPr>
               <a:spcAft>
-                <a:spcPts val="1000"/>
+                <a:spcPts val="1100"/>
               </a:spcAft>
             </a:pPr>
             <a:r>
               <a:rPr sz="1600" b="1" i="0">
                 <a:solidFill>
-                  <a:srgbClr val="2E3A80"/>
-                </a:solidFill>
-                <a:latin typeface="Montserrat"/>
-              </a:rPr>
-              <a:t>•  </a:t>
+                  <a:srgbClr val="E8801A"/>
+                </a:solidFill>
+                <a:latin typeface="Montserrat"/>
+              </a:rPr>
+              <a:t>▸  </a:t>
             </a:r>
             <a:r>
               <a:rPr sz="1600" b="0" i="0">
@@ -11138,14 +12300,14 @@
                 </a:solidFill>
                 <a:latin typeface="Montserrat"/>
               </a:rPr>
-              <a:t>Llenos separados de vacíos</a:t>
-            </a:r>
-          </a:p>
-        </p:txBody>
-      </p:sp>
-      <p:sp>
-        <p:nvSpPr>
-          <p:cNvPr id="8" name="imgph" descr="IMGQ:outdoor gas cylinder cage storage yard"/>
+              <a:t>Total = suma de parciales</a:t>
+            </a:r>
+          </a:p>
+        </p:txBody>
+      </p:sp>
+      <p:sp>
+        <p:nvSpPr>
+          <p:cNvPr id="9" name="imgph" descr="IMGQ:empty gas cylinders warehouse row"/>
           <p:cNvSpPr/>
           <p:nvPr/>
         </p:nvSpPr>
@@ -11191,7 +12353,7 @@
       </p:sp>
       <p:sp>
         <p:nvSpPr>
-          <p:cNvPr id="9" name="TextBox 8"/>
+          <p:cNvPr id="10" name="TextBox 9"/>
           <p:cNvSpPr txBox="1"/>
           <p:nvPr/>
         </p:nvSpPr>
@@ -11231,7 +12393,7 @@
                 </a:solidFill>
                 <a:latin typeface="Montserrat"/>
               </a:rPr>
-              <a:t>outdoor gas cylinder cage storage yard</a:t>
+              <a:t>empty gas cylinders warehouse row</a:t>
             </a:r>
           </a:p>
         </p:txBody>
@@ -11328,7 +12490,7 @@
                 </a:solidFill>
                 <a:latin typeface="Montserrat"/>
               </a:rPr>
-              <a:t>008 / 018</a:t>
+              <a:t>008 / 019</a:t>
             </a:r>
           </a:p>
         </p:txBody>
@@ -11376,7 +12538,7 @@
         <p:spPr>
           <a:xfrm>
             <a:off x="822960" y="457200"/>
-            <a:ext cx="8229600" cy="365760"/>
+            <a:ext cx="10058400" cy="365760"/>
           </a:xfrm>
           <a:prstGeom prst="rect">
             <a:avLst/>
@@ -11390,9 +12552,9 @@
           <a:lstStyle/>
           <a:p>
             <a:r>
-              <a:rPr sz="1200" b="1" i="0">
-                <a:solidFill>
-                  <a:srgbClr val="64748B"/>
+              <a:rPr sz="1300" b="1" i="0">
+                <a:solidFill>
+                  <a:srgbClr val="E8801A"/>
                 </a:solidFill>
                 <a:latin typeface="Montserrat"/>
               </a:rPr>
@@ -11424,26 +12586,70 @@
           <a:lstStyle/>
           <a:p>
             <a:r>
-              <a:rPr sz="2700" b="1" i="0">
+              <a:rPr sz="2800" b="1" i="0">
                 <a:solidFill>
                   <a:srgbClr val="1E2761"/>
                 </a:solidFill>
                 <a:latin typeface="Montserrat"/>
               </a:rPr>
-              <a:t>Evacuación y colocación</a:t>
-            </a:r>
-          </a:p>
-        </p:txBody>
-      </p:sp>
-      <p:sp>
-        <p:nvSpPr>
-          <p:cNvPr id="7" name="TextBox 6"/>
+              <a:t>Siempre al aire libre</a:t>
+            </a:r>
+          </a:p>
+        </p:txBody>
+      </p:sp>
+      <p:sp>
+        <p:nvSpPr>
+          <p:cNvPr id="7" name="Rounded Rectangle 6"/>
+          <p:cNvSpPr/>
+          <p:nvPr/>
+        </p:nvSpPr>
+        <p:spPr>
+          <a:xfrm>
+            <a:off x="868680" y="1627632"/>
+            <a:ext cx="2011680" cy="73152"/>
+          </a:xfrm>
+          <a:prstGeom prst="roundRect">
+            <a:avLst/>
+          </a:prstGeom>
+          <a:solidFill>
+            <a:srgbClr val="E8801A"/>
+          </a:solidFill>
+          <a:ln>
+            <a:noFill/>
+          </a:ln>
+          <a:effectLst/>
+        </p:spPr>
+        <p:style>
+          <a:lnRef idx="1">
+            <a:schemeClr val="accent1"/>
+          </a:lnRef>
+          <a:fillRef idx="3">
+            <a:schemeClr val="accent1"/>
+          </a:fillRef>
+          <a:effectRef idx="2">
+            <a:schemeClr val="accent1"/>
+          </a:effectRef>
+          <a:fontRef idx="minor">
+            <a:schemeClr val="lt1"/>
+          </a:fontRef>
+        </p:style>
+        <p:txBody>
+          <a:bodyPr rtlCol="0" anchor="ctr"/>
+          <a:lstStyle/>
+          <a:p>
+            <a:pPr algn="ctr"/>
+          </a:p>
+        </p:txBody>
+      </p:sp>
+      <p:sp>
+        <p:nvSpPr>
+          <p:cNvPr id="8" name="TextBox 7"/>
           <p:cNvSpPr txBox="1"/>
           <p:nvPr/>
         </p:nvSpPr>
         <p:spPr>
           <a:xfrm>
-            <a:off x="822960" y="1920240"/>
+            <a:off x="822960" y="1965960"/>
             <a:ext cx="4983480" cy="4206240"/>
           </a:xfrm>
           <a:prstGeom prst="rect">
@@ -11459,17 +12665,17 @@
           <a:p>
             <a:pPr>
               <a:spcAft>
-                <a:spcPts val="1000"/>
+                <a:spcPts val="1100"/>
               </a:spcAft>
             </a:pPr>
             <a:r>
               <a:rPr sz="1600" b="1" i="0">
                 <a:solidFill>
-                  <a:srgbClr val="2E3A80"/>
-                </a:solidFill>
-                <a:latin typeface="Montserrat"/>
-              </a:rPr>
-              <a:t>•  </a:t>
+                  <a:srgbClr val="E8801A"/>
+                </a:solidFill>
+                <a:latin typeface="Montserrat"/>
+              </a:rPr>
+              <a:t>▸  </a:t>
             </a:r>
             <a:r>
               <a:rPr sz="1600" b="0" i="0">
@@ -11478,23 +12684,23 @@
                 </a:solidFill>
                 <a:latin typeface="Montserrat"/>
               </a:rPr>
-              <a:t>Recorrido a salida ≤ 25 m</a:t>
+              <a:t>Almacenamiento al aire libre</a:t>
             </a:r>
           </a:p>
           <a:p>
             <a:pPr>
               <a:spcAft>
-                <a:spcPts val="1000"/>
+                <a:spcPts val="1100"/>
               </a:spcAft>
             </a:pPr>
             <a:r>
               <a:rPr sz="1600" b="1" i="0">
                 <a:solidFill>
-                  <a:srgbClr val="2E3A80"/>
-                </a:solidFill>
-                <a:latin typeface="Montserrat"/>
-              </a:rPr>
-              <a:t>•  </a:t>
+                  <a:srgbClr val="E8801A"/>
+                </a:solidFill>
+                <a:latin typeface="Montserrat"/>
+              </a:rPr>
+              <a:t>▸  </a:t>
             </a:r>
             <a:r>
               <a:rPr sz="1600" b="0" i="0">
@@ -11503,23 +12709,23 @@
                 </a:solidFill>
                 <a:latin typeface="Montserrat"/>
               </a:rPr>
-              <a:t>Excepción: 25 m² o menos de 6 m</a:t>
+              <a:t>A lo sumo, cubierta ligera</a:t>
             </a:r>
           </a:p>
           <a:p>
             <a:pPr>
               <a:spcAft>
-                <a:spcPts val="1000"/>
+                <a:spcPts val="1100"/>
               </a:spcAft>
             </a:pPr>
             <a:r>
               <a:rPr sz="1600" b="1" i="0">
                 <a:solidFill>
-                  <a:srgbClr val="2E3A80"/>
-                </a:solidFill>
-                <a:latin typeface="Montserrat"/>
-              </a:rPr>
-              <a:t>•  </a:t>
+                  <a:srgbClr val="E8801A"/>
+                </a:solidFill>
+                <a:latin typeface="Montserrat"/>
+              </a:rPr>
+              <a:t>▸  </a:t>
             </a:r>
             <a:r>
               <a:rPr sz="1600" b="0" i="0">
@@ -11528,23 +12734,23 @@
                 </a:solidFill>
                 <a:latin typeface="Montserrat"/>
               </a:rPr>
-              <a:t>Envases llenos: siempre verticales</a:t>
+              <a:t>Una sola planta, no subterránea</a:t>
             </a:r>
           </a:p>
           <a:p>
             <a:pPr>
               <a:spcAft>
-                <a:spcPts val="1000"/>
+                <a:spcPts val="1100"/>
               </a:spcAft>
             </a:pPr>
             <a:r>
               <a:rPr sz="1600" b="1" i="0">
                 <a:solidFill>
-                  <a:srgbClr val="2E3A80"/>
-                </a:solidFill>
-                <a:latin typeface="Montserrat"/>
-              </a:rPr>
-              <a:t>•  </a:t>
+                  <a:srgbClr val="E8801A"/>
+                </a:solidFill>
+                <a:latin typeface="Montserrat"/>
+              </a:rPr>
+              <a:t>▸  </a:t>
             </a:r>
             <a:r>
               <a:rPr sz="1600" b="0" i="0">
@@ -11553,14 +12759,14 @@
                 </a:solidFill>
                 <a:latin typeface="Montserrat"/>
               </a:rPr>
-              <a:t>En jaulas si van en varias alturas</a:t>
-            </a:r>
-          </a:p>
-        </p:txBody>
-      </p:sp>
-      <p:sp>
-        <p:nvSpPr>
-          <p:cNvPr id="8" name="imgph" descr="IMGQ:emergency exit sign warehouse"/>
+              <a:t>Llenos separados de vacíos</a:t>
+            </a:r>
+          </a:p>
+        </p:txBody>
+      </p:sp>
+      <p:sp>
+        <p:nvSpPr>
+          <p:cNvPr id="9" name="imgph" descr="IMGQ:outdoor gas cylinder cage storage yard"/>
           <p:cNvSpPr/>
           <p:nvPr/>
         </p:nvSpPr>
@@ -11606,7 +12812,7 @@
       </p:sp>
       <p:sp>
         <p:nvSpPr>
-          <p:cNvPr id="9" name="TextBox 8"/>
+          <p:cNvPr id="10" name="TextBox 9"/>
           <p:cNvSpPr txBox="1"/>
           <p:nvPr/>
         </p:nvSpPr>
@@ -11646,7 +12852,7 @@
                 </a:solidFill>
                 <a:latin typeface="Montserrat"/>
               </a:rPr>
-              <a:t>emergency exit sign warehouse</a:t>
+              <a:t>outdoor gas cylinder cage storage yard</a:t>
             </a:r>
           </a:p>
         </p:txBody>
@@ -11743,7 +12949,7 @@
                 </a:solidFill>
                 <a:latin typeface="Montserrat"/>
               </a:rPr>
-              <a:t>009 / 018</a:t>
+              <a:t>009 / 019</a:t>
             </a:r>
           </a:p>
         </p:txBody>
@@ -11791,7 +12997,7 @@
         <p:spPr>
           <a:xfrm>
             <a:off x="822960" y="457200"/>
-            <a:ext cx="8229600" cy="365760"/>
+            <a:ext cx="10058400" cy="365760"/>
           </a:xfrm>
           <a:prstGeom prst="rect">
             <a:avLst/>
@@ -11805,13 +13011,13 @@
           <a:lstStyle/>
           <a:p>
             <a:r>
-              <a:rPr sz="1200" b="1" i="0">
-                <a:solidFill>
-                  <a:srgbClr val="64748B"/>
-                </a:solidFill>
-                <a:latin typeface="Montserrat"/>
-              </a:rPr>
-              <a:t>APARTADO 3.1 · PROHIBICIONES</a:t>
+              <a:rPr sz="1300" b="1" i="0">
+                <a:solidFill>
+                  <a:srgbClr val="E8801A"/>
+                </a:solidFill>
+                <a:latin typeface="Montserrat"/>
+              </a:rPr>
+              <a:t>APARTADO 3.1 · DISEÑO GENERAL</a:t>
             </a:r>
           </a:p>
         </p:txBody>
@@ -11839,26 +13045,70 @@
           <a:lstStyle/>
           <a:p>
             <a:r>
-              <a:rPr sz="2700" b="1" i="0">
+              <a:rPr sz="2800" b="1" i="0">
                 <a:solidFill>
                   <a:srgbClr val="1E2761"/>
                 </a:solidFill>
                 <a:latin typeface="Montserrat"/>
               </a:rPr>
-              <a:t>Fuego y trasvase, prohibidos</a:t>
-            </a:r>
-          </a:p>
-        </p:txBody>
-      </p:sp>
-      <p:sp>
-        <p:nvSpPr>
-          <p:cNvPr id="7" name="TextBox 6"/>
+              <a:t>Evacuación y colocación</a:t>
+            </a:r>
+          </a:p>
+        </p:txBody>
+      </p:sp>
+      <p:sp>
+        <p:nvSpPr>
+          <p:cNvPr id="7" name="Rounded Rectangle 6"/>
+          <p:cNvSpPr/>
+          <p:nvPr/>
+        </p:nvSpPr>
+        <p:spPr>
+          <a:xfrm>
+            <a:off x="868680" y="1627632"/>
+            <a:ext cx="2011680" cy="73152"/>
+          </a:xfrm>
+          <a:prstGeom prst="roundRect">
+            <a:avLst/>
+          </a:prstGeom>
+          <a:solidFill>
+            <a:srgbClr val="E8801A"/>
+          </a:solidFill>
+          <a:ln>
+            <a:noFill/>
+          </a:ln>
+          <a:effectLst/>
+        </p:spPr>
+        <p:style>
+          <a:lnRef idx="1">
+            <a:schemeClr val="accent1"/>
+          </a:lnRef>
+          <a:fillRef idx="3">
+            <a:schemeClr val="accent1"/>
+          </a:fillRef>
+          <a:effectRef idx="2">
+            <a:schemeClr val="accent1"/>
+          </a:effectRef>
+          <a:fontRef idx="minor">
+            <a:schemeClr val="lt1"/>
+          </a:fontRef>
+        </p:style>
+        <p:txBody>
+          <a:bodyPr rtlCol="0" anchor="ctr"/>
+          <a:lstStyle/>
+          <a:p>
+            <a:pPr algn="ctr"/>
+          </a:p>
+        </p:txBody>
+      </p:sp>
+      <p:sp>
+        <p:nvSpPr>
+          <p:cNvPr id="8" name="TextBox 7"/>
           <p:cNvSpPr txBox="1"/>
           <p:nvPr/>
         </p:nvSpPr>
         <p:spPr>
           <a:xfrm>
-            <a:off x="822960" y="1920240"/>
+            <a:off x="822960" y="1965960"/>
             <a:ext cx="4983480" cy="4206240"/>
           </a:xfrm>
           <a:prstGeom prst="rect">
@@ -11874,17 +13124,17 @@
           <a:p>
             <a:pPr>
               <a:spcAft>
-                <a:spcPts val="1000"/>
+                <a:spcPts val="1100"/>
               </a:spcAft>
             </a:pPr>
             <a:r>
               <a:rPr sz="1600" b="1" i="0">
                 <a:solidFill>
-                  <a:srgbClr val="2E3A80"/>
-                </a:solidFill>
-                <a:latin typeface="Montserrat"/>
-              </a:rPr>
-              <a:t>•  </a:t>
+                  <a:srgbClr val="E8801A"/>
+                </a:solidFill>
+                <a:latin typeface="Montserrat"/>
+              </a:rPr>
+              <a:t>▸  </a:t>
             </a:r>
             <a:r>
               <a:rPr sz="1600" b="0" i="0">
@@ -11893,23 +13143,23 @@
                 </a:solidFill>
                 <a:latin typeface="Montserrat"/>
               </a:rPr>
-              <a:t>Sin llamas ni fuentes de calor</a:t>
+              <a:t>Recorrido a salida ≤ 25 m</a:t>
             </a:r>
           </a:p>
           <a:p>
             <a:pPr>
               <a:spcAft>
-                <a:spcPts val="1000"/>
+                <a:spcPts val="1100"/>
               </a:spcAft>
             </a:pPr>
             <a:r>
               <a:rPr sz="1600" b="1" i="0">
                 <a:solidFill>
-                  <a:srgbClr val="2E3A80"/>
-                </a:solidFill>
-                <a:latin typeface="Montserrat"/>
-              </a:rPr>
-              <a:t>•  </a:t>
+                  <a:srgbClr val="E8801A"/>
+                </a:solidFill>
+                <a:latin typeface="Montserrat"/>
+              </a:rPr>
+              <a:t>▸  </a:t>
             </a:r>
             <a:r>
               <a:rPr sz="1600" b="0" i="0">
@@ -11918,23 +13168,23 @@
                 </a:solidFill>
                 <a:latin typeface="Montserrat"/>
               </a:rPr>
-              <a:t>Cartel: prohibido fumar y encender</a:t>
+              <a:t>Excepción: 25 m² o menos de 6 m</a:t>
             </a:r>
           </a:p>
           <a:p>
             <a:pPr>
               <a:spcAft>
-                <a:spcPts val="1000"/>
+                <a:spcPts val="1100"/>
               </a:spcAft>
             </a:pPr>
             <a:r>
               <a:rPr sz="1600" b="1" i="0">
                 <a:solidFill>
-                  <a:srgbClr val="2E3A80"/>
-                </a:solidFill>
-                <a:latin typeface="Montserrat"/>
-              </a:rPr>
-              <a:t>•  </a:t>
+                  <a:srgbClr val="E8801A"/>
+                </a:solidFill>
+                <a:latin typeface="Montserrat"/>
+              </a:rPr>
+              <a:t>▸  </a:t>
             </a:r>
             <a:r>
               <a:rPr sz="1600" b="0" i="0">
@@ -11943,23 +13193,23 @@
                 </a:solidFill>
                 <a:latin typeface="Montserrat"/>
               </a:rPr>
-              <a:t>Mechero y cerillas, en la puerta</a:t>
+              <a:t>Envases llenos: siempre verticales</a:t>
             </a:r>
           </a:p>
           <a:p>
             <a:pPr>
               <a:spcAft>
-                <a:spcPts val="1000"/>
+                <a:spcPts val="1100"/>
               </a:spcAft>
             </a:pPr>
             <a:r>
               <a:rPr sz="1600" b="1" i="0">
                 <a:solidFill>
-                  <a:srgbClr val="2E3A80"/>
-                </a:solidFill>
-                <a:latin typeface="Montserrat"/>
-              </a:rPr>
-              <a:t>•  </a:t>
+                  <a:srgbClr val="E8801A"/>
+                </a:solidFill>
+                <a:latin typeface="Montserrat"/>
+              </a:rPr>
+              <a:t>▸  </a:t>
             </a:r>
             <a:r>
               <a:rPr sz="1600" b="0" i="0">
@@ -11968,14 +13218,14 @@
                 </a:solidFill>
                 <a:latin typeface="Montserrat"/>
               </a:rPr>
-              <a:t>Prohibido rellenar o trasvasar</a:t>
-            </a:r>
-          </a:p>
-        </p:txBody>
-      </p:sp>
-      <p:sp>
-        <p:nvSpPr>
-          <p:cNvPr id="8" name="imgph" descr="IMGQ:no smoking sign industrial gas"/>
+              <a:t>En jaulas si van en varias alturas</a:t>
+            </a:r>
+          </a:p>
+        </p:txBody>
+      </p:sp>
+      <p:sp>
+        <p:nvSpPr>
+          <p:cNvPr id="9" name="imgph" descr="IMGQ:emergency exit sign warehouse"/>
           <p:cNvSpPr/>
           <p:nvPr/>
         </p:nvSpPr>
@@ -12021,7 +13271,7 @@
       </p:sp>
       <p:sp>
         <p:nvSpPr>
-          <p:cNvPr id="9" name="TextBox 8"/>
+          <p:cNvPr id="10" name="TextBox 9"/>
           <p:cNvSpPr txBox="1"/>
           <p:nvPr/>
         </p:nvSpPr>
@@ -12061,7 +13311,7 @@
                 </a:solidFill>
                 <a:latin typeface="Montserrat"/>
               </a:rPr>
-              <a:t>no smoking sign industrial gas</a:t>
+              <a:t>emergency exit sign warehouse</a:t>
             </a:r>
           </a:p>
         </p:txBody>

--- a/Curso Gas B/02 - ITC-ICG 02-03-04 - Almacenamiento GLP y plantas GNL/02 - ITC-ICG 02-03-04 - Almacenamiento GLP y plantas GNL - Vídeo 1.pptx
+++ b/Curso Gas B/02 - ITC-ICG 02-03-04 - Almacenamiento GLP y plantas GNL/02 - ITC-ICG 02-03-04 - Almacenamiento GLP y plantas GNL - Vídeo 1.pptx
@@ -605,12 +605,12 @@
           <a:lstStyle/>
           <a:p>
             <a:r>
-              <a:t>N1: ¿Por qué entran también las vacías?</a:t>
-            </a:r>
-          </a:p>
-          <a:p>
-            <a:r>
-              <a:t>N2: Porque una bombona vacía siempre conserva un resto de gas y da la lata igual. Por eso en la ene cuentas llenos y vacíos, y encima multiplicas por cero coma sesenta y cinco, que es el margen de seguridad. El truco para no fallar: en el recuento no perdono ni las vacías.</a:t>
+              <a:t>N2: La respuesta correcta es la opción C: los llenos y los vacíos. ¿Por qué? Porque un envase vacío nunca lo está del todo: siempre le queda algo de gas, así que también suma en el recuento. Por eso en la ene cuentas llenos y vacíos, y encima multiplicas por cero coma sesenta y cinco, que es el margen de seguridad. El truco para no fallar: en el recuento no perdono ni las vacías.</a:t>
+            </a:r>
+          </a:p>
+          <a:p>
+            <a:r>
+              <a:t>N1: Ni las vacías se libran.</a:t>
             </a:r>
           </a:p>
         </p:txBody>
@@ -1055,12 +1055,12 @@
           <a:lstStyle/>
           <a:p>
             <a:r>
-              <a:t>N1: Combinamos tabla y excepción. Segunda categoría, y enfrente un instituto. ¿Cuántos metros?</a:t>
-            </a:r>
-          </a:p>
-          <a:p>
-            <a:r>
-              <a:t>N2: Mira el Cuadro y no te olvides del recargo de los sitios con mucha gente.</a:t>
+              <a:t>N1: Combinamos la tabla de distancias con la excepción de los sitios sensibles. Un centro de segunda categoría tiene un instituto justo al otro lado de la valla. ¿Qué distancia exterior mínima le corresponde? Opción A, quince metros. Opción B, veinte metros. Opción C, veinticinco metros. Opción D, diez metros. Piénsalo un momento.</a:t>
+            </a:r>
+          </a:p>
+          <a:p>
+            <a:r>
+              <a:t>N2: Pista: mira primero lo que dice el Cuadro para la segunda, y no te olvides del recargo por tener enfrente un centro de enseñanza.</a:t>
             </a:r>
           </a:p>
         </p:txBody>
@@ -1130,12 +1130,12 @@
           <a:lstStyle/>
           <a:p>
             <a:r>
-              <a:t>N1: ¿De dónde salen esos metros?</a:t>
-            </a:r>
-          </a:p>
-          <a:p>
-            <a:r>
-              <a:t>N2: La segunda categoría tiene quince metros de distancia exterior. Pero un centro de enseñanza es de esos sitios sensibles que obligan a alejarse diez metros más. Quince más diez, veinticinco. El truco: primero lees la tabla, y solo después aplicas el más diez si toca.</a:t>
+              <a:t>N2: La respuesta correcta es la opción C: veinticinco metros. ¿Por qué? Porque la segunda categoría tiene quince metros de distancia exterior, pero un centro de enseñanza obliga a sumar diez metros más: quince más diez, veinticinco. El truco: primero lees la tabla, y solo después aplicas el más diez si al otro lado hay algo sensible.</a:t>
+            </a:r>
+          </a:p>
+          <a:p>
+            <a:r>
+              <a:t>N1: Primero la tabla, luego el recargo.</a:t>
             </a:r>
           </a:p>
         </p:txBody>
@@ -1805,12 +1805,12 @@
           <a:lstStyle/>
           <a:p>
             <a:r>
-              <a:t>N1: Repasamos la tabla de extintores. Solo una frase es verdad. ¿Cuál?</a:t>
-            </a:r>
-          </a:p>
-          <a:p>
-            <a:r>
-              <a:t>N2: Fíjate en la equivalencia entre el extintor grande y el pequeño.</a:t>
+              <a:t>N1: Repasamos la tabla de extintores, el Cuadro dos. Solo una de estas cuatro afirmaciones es verdad. Opción A, la tercera categoría no lleva ningún extintor. Opción B, un extintor de cuarenta y tres a, ciento ochenta y tres b se sustituye por el doble de veintiuno a, ciento trece b. Opción C, la primera categoría siempre lleva exactamente cinco extintores. Opción D, la segunda lleva más extintores que la primera. Elige la correcta.</a:t>
+            </a:r>
+          </a:p>
+          <a:p>
+            <a:r>
+              <a:t>N2: Pista: fíjate en la equivalencia entre el extintor grande y el pequeño.</a:t>
             </a:r>
           </a:p>
         </p:txBody>
@@ -1880,12 +1880,12 @@
           <a:lstStyle/>
           <a:p>
             <a:r>
-              <a:t>N1: ¿Por qué esa y no las otras?</a:t>
-            </a:r>
-          </a:p>
-          <a:p>
-            <a:r>
-              <a:t>N2: La tercera sí lleva extintores, cinco pequeños. La primera no es fija: crece por tramos según los kilos. Y la segunda siempre lleva menos que la primera, no más. La única cierta es la equivalencia: un extintor grande equivale a dos pequeños. Idea sencilla: uno grande, dos pequeños.</a:t>
+              <a:t>N2: La respuesta correcta es la opción B: un extintor de cuarenta y tres a, ciento ochenta y tres b se sustituye por el doble de veintiuno a, ciento trece b. ¿Por qué? Porque puedes cambiar cada extintor grande por los pequeños, pero poniendo como mínimo el doble. Las otras fallan: la tercera sí lleva extintores, cinco pequeños; la primera no es fija, crece por tramos según los kilos; y la segunda siempre lleva menos que la primera, no más. Idea sencilla: uno grande, dos pequeños.</a:t>
+            </a:r>
+          </a:p>
+          <a:p>
+            <a:r>
+              <a:t>N1: Uno grande equivale a dos pequeños.</a:t>
             </a:r>
           </a:p>
         </p:txBody>
@@ -2631,12 +2631,12 @@
           <a:lstStyle/>
           <a:p>
             <a:r>
-              <a:t>N1: Fórmula de capacidad a la vista. La pregunta del millón: en la letra ene, ¿qué botellas cuentas?</a:t>
-            </a:r>
-          </a:p>
-          <a:p>
-            <a:r>
-              <a:t>N2: Piensa en esa bombona que devuelves supuestamente vacía. ¿De verdad no le queda nada dentro?</a:t>
+              <a:t>N1: Pregunta de la fórmula de capacidad. Escucha bien: en la fórmula, capacidad total igual a capacidad nominal, por número de envases, por cero coma sesenta y cinco, ¿qué envases se cuentan en la letra ene? Opción A, solo los envases llenos. Opción B, solo los envases vacíos. Opción C, los llenos y los vacíos. Opción D, únicamente los de más de quince kilos. Párate un momento y elige.</a:t>
+            </a:r>
+          </a:p>
+          <a:p>
+            <a:r>
+              <a:t>N2: Pista: piensa en esa bombona que devuelves supuestamente vacía. ¿De verdad no le queda nada dentro?</a:t>
             </a:r>
           </a:p>
         </p:txBody>
